--- a/results/diversity_analysis_presentation_baseline.pptx
+++ b/results/diversity_analysis_presentation_baseline.pptx
@@ -15,9 +15,14 @@
     <p:sldId id="260" r:id="rId8"/>
     <p:sldId id="261" r:id="rId9"/>
     <p:sldId id="262" r:id="rId10"/>
-    <p:sldId id="263" r:id="rId11"/>
-    <p:sldId id="264" r:id="rId12"/>
-    <p:sldId id="265" r:id="rId13"/>
+    <p:sldId id="273" r:id="rId24"/>
+    <p:sldId id="266" r:id="rId17"/>
+    <p:sldId id="267" r:id="rId18"/>
+    <p:sldId id="268" r:id="rId19"/>
+    <p:sldId id="269" r:id="rId20"/>
+    <p:sldId id="270" r:id="rId21"/>
+    <p:sldId id="271" r:id="rId22"/>
+    <p:sldId id="272" r:id="rId23"/>
   </p:sldIdLst>
   <p:sldSz cx="9144000" cy="5143500"/>
   <p:notesSz cx="5143500" cy="9144000"/>
@@ -32,86 +37,6 @@
         <a:cs typeface="+mn-cs"/>
       </a:defRPr>
     </a:lvl1pPr>
-    <a:lvl2pPr marL="457200" algn="l" defTabSz="914400" rtl="0" eaLnBrk="1" latinLnBrk="0" hangingPunct="1">
-      <a:defRPr sz="1800" kern="1200">
-        <a:solidFill>
-          <a:schemeClr val="tx1"/>
-        </a:solidFill>
-        <a:latin typeface="+mn-lt"/>
-        <a:ea typeface="+mn-ea"/>
-        <a:cs typeface="+mn-cs"/>
-      </a:defRPr>
-    </a:lvl2pPr>
-    <a:lvl3pPr marL="914400" algn="l" defTabSz="914400" rtl="0" eaLnBrk="1" latinLnBrk="0" hangingPunct="1">
-      <a:defRPr sz="1800" kern="1200">
-        <a:solidFill>
-          <a:schemeClr val="tx1"/>
-        </a:solidFill>
-        <a:latin typeface="+mn-lt"/>
-        <a:ea typeface="+mn-ea"/>
-        <a:cs typeface="+mn-cs"/>
-      </a:defRPr>
-    </a:lvl3pPr>
-    <a:lvl4pPr marL="1371600" algn="l" defTabSz="914400" rtl="0" eaLnBrk="1" latinLnBrk="0" hangingPunct="1">
-      <a:defRPr sz="1800" kern="1200">
-        <a:solidFill>
-          <a:schemeClr val="tx1"/>
-        </a:solidFill>
-        <a:latin typeface="+mn-lt"/>
-        <a:ea typeface="+mn-ea"/>
-        <a:cs typeface="+mn-cs"/>
-      </a:defRPr>
-    </a:lvl4pPr>
-    <a:lvl5pPr marL="1828800" algn="l" defTabSz="914400" rtl="0" eaLnBrk="1" latinLnBrk="0" hangingPunct="1">
-      <a:defRPr sz="1800" kern="1200">
-        <a:solidFill>
-          <a:schemeClr val="tx1"/>
-        </a:solidFill>
-        <a:latin typeface="+mn-lt"/>
-        <a:ea typeface="+mn-ea"/>
-        <a:cs typeface="+mn-cs"/>
-      </a:defRPr>
-    </a:lvl5pPr>
-    <a:lvl6pPr marL="2286000" algn="l" defTabSz="914400" rtl="0" eaLnBrk="1" latinLnBrk="0" hangingPunct="1">
-      <a:defRPr sz="1800" kern="1200">
-        <a:solidFill>
-          <a:schemeClr val="tx1"/>
-        </a:solidFill>
-        <a:latin typeface="+mn-lt"/>
-        <a:ea typeface="+mn-ea"/>
-        <a:cs typeface="+mn-cs"/>
-      </a:defRPr>
-    </a:lvl6pPr>
-    <a:lvl7pPr marL="2743200" algn="l" defTabSz="914400" rtl="0" eaLnBrk="1" latinLnBrk="0" hangingPunct="1">
-      <a:defRPr sz="1800" kern="1200">
-        <a:solidFill>
-          <a:schemeClr val="tx1"/>
-        </a:solidFill>
-        <a:latin typeface="+mn-lt"/>
-        <a:ea typeface="+mn-ea"/>
-        <a:cs typeface="+mn-cs"/>
-      </a:defRPr>
-    </a:lvl7pPr>
-    <a:lvl8pPr marL="3200400" algn="l" defTabSz="914400" rtl="0" eaLnBrk="1" latinLnBrk="0" hangingPunct="1">
-      <a:defRPr sz="1800" kern="1200">
-        <a:solidFill>
-          <a:schemeClr val="tx1"/>
-        </a:solidFill>
-        <a:latin typeface="+mn-lt"/>
-        <a:ea typeface="+mn-ea"/>
-        <a:cs typeface="+mn-cs"/>
-      </a:defRPr>
-    </a:lvl8pPr>
-    <a:lvl9pPr marL="3657600" algn="l" defTabSz="914400" rtl="0" eaLnBrk="1" latinLnBrk="0" hangingPunct="1">
-      <a:defRPr sz="1800" kern="1200">
-        <a:solidFill>
-          <a:schemeClr val="tx1"/>
-        </a:solidFill>
-        <a:latin typeface="+mn-lt"/>
-        <a:ea typeface="+mn-ea"/>
-        <a:cs typeface="+mn-cs"/>
-      </a:defRPr>
-    </a:lvl9pPr>
   </p:defaultTextStyle>
 </p:presentation>
 </file>
@@ -3992,6 +3917,6082 @@
 </p:sld>
 </file>
 
+<file path=ppt/slides/slide11.xml><?xml version="1.0" encoding="utf-8"?>
+<p:sld xmlns:a="http://schemas.openxmlformats.org/drawingml/2006/main" xmlns:r="http://schemas.openxmlformats.org/officeDocument/2006/relationships" xmlns:p="http://schemas.openxmlformats.org/presentationml/2006/main">
+  <p:cSld>
+    <p:bg>
+      <p:bgPr>
+        <a:solidFill>
+          <a:srgbClr val="FFFFFF"/>
+        </a:solidFill>
+        <a:effectLst/>
+      </p:bgPr>
+    </p:bg>
+    <p:spTree>
+      <p:nvGrpSpPr>
+        <p:cNvPr id="1" name=""/>
+        <p:cNvGrpSpPr/>
+        <p:nvPr/>
+      </p:nvGrpSpPr>
+      <p:grpSpPr>
+        <a:xfrm>
+          <a:off x="0" y="0"/>
+          <a:ext cx="0" cy="0"/>
+          <a:chOff x="0" y="0"/>
+          <a:chExt cx="0" cy="0"/>
+        </a:xfrm>
+      </p:grpSpPr>
+      <p:sp>
+        <p:nvSpPr>
+          <p:cNvPr id="2" name="Text 0"/>
+          <p:cNvSpPr/>
+          <p:nvPr/>
+        </p:nvSpPr>
+        <p:spPr>
+          <a:xfrm>
+            <a:off x="0" y="0"/>
+            <a:ext cx="9144000" cy="650677"/>
+          </a:xfrm>
+          <a:prstGeom prst="rect">
+            <a:avLst/>
+          </a:prstGeom>
+          <a:solidFill>
+            <a:srgbClr val="1B2A4A"/>
+          </a:solidFill>
+        </p:spPr>
+        <p:txBody>
+          <a:bodyPr wrap="square" rtlCol="0" anchor="ctr"/>
+          <a:lstStyle/>
+          <a:p>
+            <a:pPr marL="0" indent="0">
+              <a:buNone/>
+            </a:pPr>
+            <a:endParaRPr lang="en-US" dirty="0"/>
+          </a:p>
+        </p:txBody>
+      </p:sp>
+      <p:sp>
+        <p:nvSpPr>
+          <p:cNvPr id="3" name="Text 1"/>
+          <p:cNvSpPr/>
+          <p:nvPr/>
+        </p:nvSpPr>
+        <p:spPr>
+          <a:xfrm>
+            <a:off x="507950" y="177701"/>
+            <a:ext cx="8290661" cy="295275"/>
+          </a:xfrm>
+          <a:prstGeom prst="rect">
+            <a:avLst/>
+          </a:prstGeom>
+          <a:noFill/>
+        </p:spPr>
+        <p:txBody>
+          <a:bodyPr wrap="square" lIns="0" tIns="0" rIns="0" bIns="0" rtlCol="0" anchor="t"/>
+          <a:lstStyle/>
+          <a:p>
+            <a:pPr marL="0" indent="0" algn="l">
+              <a:buNone/>
+            </a:pPr>
+            <a:r>
+              <a:rPr lang="en-US" sz="2000" b="1" dirty="0">
+                <a:solidFill>
+                  <a:srgbClr val="FFFFFF"/>
+                </a:solidFill>
+                <a:latin typeface="Arial" panose="020B0604020202090204" pitchFamily="34" charset="0"/>
+                <a:ea typeface="Arial" panose="020B0604020202090204" pitchFamily="34" charset="-122"/>
+                <a:cs typeface="Arial" panose="020B0604020202090204" pitchFamily="34" charset="-120"/>
+              </a:rPr>
+              <a:t>Novelty Analysis: Distance from Existing Literature</a:t>
+            </a:r>
+            <a:endParaRPr lang="en-US" sz="2000" dirty="0"/>
+          </a:p>
+        </p:txBody>
+      </p:sp>
+      <p:sp>
+        <p:nvSpPr>
+          <p:cNvPr id="4" name="Text 2"/>
+          <p:cNvSpPr/>
+          <p:nvPr/>
+        </p:nvSpPr>
+        <p:spPr>
+          <a:xfrm>
+            <a:off x="507950" y="853827"/>
+            <a:ext cx="8290661" cy="171450"/>
+          </a:xfrm>
+          <a:prstGeom prst="rect">
+            <a:avLst/>
+          </a:prstGeom>
+          <a:noFill/>
+        </p:spPr>
+        <p:txBody>
+          <a:bodyPr wrap="square" lIns="0" tIns="0" rIns="0" bIns="0" rtlCol="0" anchor="t"/>
+          <a:lstStyle/>
+          <a:p>
+            <a:pPr marL="0" indent="0" algn="l">
+              <a:spcAft>
+                <a:spcPts val="600"/>
+              </a:spcAft>
+              <a:buNone/>
+            </a:pPr>
+            <a:r>
+              <a:rPr lang="en-US" sz="1200" b="1" dirty="0">
+                <a:solidFill>
+                  <a:srgbClr val="1B2A4A"/>
+                </a:solidFill>
+                <a:latin typeface="Arial" panose="020B0604020202090204" pitchFamily="34" charset="0"/>
+                <a:ea typeface="Arial" panose="020B0604020202090204" pitchFamily="34" charset="-122"/>
+                <a:cs typeface="Arial" panose="020B0604020202090204" pitchFamily="34" charset="-120"/>
+              </a:rPr>
+              <a:t>Novelty = mean cosine distance to 10 nearest neighbors in a corpus of 350 PubMed articles</a:t>
+            </a:r>
+            <a:endParaRPr lang="en-US" sz="1200" dirty="0"/>
+          </a:p>
+        </p:txBody>
+      </p:sp>
+      <p:sp>
+        <p:nvSpPr>
+          <p:cNvPr id="5" name="Text 3"/>
+          <p:cNvSpPr/>
+          <p:nvPr/>
+        </p:nvSpPr>
+        <p:spPr>
+          <a:xfrm>
+            <a:off x="507950" y="1101477"/>
+            <a:ext cx="444401" cy="25301"/>
+          </a:xfrm>
+          <a:prstGeom prst="rect">
+            <a:avLst/>
+          </a:prstGeom>
+          <a:solidFill>
+            <a:srgbClr val="E8505B"/>
+          </a:solidFill>
+        </p:spPr>
+        <p:txBody>
+          <a:bodyPr wrap="square" rtlCol="0" anchor="ctr"/>
+          <a:lstStyle/>
+          <a:p>
+            <a:pPr marL="0" indent="0">
+              <a:buNone/>
+            </a:pPr>
+            <a:endParaRPr lang="en-US" dirty="0"/>
+          </a:p>
+        </p:txBody>
+      </p:sp>
+      <p:pic>
+        <p:nvPicPr>
+          <p:cNvPr id="6" name="Picture 6"/>
+          <p:cNvPicPr>
+            <a:picLocks noChangeAspect="1"/>
+          </p:cNvPicPr>
+          <p:nvPr/>
+        </p:nvPicPr>
+        <p:blipFill>
+          <a:blip r:embed="rId2"/>
+          <a:stretch>
+            <a:fillRect/>
+          </a:stretch>
+        </p:blipFill>
+        <p:spPr>
+          <a:xfrm>
+            <a:off x="507950" y="1253728"/>
+            <a:ext cx="4200000" cy="3150000"/>
+          </a:xfrm>
+          <a:prstGeom prst="rect">
+            <a:avLst/>
+          </a:prstGeom>
+        </p:spPr>
+      </p:pic>
+      <p:sp>
+        <p:nvSpPr>
+          <p:cNvPr id="7" name="Text 5"/>
+          <p:cNvSpPr/>
+          <p:nvPr/>
+        </p:nvSpPr>
+        <p:spPr>
+          <a:xfrm>
+            <a:off x="4850000" y="1253728"/>
+            <a:ext cx="3937099" cy="1050000"/>
+          </a:xfrm>
+          <a:prstGeom prst="roundRect">
+            <a:avLst>
+              <a:gd name="adj" fmla="val 3645"/>
+            </a:avLst>
+          </a:prstGeom>
+          <a:solidFill>
+            <a:srgbClr val="FDF8F8"/>
+          </a:solidFill>
+        </p:spPr>
+        <p:txBody>
+          <a:bodyPr wrap="square" rtlCol="0" anchor="ctr"/>
+          <a:lstStyle/>
+          <a:p>
+            <a:pPr marL="0" indent="0">
+              <a:buNone/>
+            </a:pPr>
+            <a:endParaRPr lang="en-US" dirty="0"/>
+          </a:p>
+        </p:txBody>
+      </p:sp>
+      <p:sp>
+        <p:nvSpPr>
+          <p:cNvPr id="8" name="Shape 6"/>
+          <p:cNvSpPr/>
+          <p:nvPr/>
+        </p:nvSpPr>
+        <p:spPr>
+          <a:xfrm>
+            <a:off x="4850000" y="1272778"/>
+            <a:ext cx="3937099" cy="0"/>
+          </a:xfrm>
+          <a:prstGeom prst="line">
+            <a:avLst/>
+          </a:prstGeom>
+          <a:noFill/>
+          <a:ln w="38100">
+            <a:solidFill>
+              <a:srgbClr val="E8505B"/>
+            </a:solidFill>
+            <a:prstDash val="solid"/>
+          </a:ln>
+        </p:spPr>
+      </p:sp>
+      <p:sp>
+        <p:nvSpPr>
+          <p:cNvPr id="9" name="Text 7"/>
+          <p:cNvSpPr/>
+          <p:nvPr/>
+        </p:nvSpPr>
+        <p:spPr>
+          <a:xfrm>
+            <a:off x="5002400" y="1380679"/>
+            <a:ext cx="3704945" cy="152400"/>
+          </a:xfrm>
+          <a:prstGeom prst="rect">
+            <a:avLst/>
+          </a:prstGeom>
+          <a:noFill/>
+        </p:spPr>
+        <p:txBody>
+          <a:bodyPr wrap="square" lIns="0" tIns="0" rIns="0" bIns="0" rtlCol="0" anchor="t"/>
+          <a:lstStyle/>
+          <a:p>
+            <a:pPr marL="0" indent="0" algn="l">
+              <a:lnSpc>
+                <a:spcPts val="1285"/>
+              </a:lnSpc>
+              <a:spcAft>
+                <a:spcPts val="400"/>
+              </a:spcAft>
+              <a:buNone/>
+            </a:pPr>
+            <a:r>
+              <a:rPr lang="en-US" sz="1100" b="1" dirty="0">
+                <a:solidFill>
+                  <a:srgbClr val="1B2A4A"/>
+                </a:solidFill>
+                <a:latin typeface="Arial" panose="020B0604020202090204" pitchFamily="34" charset="0"/>
+                <a:ea typeface="Arial" panose="020B0604020202090204" pitchFamily="34" charset="-122"/>
+                <a:cs typeface="Arial" panose="020B0604020202090204" pitchFamily="34" charset="-120"/>
+              </a:rPr>
+              <a:t>Human proposals are more novel than AI</a:t>
+            </a:r>
+            <a:endParaRPr lang="en-US" sz="1100" dirty="0"/>
+          </a:p>
+        </p:txBody>
+      </p:sp>
+      <p:sp>
+        <p:nvSpPr>
+          <p:cNvPr id="10" name="Text 8"/>
+          <p:cNvSpPr/>
+          <p:nvPr/>
+        </p:nvSpPr>
+        <p:spPr>
+          <a:xfrm>
+            <a:off x="5002400" y="1581299"/>
+            <a:ext cx="3704945" cy="570000"/>
+          </a:xfrm>
+          <a:prstGeom prst="rect">
+            <a:avLst/>
+          </a:prstGeom>
+          <a:noFill/>
+        </p:spPr>
+        <p:txBody>
+          <a:bodyPr wrap="square" lIns="0" tIns="0" rIns="0" bIns="0" rtlCol="0" anchor="t"/>
+          <a:lstStyle/>
+          <a:p>
+            <a:pPr marL="0" indent="0" algn="l">
+              <a:lnSpc>
+                <a:spcPts val="1285"/>
+              </a:lnSpc>
+              <a:spcAft>
+                <a:spcPts val="400"/>
+              </a:spcAft>
+              <a:buNone/>
+            </a:pPr>
+            <a:r>
+              <a:rPr lang="en-US" sz="900" dirty="0">
+                <a:solidFill>
+                  <a:srgbClr val="2C3E50"/>
+                </a:solidFill>
+                <a:latin typeface="Arial" panose="020B0604020202090204" pitchFamily="34" charset="0"/>
+                <a:ea typeface="Arial" panose="020B0604020202090204" pitchFamily="34" charset="-122"/>
+                <a:cs typeface="Arial" panose="020B0604020202090204" pitchFamily="34" charset="-120"/>
+              </a:rPr>
+              <a:t>Human mean novelty: 0.151 vs AI combined: 0.117 (Cliff’s d = −0.34, medium effect, p = 0.014). Human proposals sit further from published literature, suggesting they draw on less well-trodden ideas.</a:t>
+            </a:r>
+            <a:endParaRPr lang="en-US" sz="900" dirty="0"/>
+          </a:p>
+        </p:txBody>
+      </p:sp>
+      <p:sp>
+        <p:nvSpPr>
+          <p:cNvPr id="11" name="Text 9"/>
+          <p:cNvSpPr/>
+          <p:nvPr/>
+        </p:nvSpPr>
+        <p:spPr>
+          <a:xfrm>
+            <a:off x="4850000" y="2430000"/>
+            <a:ext cx="3937099" cy="760000"/>
+          </a:xfrm>
+          <a:prstGeom prst="roundRect">
+            <a:avLst>
+              <a:gd name="adj" fmla="val 3645"/>
+            </a:avLst>
+          </a:prstGeom>
+          <a:solidFill>
+            <a:srgbClr val="F7F9FC"/>
+          </a:solidFill>
+        </p:spPr>
+        <p:txBody>
+          <a:bodyPr wrap="square" rtlCol="0" anchor="ctr"/>
+          <a:lstStyle/>
+          <a:p>
+            <a:pPr marL="0" indent="0">
+              <a:buNone/>
+            </a:pPr>
+            <a:endParaRPr lang="en-US" dirty="0"/>
+          </a:p>
+        </p:txBody>
+      </p:sp>
+      <p:sp>
+        <p:nvSpPr>
+          <p:cNvPr id="12" name="Shape 10"/>
+          <p:cNvSpPr/>
+          <p:nvPr/>
+        </p:nvSpPr>
+        <p:spPr>
+          <a:xfrm>
+            <a:off x="4850000" y="2449050"/>
+            <a:ext cx="3937099" cy="0"/>
+          </a:xfrm>
+          <a:prstGeom prst="line">
+            <a:avLst/>
+          </a:prstGeom>
+          <a:noFill/>
+          <a:ln w="38100">
+            <a:solidFill>
+              <a:srgbClr val="2E86AB"/>
+            </a:solidFill>
+            <a:prstDash val="solid"/>
+          </a:ln>
+        </p:spPr>
+      </p:sp>
+      <p:sp>
+        <p:nvSpPr>
+          <p:cNvPr id="13" name="Text 11"/>
+          <p:cNvSpPr/>
+          <p:nvPr/>
+        </p:nvSpPr>
+        <p:spPr>
+          <a:xfrm>
+            <a:off x="5002400" y="2556272"/>
+            <a:ext cx="3704945" cy="152400"/>
+          </a:xfrm>
+          <a:prstGeom prst="rect">
+            <a:avLst/>
+          </a:prstGeom>
+          <a:noFill/>
+        </p:spPr>
+        <p:txBody>
+          <a:bodyPr wrap="square" lIns="0" tIns="0" rIns="0" bIns="0" rtlCol="0" anchor="t"/>
+          <a:lstStyle/>
+          <a:p>
+            <a:pPr marL="0" indent="0" algn="l">
+              <a:lnSpc>
+                <a:spcPts val="1285"/>
+              </a:lnSpc>
+              <a:spcAft>
+                <a:spcPts val="400"/>
+              </a:spcAft>
+              <a:buNone/>
+            </a:pPr>
+            <a:r>
+              <a:rPr lang="en-US" sz="1100" b="1" dirty="0">
+                <a:solidFill>
+                  <a:srgbClr val="1B2A4A"/>
+                </a:solidFill>
+                <a:latin typeface="Arial" panose="020B0604020202090204" pitchFamily="34" charset="0"/>
+                <a:ea typeface="Arial" panose="020B0604020202090204" pitchFamily="34" charset="-122"/>
+                <a:cs typeface="Arial" panose="020B0604020202090204" pitchFamily="34" charset="-120"/>
+              </a:rPr>
+              <a:t>Claude is closest to human novelty</a:t>
+            </a:r>
+            <a:endParaRPr lang="en-US" sz="1100" dirty="0"/>
+          </a:p>
+        </p:txBody>
+      </p:sp>
+      <p:sp>
+        <p:nvSpPr>
+          <p:cNvPr id="14" name="Text 12"/>
+          <p:cNvSpPr/>
+          <p:nvPr/>
+        </p:nvSpPr>
+        <p:spPr>
+          <a:xfrm>
+            <a:off x="5002400" y="2730000"/>
+            <a:ext cx="3704945" cy="400000"/>
+          </a:xfrm>
+          <a:prstGeom prst="rect">
+            <a:avLst/>
+          </a:prstGeom>
+          <a:noFill/>
+        </p:spPr>
+        <p:txBody>
+          <a:bodyPr wrap="square" lIns="0" tIns="0" rIns="0" bIns="0" rtlCol="0" anchor="t"/>
+          <a:lstStyle/>
+          <a:p>
+            <a:pPr marL="0" indent="0" algn="l">
+              <a:lnSpc>
+                <a:spcPts val="1285"/>
+              </a:lnSpc>
+              <a:spcAft>
+                <a:spcPts val="400"/>
+              </a:spcAft>
+              <a:buNone/>
+            </a:pPr>
+            <a:r>
+              <a:rPr lang="en-US" sz="900" dirty="0">
+                <a:solidFill>
+                  <a:srgbClr val="2C3E50"/>
+                </a:solidFill>
+                <a:latin typeface="Arial" panose="020B0604020202090204" pitchFamily="34" charset="0"/>
+                <a:ea typeface="Arial" panose="020B0604020202090204" pitchFamily="34" charset="-122"/>
+                <a:cs typeface="Arial" panose="020B0604020202090204" pitchFamily="34" charset="-120"/>
+              </a:rPr>
+              <a:t>Claude: d = −0.21 (small, p = 0.22, not significant). Gemini: d = −0.42 (medium, p = 0.016). GPT-5.2: d = −0.40 (medium, p = 0.020). The same model that shows greatest internal diversity also produces the most novel output.</a:t>
+            </a:r>
+            <a:endParaRPr lang="en-US" sz="900" dirty="0"/>
+          </a:p>
+        </p:txBody>
+      </p:sp>
+      <p:sp>
+        <p:nvSpPr>
+          <p:cNvPr id="15" name="Text 13"/>
+          <p:cNvSpPr/>
+          <p:nvPr/>
+        </p:nvSpPr>
+        <p:spPr>
+          <a:xfrm>
+            <a:off x="4850000" y="3310000"/>
+            <a:ext cx="3937099" cy="760000"/>
+          </a:xfrm>
+          <a:prstGeom prst="roundRect">
+            <a:avLst>
+              <a:gd name="adj" fmla="val 3645"/>
+            </a:avLst>
+          </a:prstGeom>
+          <a:solidFill>
+            <a:srgbClr val="F0F4F8"/>
+          </a:solidFill>
+        </p:spPr>
+        <p:txBody>
+          <a:bodyPr wrap="square" rtlCol="0" anchor="ctr"/>
+          <a:lstStyle/>
+          <a:p>
+            <a:pPr marL="0" indent="0">
+              <a:buNone/>
+            </a:pPr>
+            <a:endParaRPr lang="en-US" dirty="0"/>
+          </a:p>
+        </p:txBody>
+      </p:sp>
+      <p:sp>
+        <p:nvSpPr>
+          <p:cNvPr id="16" name="Shape 14"/>
+          <p:cNvSpPr/>
+          <p:nvPr/>
+        </p:nvSpPr>
+        <p:spPr>
+          <a:xfrm>
+            <a:off x="4850000" y="3329050"/>
+            <a:ext cx="3937099" cy="0"/>
+          </a:xfrm>
+          <a:prstGeom prst="line">
+            <a:avLst/>
+          </a:prstGeom>
+          <a:noFill/>
+          <a:ln w="38100">
+            <a:solidFill>
+              <a:srgbClr val="16A085"/>
+            </a:solidFill>
+            <a:prstDash val="solid"/>
+          </a:ln>
+        </p:spPr>
+      </p:sp>
+      <p:sp>
+        <p:nvSpPr>
+          <p:cNvPr id="17" name="Text 15"/>
+          <p:cNvSpPr/>
+          <p:nvPr/>
+        </p:nvSpPr>
+        <p:spPr>
+          <a:xfrm>
+            <a:off x="5002400" y="3436272"/>
+            <a:ext cx="3704945" cy="152400"/>
+          </a:xfrm>
+          <a:prstGeom prst="rect">
+            <a:avLst/>
+          </a:prstGeom>
+          <a:noFill/>
+        </p:spPr>
+        <p:txBody>
+          <a:bodyPr wrap="square" lIns="0" tIns="0" rIns="0" bIns="0" rtlCol="0" anchor="t"/>
+          <a:lstStyle/>
+          <a:p>
+            <a:pPr marL="0" indent="0" algn="l">
+              <a:lnSpc>
+                <a:spcPts val="1285"/>
+              </a:lnSpc>
+              <a:spcAft>
+                <a:spcPts val="400"/>
+              </a:spcAft>
+              <a:buNone/>
+            </a:pPr>
+            <a:r>
+              <a:rPr lang="en-US" sz="1100" b="1" dirty="0">
+                <a:solidFill>
+                  <a:srgbClr val="1B2A4A"/>
+                </a:solidFill>
+                <a:latin typeface="Arial" panose="020B0604020202090204" pitchFamily="34" charset="0"/>
+                <a:ea typeface="Arial" panose="020B0604020202090204" pitchFamily="34" charset="-122"/>
+                <a:cs typeface="Arial" panose="020B0604020202090204" pitchFamily="34" charset="-120"/>
+              </a:rPr>
+              <a:t>Most vs. least novel proposals</a:t>
+            </a:r>
+            <a:endParaRPr lang="en-US" sz="1100" dirty="0"/>
+          </a:p>
+        </p:txBody>
+      </p:sp>
+      <p:sp>
+        <p:nvSpPr>
+          <p:cNvPr id="18" name="Text 16"/>
+          <p:cNvSpPr/>
+          <p:nvPr/>
+        </p:nvSpPr>
+        <p:spPr>
+          <a:xfrm>
+            <a:off x="5002400" y="3610000"/>
+            <a:ext cx="3704945" cy="400000"/>
+          </a:xfrm>
+          <a:prstGeom prst="rect">
+            <a:avLst/>
+          </a:prstGeom>
+          <a:noFill/>
+        </p:spPr>
+        <p:txBody>
+          <a:bodyPr wrap="square" lIns="0" tIns="0" rIns="0" bIns="0" rtlCol="0" anchor="t"/>
+          <a:lstStyle/>
+          <a:p>
+            <a:pPr marL="0" indent="0" algn="l">
+              <a:lnSpc>
+                <a:spcPts val="1285"/>
+              </a:lnSpc>
+              <a:spcAft>
+                <a:spcPts val="400"/>
+              </a:spcAft>
+              <a:buNone/>
+            </a:pPr>
+            <a:r>
+              <a:rPr lang="en-US" sz="900" dirty="0">
+                <a:solidFill>
+                  <a:srgbClr val="2C3E50"/>
+                </a:solidFill>
+                <a:latin typeface="Arial" panose="020B0604020202090204" pitchFamily="34" charset="0"/>
+                <a:ea typeface="Arial" panose="020B0604020202090204" pitchFamily="34" charset="-122"/>
+                <a:cs typeface="Arial" panose="020B0604020202090204" pitchFamily="34" charset="-120"/>
+              </a:rPr>
+              <a:t>Most novel human: “Cytokinetic Bottlenecks of Heat Waves” (0.260). Least novel AI: a Gemini antibiotic resistance proposal (0.059), nearly overlapping published work. AI’s lower novelty may reflect reliance on training-data-dominant framings.</a:t>
+            </a:r>
+            <a:endParaRPr lang="en-US" sz="900" dirty="0"/>
+          </a:p>
+        </p:txBody>
+      </p:sp>
+    </p:spTree>
+  </p:cSld>
+  <p:clrMapOvr>
+    <a:masterClrMapping/>
+  </p:clrMapOvr>
+</p:sld>
+</file>
+
+<file path=ppt/slides/slide12.xml><?xml version="1.0" encoding="utf-8"?>
+<p:sld xmlns:a="http://schemas.openxmlformats.org/drawingml/2006/main" xmlns:r="http://schemas.openxmlformats.org/officeDocument/2006/relationships" xmlns:p="http://schemas.openxmlformats.org/presentationml/2006/main">
+  <p:cSld>
+    <p:bg>
+      <p:bgPr>
+        <a:solidFill>
+          <a:srgbClr val="FFFFFF"/>
+        </a:solidFill>
+        <a:effectLst/>
+      </p:bgPr>
+    </p:bg>
+    <p:spTree>
+      <p:nvGrpSpPr>
+        <p:cNvPr id="1" name=""/>
+        <p:cNvGrpSpPr/>
+        <p:nvPr/>
+      </p:nvGrpSpPr>
+      <p:grpSpPr>
+        <a:xfrm>
+          <a:off x="0" y="0"/>
+          <a:ext cx="0" cy="0"/>
+          <a:chOff x="0" y="0"/>
+          <a:chExt cx="0" cy="0"/>
+        </a:xfrm>
+      </p:grpSpPr>
+      <p:sp>
+        <p:nvSpPr>
+          <p:cNvPr id="2" name="Text 0"/>
+          <p:cNvSpPr/>
+          <p:nvPr/>
+        </p:nvSpPr>
+        <p:spPr>
+          <a:xfrm>
+            <a:off x="0" y="0"/>
+            <a:ext cx="9144000" cy="650677"/>
+          </a:xfrm>
+          <a:prstGeom prst="rect">
+            <a:avLst/>
+          </a:prstGeom>
+          <a:solidFill>
+            <a:srgbClr val="1B2A4A"/>
+          </a:solidFill>
+        </p:spPr>
+        <p:txBody>
+          <a:bodyPr wrap="square" rtlCol="0" anchor="ctr"/>
+          <a:lstStyle/>
+          <a:p>
+            <a:pPr marL="0" indent="0">
+              <a:buNone/>
+            </a:pPr>
+            <a:endParaRPr lang="en-US" dirty="0"/>
+          </a:p>
+        </p:txBody>
+      </p:sp>
+      <p:sp>
+        <p:nvSpPr>
+          <p:cNvPr id="3" name="Text 1"/>
+          <p:cNvSpPr/>
+          <p:nvPr/>
+        </p:nvSpPr>
+        <p:spPr>
+          <a:xfrm>
+            <a:off x="507950" y="177701"/>
+            <a:ext cx="8290661" cy="295275"/>
+          </a:xfrm>
+          <a:prstGeom prst="rect">
+            <a:avLst/>
+          </a:prstGeom>
+          <a:noFill/>
+        </p:spPr>
+        <p:txBody>
+          <a:bodyPr wrap="square" lIns="0" tIns="0" rIns="0" bIns="0" rtlCol="0" anchor="t"/>
+          <a:lstStyle/>
+          <a:p>
+            <a:pPr marL="0" indent="0" algn="l">
+              <a:buNone/>
+            </a:pPr>
+            <a:r>
+              <a:rPr lang="en-US" sz="2000" b="1" dirty="0">
+                <a:solidFill>
+                  <a:srgbClr val="FFFFFF"/>
+                </a:solidFill>
+                <a:latin typeface="Arial" panose="020B0604020202090204" pitchFamily="34" charset="0"/>
+                <a:ea typeface="Arial" panose="020B0604020202090204" pitchFamily="34" charset="-122"/>
+                <a:cs typeface="Arial" panose="020B0604020202090204" pitchFamily="34" charset="-120"/>
+              </a:rPr>
+              <a:t>Novelty in Embedding Space</a:t>
+            </a:r>
+            <a:endParaRPr lang="en-US" sz="2000" dirty="0"/>
+          </a:p>
+        </p:txBody>
+      </p:sp>
+      <p:sp>
+        <p:nvSpPr>
+          <p:cNvPr id="4" name="Text 2"/>
+          <p:cNvSpPr/>
+          <p:nvPr/>
+        </p:nvSpPr>
+        <p:spPr>
+          <a:xfrm>
+            <a:off x="507950" y="853827"/>
+            <a:ext cx="8290661" cy="171450"/>
+          </a:xfrm>
+          <a:prstGeom prst="rect">
+            <a:avLst/>
+          </a:prstGeom>
+          <a:noFill/>
+        </p:spPr>
+        <p:txBody>
+          <a:bodyPr wrap="square" lIns="0" tIns="0" rIns="0" bIns="0" rtlCol="0" anchor="t"/>
+          <a:lstStyle/>
+          <a:p>
+            <a:pPr marL="0" indent="0" algn="l">
+              <a:spcAft>
+                <a:spcPts val="600"/>
+              </a:spcAft>
+              <a:buNone/>
+            </a:pPr>
+            <a:r>
+              <a:rPr lang="en-US" sz="1200" b="1" dirty="0">
+                <a:solidFill>
+                  <a:srgbClr val="1B2A4A"/>
+                </a:solidFill>
+                <a:latin typeface="Arial" panose="020B0604020202090204" pitchFamily="34" charset="0"/>
+                <a:ea typeface="Arial" panose="020B0604020202090204" pitchFamily="34" charset="-122"/>
+                <a:cs typeface="Arial" panose="020B0604020202090204" pitchFamily="34" charset="-120"/>
+              </a:rPr>
+              <a:t>Proposals (colored) projected alongside 350 PubMed articles (gray) via UMAP</a:t>
+            </a:r>
+            <a:endParaRPr lang="en-US" sz="1200" dirty="0"/>
+          </a:p>
+        </p:txBody>
+      </p:sp>
+      <p:sp>
+        <p:nvSpPr>
+          <p:cNvPr id="5" name="Text 3"/>
+          <p:cNvSpPr/>
+          <p:nvPr/>
+        </p:nvSpPr>
+        <p:spPr>
+          <a:xfrm>
+            <a:off x="507950" y="1101477"/>
+            <a:ext cx="444401" cy="25301"/>
+          </a:xfrm>
+          <a:prstGeom prst="rect">
+            <a:avLst/>
+          </a:prstGeom>
+          <a:solidFill>
+            <a:srgbClr val="E8505B"/>
+          </a:solidFill>
+        </p:spPr>
+        <p:txBody>
+          <a:bodyPr wrap="square" rtlCol="0" anchor="ctr"/>
+          <a:lstStyle/>
+          <a:p>
+            <a:pPr marL="0" indent="0">
+              <a:buNone/>
+            </a:pPr>
+            <a:endParaRPr lang="en-US" dirty="0"/>
+          </a:p>
+        </p:txBody>
+      </p:sp>
+      <p:pic>
+        <p:nvPicPr>
+          <p:cNvPr id="6" name="Picture 6"/>
+          <p:cNvPicPr>
+            <a:picLocks noChangeAspect="1"/>
+          </p:cNvPicPr>
+          <p:nvPr/>
+        </p:nvPicPr>
+        <p:blipFill>
+          <a:blip r:embed="rId2"/>
+          <a:stretch>
+            <a:fillRect/>
+          </a:stretch>
+        </p:blipFill>
+        <p:spPr>
+          <a:xfrm>
+            <a:off x="507950" y="1253728"/>
+            <a:ext cx="4200000" cy="3400000"/>
+          </a:xfrm>
+          <a:prstGeom prst="rect">
+            <a:avLst/>
+          </a:prstGeom>
+        </p:spPr>
+      </p:pic>
+      <p:sp>
+        <p:nvSpPr>
+          <p:cNvPr id="7" name="Text 5"/>
+          <p:cNvSpPr/>
+          <p:nvPr/>
+        </p:nvSpPr>
+        <p:spPr>
+          <a:xfrm>
+            <a:off x="4850000" y="1253728"/>
+            <a:ext cx="3937099" cy="200000"/>
+          </a:xfrm>
+          <a:prstGeom prst="rect">
+            <a:avLst/>
+          </a:prstGeom>
+          <a:noFill/>
+        </p:spPr>
+        <p:txBody>
+          <a:bodyPr wrap="square" lIns="0" tIns="0" rIns="0" bIns="0" rtlCol="0" anchor="t"/>
+          <a:lstStyle/>
+          <a:p>
+            <a:pPr marL="0" indent="0" algn="l">
+              <a:lnSpc>
+                <a:spcPts val="1600"/>
+              </a:lnSpc>
+              <a:spcAft>
+                <a:spcPts val="400"/>
+              </a:spcAft>
+              <a:buNone/>
+            </a:pPr>
+            <a:r>
+              <a:rPr lang="en-US" sz="1200" b="1" dirty="0">
+                <a:solidFill>
+                  <a:srgbClr val="1B2A4A"/>
+                </a:solidFill>
+                <a:latin typeface="Arial" panose="020B0604020202090204" pitchFamily="34" charset="0"/>
+                <a:ea typeface="Arial" panose="020B0604020202090204" pitchFamily="34" charset="-122"/>
+                <a:cs typeface="Arial" panose="020B0604020202090204" pitchFamily="34" charset="-120"/>
+              </a:rPr>
+              <a:t>Key observations</a:t>
+            </a:r>
+            <a:endParaRPr lang="en-US" sz="1200" dirty="0"/>
+          </a:p>
+        </p:txBody>
+      </p:sp>
+      <p:sp>
+        <p:nvSpPr>
+          <p:cNvPr id="8" name="Text 6"/>
+          <p:cNvSpPr/>
+          <p:nvPr/>
+        </p:nvSpPr>
+        <p:spPr>
+          <a:xfrm>
+            <a:off x="4850000" y="1530000"/>
+            <a:ext cx="3937099" cy="420000"/>
+          </a:xfrm>
+          <a:prstGeom prst="rect">
+            <a:avLst/>
+          </a:prstGeom>
+          <a:noFill/>
+        </p:spPr>
+        <p:txBody>
+          <a:bodyPr wrap="square" lIns="0" tIns="0" rIns="0" bIns="0" rtlCol="0" anchor="t"/>
+          <a:lstStyle/>
+          <a:p>
+            <a:pPr marL="0" indent="0" algn="l">
+              <a:lnSpc>
+                <a:spcPts val="1285"/>
+              </a:lnSpc>
+              <a:spcAft>
+                <a:spcPts val="400"/>
+              </a:spcAft>
+              <a:buNone/>
+            </a:pPr>
+            <a:r>
+              <a:rPr lang="en-US" sz="900" dirty="0">
+                <a:solidFill>
+                  <a:srgbClr val="2C3E50"/>
+                </a:solidFill>
+                <a:latin typeface="Arial" panose="020B0604020202090204" pitchFamily="34" charset="0"/>
+                <a:ea typeface="Arial" panose="020B0604020202090204" pitchFamily="34" charset="-122"/>
+                <a:cs typeface="Arial" panose="020B0604020202090204" pitchFamily="34" charset="-120"/>
+              </a:rPr>
+              <a:t>Human proposals (gray markers) sit at the periphery of the literature cluster, occupying regions where fewer published articles exist. This is consistent with the novelty scores: humans venture further from the established literature.</a:t>
+            </a:r>
+            <a:endParaRPr lang="en-US" sz="900" dirty="0"/>
+          </a:p>
+        </p:txBody>
+      </p:sp>
+      <p:sp>
+        <p:nvSpPr>
+          <p:cNvPr id="9" name="Text 7"/>
+          <p:cNvSpPr/>
+          <p:nvPr/>
+        </p:nvSpPr>
+        <p:spPr>
+          <a:xfrm>
+            <a:off x="4850000" y="2050000"/>
+            <a:ext cx="3937099" cy="420000"/>
+          </a:xfrm>
+          <a:prstGeom prst="rect">
+            <a:avLst/>
+          </a:prstGeom>
+          <a:noFill/>
+        </p:spPr>
+        <p:txBody>
+          <a:bodyPr wrap="square" lIns="0" tIns="0" rIns="0" bIns="0" rtlCol="0" anchor="t"/>
+          <a:lstStyle/>
+          <a:p>
+            <a:pPr marL="0" indent="0" algn="l">
+              <a:lnSpc>
+                <a:spcPts val="1285"/>
+              </a:lnSpc>
+              <a:spcAft>
+                <a:spcPts val="400"/>
+              </a:spcAft>
+              <a:buNone/>
+            </a:pPr>
+            <a:r>
+              <a:rPr lang="en-US" sz="900" dirty="0">
+                <a:solidFill>
+                  <a:srgbClr val="2C3E50"/>
+                </a:solidFill>
+                <a:latin typeface="Arial" panose="020B0604020202090204" pitchFamily="34" charset="0"/>
+                <a:ea typeface="Arial" panose="020B0604020202090204" pitchFamily="34" charset="-122"/>
+                <a:cs typeface="Arial" panose="020B0604020202090204" pitchFamily="34" charset="-120"/>
+              </a:rPr>
+              <a:t>AI proposals (colored markers) tend to concentrate closer to dense literature regions, particularly GPT-5.2 and Gemini. Claude proposals show more scatter, with some overlapping human territory, consistent with its non-significant novelty difference.</a:t>
+            </a:r>
+            <a:endParaRPr lang="en-US" sz="900" dirty="0"/>
+          </a:p>
+        </p:txBody>
+      </p:sp>
+      <p:sp>
+        <p:nvSpPr>
+          <p:cNvPr id="10" name="Text 8"/>
+          <p:cNvSpPr/>
+          <p:nvPr/>
+        </p:nvSpPr>
+        <p:spPr>
+          <a:xfrm>
+            <a:off x="4850000" y="2600000"/>
+            <a:ext cx="3937099" cy="500000"/>
+          </a:xfrm>
+          <a:prstGeom prst="roundRect">
+            <a:avLst>
+              <a:gd name="adj" fmla="val 3645"/>
+            </a:avLst>
+          </a:prstGeom>
+          <a:solidFill>
+            <a:srgbClr val="FDF8F8"/>
+          </a:solidFill>
+        </p:spPr>
+        <p:txBody>
+          <a:bodyPr wrap="square" rtlCol="0" anchor="ctr"/>
+          <a:lstStyle/>
+          <a:p>
+            <a:pPr marL="0" indent="0">
+              <a:buNone/>
+            </a:pPr>
+            <a:endParaRPr lang="en-US" dirty="0"/>
+          </a:p>
+        </p:txBody>
+      </p:sp>
+      <p:sp>
+        <p:nvSpPr>
+          <p:cNvPr id="11" name="Text 9"/>
+          <p:cNvSpPr/>
+          <p:nvPr/>
+        </p:nvSpPr>
+        <p:spPr>
+          <a:xfrm>
+            <a:off x="5002400" y="2680000"/>
+            <a:ext cx="3704945" cy="380000"/>
+          </a:xfrm>
+          <a:prstGeom prst="rect">
+            <a:avLst/>
+          </a:prstGeom>
+          <a:noFill/>
+        </p:spPr>
+        <p:txBody>
+          <a:bodyPr wrap="square" lIns="0" tIns="0" rIns="0" bIns="0" rtlCol="0" anchor="t"/>
+          <a:lstStyle/>
+          <a:p>
+            <a:pPr marL="0" indent="0" algn="l">
+              <a:lnSpc>
+                <a:spcPts val="1285"/>
+              </a:lnSpc>
+              <a:spcAft>
+                <a:spcPts val="400"/>
+              </a:spcAft>
+              <a:buNone/>
+            </a:pPr>
+            <a:r>
+              <a:rPr lang="en-US" sz="900" dirty="0">
+                <a:solidFill>
+                  <a:srgbClr val="E8505B"/>
+                </a:solidFill>
+                <a:latin typeface="Arial" panose="020B0604020202090204" pitchFamily="34" charset="0"/>
+                <a:ea typeface="Arial" panose="020B0604020202090204" pitchFamily="34" charset="-122"/>
+                <a:cs typeface="Arial" panose="020B0604020202090204" pitchFamily="34" charset="-120"/>
+              </a:rPr>
+              <a:t>Linking diversity and novelty: GPT-5.2’s tight internal cluster maps onto well-published territory. High internal similarity + low novelty = AI re-deriving the same ideas from training data. Claude’s spread extends into less-charted space, mirroring its higher novelty scores.</a:t>
+            </a:r>
+            <a:endParaRPr lang="en-US" sz="900" dirty="0"/>
+          </a:p>
+        </p:txBody>
+      </p:sp>
+      <p:sp>
+        <p:nvSpPr>
+          <p:cNvPr id="12" name="Text 10"/>
+          <p:cNvSpPr/>
+          <p:nvPr/>
+        </p:nvSpPr>
+        <p:spPr>
+          <a:xfrm>
+            <a:off x="4850000" y="3250000"/>
+            <a:ext cx="3937099" cy="550000"/>
+          </a:xfrm>
+          <a:prstGeom prst="rect">
+            <a:avLst/>
+          </a:prstGeom>
+          <a:noFill/>
+        </p:spPr>
+        <p:txBody>
+          <a:bodyPr wrap="square" lIns="0" tIns="0" rIns="0" bIns="0" rtlCol="0" anchor="t"/>
+          <a:lstStyle/>
+          <a:p>
+            <a:pPr marL="0" indent="0" algn="l">
+              <a:lnSpc>
+                <a:spcPts val="1285"/>
+              </a:lnSpc>
+              <a:spcAft>
+                <a:spcPts val="400"/>
+              </a:spcAft>
+              <a:buNone/>
+            </a:pPr>
+            <a:r>
+              <a:rPr lang="en-US" sz="850" dirty="0">
+                <a:solidFill>
+                  <a:srgbClr val="5D6D7E"/>
+                </a:solidFill>
+                <a:latin typeface="Arial" panose="020B0604020202090204" pitchFamily="34" charset="0"/>
+                <a:ea typeface="Arial" panose="020B0604020202090204" pitchFamily="34" charset="-122"/>
+                <a:cs typeface="Arial" panose="020B0604020202090204" pitchFamily="34" charset="-120"/>
+              </a:rPr>
+              <a:t>Interpretation caveat: UMAP projections can distort distances. The quantitative novelty scores (slide 8) are the primary evidence; this visualization serves as a qualitative consistency check. Proposals near literature ≠ low quality, and distance from literature could also indicate incoherence.</a:t>
+            </a:r>
+            <a:endParaRPr lang="en-US" sz="850" dirty="0"/>
+          </a:p>
+        </p:txBody>
+      </p:sp>
+    </p:spTree>
+  </p:cSld>
+  <p:clrMapOvr>
+    <a:masterClrMapping/>
+  </p:clrMapOvr>
+</p:sld>
+</file>
+
+<file path=ppt/slides/slide13.xml><?xml version="1.0" encoding="utf-8"?>
+<p:sld xmlns:a="http://schemas.openxmlformats.org/drawingml/2006/main" xmlns:r="http://schemas.openxmlformats.org/officeDocument/2006/relationships" xmlns:p="http://schemas.openxmlformats.org/presentationml/2006/main">
+  <p:cSld>
+    <p:bg>
+      <p:bgPr>
+        <a:solidFill>
+          <a:srgbClr val="FFFFFF"/>
+        </a:solidFill>
+        <a:effectLst/>
+      </p:bgPr>
+    </p:bg>
+    <p:spTree>
+      <p:nvGrpSpPr>
+        <p:cNvPr id="1" name=""/>
+        <p:cNvGrpSpPr/>
+        <p:nvPr/>
+      </p:nvGrpSpPr>
+      <p:grpSpPr>
+        <a:xfrm>
+          <a:off x="0" y="0"/>
+          <a:ext cx="0" cy="0"/>
+          <a:chOff x="0" y="0"/>
+          <a:chExt cx="0" cy="0"/>
+        </a:xfrm>
+      </p:grpSpPr>
+      <p:sp>
+        <p:nvSpPr>
+          <p:cNvPr id="2" name="Text 0"/>
+          <p:cNvSpPr/>
+          <p:nvPr/>
+        </p:nvSpPr>
+        <p:spPr>
+          <a:xfrm>
+            <a:off x="0" y="0"/>
+            <a:ext cx="9144000" cy="650677"/>
+          </a:xfrm>
+          <a:prstGeom prst="rect">
+            <a:avLst/>
+          </a:prstGeom>
+          <a:solidFill>
+            <a:srgbClr val="1B2A4A"/>
+          </a:solidFill>
+        </p:spPr>
+        <p:txBody>
+          <a:bodyPr wrap="square" rtlCol="0" anchor="ctr"/>
+          <a:lstStyle/>
+          <a:p>
+            <a:pPr marL="0" indent="0">
+              <a:buNone/>
+            </a:pPr>
+            <a:endParaRPr lang="en-US" dirty="0"/>
+          </a:p>
+        </p:txBody>
+      </p:sp>
+      <p:sp>
+        <p:nvSpPr>
+          <p:cNvPr id="3" name="Text 1"/>
+          <p:cNvSpPr/>
+          <p:nvPr/>
+        </p:nvSpPr>
+        <p:spPr>
+          <a:xfrm>
+            <a:off x="507950" y="177701"/>
+            <a:ext cx="8290661" cy="295275"/>
+          </a:xfrm>
+          <a:prstGeom prst="rect">
+            <a:avLst/>
+          </a:prstGeom>
+          <a:noFill/>
+        </p:spPr>
+        <p:txBody>
+          <a:bodyPr wrap="square" lIns="0" tIns="0" rIns="0" bIns="0" rtlCol="0" anchor="t"/>
+          <a:lstStyle/>
+          <a:p>
+            <a:pPr marL="0" indent="0" algn="l">
+              <a:buNone/>
+            </a:pPr>
+            <a:r>
+              <a:rPr lang="en-US" sz="2000" b="1" dirty="0">
+                <a:solidFill>
+                  <a:srgbClr val="FFFFFF"/>
+                </a:solidFill>
+                <a:latin typeface="Arial" panose="020B0604020202090204" pitchFamily="34" charset="0"/>
+                <a:ea typeface="Arial" panose="020B0604020202090204" pitchFamily="34" charset="-122"/>
+                <a:cs typeface="Arial" panose="020B0604020202090204" pitchFamily="34" charset="-120"/>
+              </a:rPr>
+              <a:t>Thematic Analysis: Topic Distribution</a:t>
+            </a:r>
+            <a:endParaRPr lang="en-US" sz="2000" dirty="0"/>
+          </a:p>
+        </p:txBody>
+      </p:sp>
+      <p:sp>
+        <p:nvSpPr>
+          <p:cNvPr id="4" name="Text 2"/>
+          <p:cNvSpPr/>
+          <p:nvPr/>
+        </p:nvSpPr>
+        <p:spPr>
+          <a:xfrm>
+            <a:off x="507950" y="853827"/>
+            <a:ext cx="8290661" cy="171450"/>
+          </a:xfrm>
+          <a:prstGeom prst="rect">
+            <a:avLst/>
+          </a:prstGeom>
+          <a:noFill/>
+        </p:spPr>
+        <p:txBody>
+          <a:bodyPr wrap="square" lIns="0" tIns="0" rIns="0" bIns="0" rtlCol="0" anchor="t"/>
+          <a:lstStyle/>
+          <a:p>
+            <a:pPr marL="0" indent="0" algn="l">
+              <a:spcAft>
+                <a:spcPts val="600"/>
+              </a:spcAft>
+              <a:buNone/>
+            </a:pPr>
+            <a:r>
+              <a:rPr lang="en-US" sz="1200" b="1" dirty="0">
+                <a:solidFill>
+                  <a:srgbClr val="1B2A4A"/>
+                </a:solidFill>
+                <a:latin typeface="Arial" panose="020B0604020202090204" pitchFamily="34" charset="0"/>
+                <a:ea typeface="Arial" panose="020B0604020202090204" pitchFamily="34" charset="-122"/>
+                <a:cs typeface="Arial" panose="020B0604020202090204" pitchFamily="34" charset="-120"/>
+              </a:rPr>
+              <a:t>LDA topic modeling (k=5, strong priors) with Fisher’s exact tests and FDR correction</a:t>
+            </a:r>
+            <a:endParaRPr lang="en-US" sz="1200" dirty="0"/>
+          </a:p>
+        </p:txBody>
+      </p:sp>
+      <p:sp>
+        <p:nvSpPr>
+          <p:cNvPr id="5" name="Text 3"/>
+          <p:cNvSpPr/>
+          <p:nvPr/>
+        </p:nvSpPr>
+        <p:spPr>
+          <a:xfrm>
+            <a:off x="507950" y="1101477"/>
+            <a:ext cx="444401" cy="25301"/>
+          </a:xfrm>
+          <a:prstGeom prst="rect">
+            <a:avLst/>
+          </a:prstGeom>
+          <a:solidFill>
+            <a:srgbClr val="E8505B"/>
+          </a:solidFill>
+        </p:spPr>
+        <p:txBody>
+          <a:bodyPr wrap="square" rtlCol="0" anchor="ctr"/>
+          <a:lstStyle/>
+          <a:p>
+            <a:pPr marL="0" indent="0">
+              <a:buNone/>
+            </a:pPr>
+            <a:endParaRPr lang="en-US" dirty="0"/>
+          </a:p>
+        </p:txBody>
+      </p:sp>
+      <p:pic>
+        <p:nvPicPr>
+          <p:cNvPr id="6" name="Picture 6"/>
+          <p:cNvPicPr>
+            <a:picLocks noChangeAspect="1"/>
+          </p:cNvPicPr>
+          <p:nvPr/>
+        </p:nvPicPr>
+        <p:blipFill>
+          <a:blip r:embed="rId2"/>
+          <a:stretch>
+            <a:fillRect/>
+          </a:stretch>
+        </p:blipFill>
+        <p:spPr>
+          <a:xfrm>
+            <a:off x="507950" y="1253728"/>
+            <a:ext cx="4200000" cy="3400000"/>
+          </a:xfrm>
+          <a:prstGeom prst="rect">
+            <a:avLst/>
+          </a:prstGeom>
+        </p:spPr>
+      </p:pic>
+      <p:sp>
+        <p:nvSpPr>
+          <p:cNvPr id="7" name="Text 5"/>
+          <p:cNvSpPr/>
+          <p:nvPr/>
+        </p:nvSpPr>
+        <p:spPr>
+          <a:xfrm>
+            <a:off x="4850000" y="1253728"/>
+            <a:ext cx="3937099" cy="900000"/>
+          </a:xfrm>
+          <a:prstGeom prst="roundRect">
+            <a:avLst>
+              <a:gd name="adj" fmla="val 3645"/>
+            </a:avLst>
+          </a:prstGeom>
+          <a:solidFill>
+            <a:srgbClr val="FDF8F8"/>
+          </a:solidFill>
+        </p:spPr>
+        <p:txBody>
+          <a:bodyPr wrap="square" rtlCol="0" anchor="ctr"/>
+          <a:lstStyle/>
+          <a:p>
+            <a:pPr marL="0" indent="0">
+              <a:buNone/>
+            </a:pPr>
+            <a:endParaRPr lang="en-US" dirty="0"/>
+          </a:p>
+        </p:txBody>
+      </p:sp>
+      <p:sp>
+        <p:nvSpPr>
+          <p:cNvPr id="8" name="Shape 6"/>
+          <p:cNvSpPr/>
+          <p:nvPr/>
+        </p:nvSpPr>
+        <p:spPr>
+          <a:xfrm>
+            <a:off x="4850000" y="1272778"/>
+            <a:ext cx="3937099" cy="0"/>
+          </a:xfrm>
+          <a:prstGeom prst="line">
+            <a:avLst/>
+          </a:prstGeom>
+          <a:noFill/>
+          <a:ln w="38100">
+            <a:solidFill>
+              <a:srgbClr val="E8505B"/>
+            </a:solidFill>
+            <a:prstDash val="solid"/>
+          </a:ln>
+        </p:spPr>
+      </p:sp>
+      <p:sp>
+        <p:nvSpPr>
+          <p:cNvPr id="9" name="Text 7"/>
+          <p:cNvSpPr/>
+          <p:nvPr/>
+        </p:nvSpPr>
+        <p:spPr>
+          <a:xfrm>
+            <a:off x="5002400" y="1350000"/>
+            <a:ext cx="3704945" cy="152400"/>
+          </a:xfrm>
+          <a:prstGeom prst="rect">
+            <a:avLst/>
+          </a:prstGeom>
+          <a:noFill/>
+        </p:spPr>
+        <p:txBody>
+          <a:bodyPr wrap="square" lIns="0" tIns="0" rIns="0" bIns="0" rtlCol="0" anchor="t"/>
+          <a:lstStyle/>
+          <a:p>
+            <a:pPr marL="0" indent="0" algn="l">
+              <a:lnSpc>
+                <a:spcPts val="1285"/>
+              </a:lnSpc>
+              <a:spcAft>
+                <a:spcPts val="400"/>
+              </a:spcAft>
+              <a:buNone/>
+            </a:pPr>
+            <a:r>
+              <a:rPr lang="en-US" sz="1100" b="1" dirty="0">
+                <a:solidFill>
+                  <a:srgbClr val="1B2A4A"/>
+                </a:solidFill>
+                <a:latin typeface="Arial" panose="020B0604020202090204" pitchFamily="34" charset="0"/>
+                <a:ea typeface="Arial" panose="020B0604020202090204" pitchFamily="34" charset="-122"/>
+                <a:cs typeface="Arial" panose="020B0604020202090204" pitchFamily="34" charset="-120"/>
+              </a:rPr>
+              <a:t>Complete thematic separation</a:t>
+            </a:r>
+            <a:endParaRPr lang="en-US" sz="1100" dirty="0"/>
+          </a:p>
+        </p:txBody>
+      </p:sp>
+      <p:sp>
+        <p:nvSpPr>
+          <p:cNvPr id="10" name="Text 8"/>
+          <p:cNvSpPr/>
+          <p:nvPr/>
+        </p:nvSpPr>
+        <p:spPr>
+          <a:xfrm>
+            <a:off x="5002400" y="1530000"/>
+            <a:ext cx="3704945" cy="570000"/>
+          </a:xfrm>
+          <a:prstGeom prst="rect">
+            <a:avLst/>
+          </a:prstGeom>
+          <a:noFill/>
+        </p:spPr>
+        <p:txBody>
+          <a:bodyPr wrap="square" lIns="0" tIns="0" rIns="0" bIns="0" rtlCol="0" anchor="t"/>
+          <a:lstStyle/>
+          <a:p>
+            <a:pPr marL="0" indent="0" algn="l">
+              <a:lnSpc>
+                <a:spcPts val="1285"/>
+              </a:lnSpc>
+              <a:spcAft>
+                <a:spcPts val="400"/>
+              </a:spcAft>
+              <a:buNone/>
+            </a:pPr>
+            <a:r>
+              <a:rPr lang="en-US" sz="900" dirty="0">
+                <a:solidFill>
+                  <a:srgbClr val="2C3E50"/>
+                </a:solidFill>
+                <a:latin typeface="Arial" panose="020B0604020202090204" pitchFamily="34" charset="0"/>
+                <a:ea typeface="Arial" panose="020B0604020202090204" pitchFamily="34" charset="-122"/>
+                <a:cs typeface="Arial" panose="020B0604020202090204" pitchFamily="34" charset="-120"/>
+              </a:rPr>
+              <a:t>All 23 human proposals map to a single dominant topic (Topic 3: evolutionary/species-level biology). All 69 AI proposals distribute across the other 4 topics (mechanical/structural, transport/diffusion, imaging/perturbation, splicing/allosteric). Overall chi-square permutation test: p &lt; 0.0001.</a:t>
+            </a:r>
+            <a:endParaRPr lang="en-US" sz="900" dirty="0"/>
+          </a:p>
+        </p:txBody>
+      </p:sp>
+      <p:sp>
+        <p:nvSpPr>
+          <p:cNvPr id="11" name="Text 9"/>
+          <p:cNvSpPr/>
+          <p:nvPr/>
+        </p:nvSpPr>
+        <p:spPr>
+          <a:xfrm>
+            <a:off x="4850000" y="2280000"/>
+            <a:ext cx="3937099" cy="700000"/>
+          </a:xfrm>
+          <a:prstGeom prst="roundRect">
+            <a:avLst>
+              <a:gd name="adj" fmla="val 3645"/>
+            </a:avLst>
+          </a:prstGeom>
+          <a:solidFill>
+            <a:srgbClr val="F7F9FC"/>
+          </a:solidFill>
+        </p:spPr>
+        <p:txBody>
+          <a:bodyPr wrap="square" rtlCol="0" anchor="ctr"/>
+          <a:lstStyle/>
+          <a:p>
+            <a:pPr marL="0" indent="0">
+              <a:buNone/>
+            </a:pPr>
+            <a:endParaRPr lang="en-US" dirty="0"/>
+          </a:p>
+        </p:txBody>
+      </p:sp>
+      <p:sp>
+        <p:nvSpPr>
+          <p:cNvPr id="12" name="Shape 10"/>
+          <p:cNvSpPr/>
+          <p:nvPr/>
+        </p:nvSpPr>
+        <p:spPr>
+          <a:xfrm>
+            <a:off x="4850000" y="2299050"/>
+            <a:ext cx="3937099" cy="0"/>
+          </a:xfrm>
+          <a:prstGeom prst="line">
+            <a:avLst/>
+          </a:prstGeom>
+          <a:noFill/>
+          <a:ln w="38100">
+            <a:solidFill>
+              <a:srgbClr val="2E86AB"/>
+            </a:solidFill>
+            <a:prstDash val="solid"/>
+          </a:ln>
+        </p:spPr>
+      </p:sp>
+      <p:sp>
+        <p:nvSpPr>
+          <p:cNvPr id="13" name="Text 11"/>
+          <p:cNvSpPr/>
+          <p:nvPr/>
+        </p:nvSpPr>
+        <p:spPr>
+          <a:xfrm>
+            <a:off x="5002400" y="2380000"/>
+            <a:ext cx="3704945" cy="152400"/>
+          </a:xfrm>
+          <a:prstGeom prst="rect">
+            <a:avLst/>
+          </a:prstGeom>
+          <a:noFill/>
+        </p:spPr>
+        <p:txBody>
+          <a:bodyPr wrap="square" lIns="0" tIns="0" rIns="0" bIns="0" rtlCol="0" anchor="t"/>
+          <a:lstStyle/>
+          <a:p>
+            <a:pPr marL="0" indent="0" algn="l">
+              <a:lnSpc>
+                <a:spcPts val="1285"/>
+              </a:lnSpc>
+              <a:spcAft>
+                <a:spcPts val="400"/>
+              </a:spcAft>
+              <a:buNone/>
+            </a:pPr>
+            <a:r>
+              <a:rPr lang="en-US" sz="1050" b="1" dirty="0">
+                <a:solidFill>
+                  <a:srgbClr val="1B2A4A"/>
+                </a:solidFill>
+                <a:latin typeface="Arial" panose="020B0604020202090204" pitchFamily="34" charset="0"/>
+                <a:ea typeface="Arial" panose="020B0604020202090204" pitchFamily="34" charset="-122"/>
+                <a:cs typeface="Arial" panose="020B0604020202090204" pitchFamily="34" charset="-120"/>
+              </a:rPr>
+              <a:t>Per-topic Fisher’s exact tests (FDR-corrected)</a:t>
+            </a:r>
+            <a:endParaRPr lang="en-US" sz="1050" dirty="0"/>
+          </a:p>
+        </p:txBody>
+      </p:sp>
+      <p:sp>
+        <p:nvSpPr>
+          <p:cNvPr id="14" name="Text 12"/>
+          <p:cNvSpPr/>
+          <p:nvPr/>
+        </p:nvSpPr>
+        <p:spPr>
+          <a:xfrm>
+            <a:off x="5002400" y="2550000"/>
+            <a:ext cx="3704945" cy="380000"/>
+          </a:xfrm>
+          <a:prstGeom prst="rect">
+            <a:avLst/>
+          </a:prstGeom>
+          <a:noFill/>
+        </p:spPr>
+        <p:txBody>
+          <a:bodyPr wrap="square" lIns="0" tIns="0" rIns="0" bIns="0" rtlCol="0" anchor="t"/>
+          <a:lstStyle/>
+          <a:p>
+            <a:pPr marL="0" indent="0" algn="l">
+              <a:lnSpc>
+                <a:spcPts val="1285"/>
+              </a:lnSpc>
+              <a:spcAft>
+                <a:spcPts val="400"/>
+              </a:spcAft>
+              <a:buNone/>
+            </a:pPr>
+            <a:r>
+              <a:rPr lang="en-US" sz="900" dirty="0">
+                <a:solidFill>
+                  <a:srgbClr val="2C3E50"/>
+                </a:solidFill>
+                <a:latin typeface="Arial" panose="020B0604020202090204" pitchFamily="34" charset="0"/>
+                <a:ea typeface="Arial" panose="020B0604020202090204" pitchFamily="34" charset="-122"/>
+                <a:cs typeface="Arial" panose="020B0604020202090204" pitchFamily="34" charset="-120"/>
+              </a:rPr>
+              <a:t>Topic 3 (human-exclusive): p &lt; 0.0001. Topics 1, 4, 5 (AI-overrepresented): p &lt; 0.05. Topic 2 (AI-leaning): p = 0.061 (marginal). Subsample validation (n=23 each, 1000 iter): Topics 1 and 3 robust (&gt;98%); Topic 2 weak (18.5%).</a:t>
+            </a:r>
+            <a:endParaRPr lang="en-US" sz="900" dirty="0"/>
+          </a:p>
+        </p:txBody>
+      </p:sp>
+      <p:sp>
+        <p:nvSpPr>
+          <p:cNvPr id="15" name="Text 13"/>
+          <p:cNvSpPr/>
+          <p:nvPr/>
+        </p:nvSpPr>
+        <p:spPr>
+          <a:xfrm>
+            <a:off x="4850000" y="3100000"/>
+            <a:ext cx="3937099" cy="600000"/>
+          </a:xfrm>
+          <a:prstGeom prst="roundRect">
+            <a:avLst>
+              <a:gd name="adj" fmla="val 3645"/>
+            </a:avLst>
+          </a:prstGeom>
+          <a:solidFill>
+            <a:srgbClr val="F5F5F5"/>
+          </a:solidFill>
+        </p:spPr>
+        <p:txBody>
+          <a:bodyPr wrap="square" rtlCol="0" anchor="ctr"/>
+          <a:lstStyle/>
+          <a:p>
+            <a:pPr marL="0" indent="0">
+              <a:buNone/>
+            </a:pPr>
+            <a:endParaRPr lang="en-US" dirty="0"/>
+          </a:p>
+        </p:txBody>
+      </p:sp>
+      <p:sp>
+        <p:nvSpPr>
+          <p:cNvPr id="16" name="Text 14"/>
+          <p:cNvSpPr/>
+          <p:nvPr/>
+        </p:nvSpPr>
+        <p:spPr>
+          <a:xfrm>
+            <a:off x="5002400" y="3180000"/>
+            <a:ext cx="3704945" cy="152400"/>
+          </a:xfrm>
+          <a:prstGeom prst="rect">
+            <a:avLst/>
+          </a:prstGeom>
+          <a:noFill/>
+        </p:spPr>
+        <p:txBody>
+          <a:bodyPr wrap="square" lIns="0" tIns="0" rIns="0" bIns="0" rtlCol="0" anchor="t"/>
+          <a:lstStyle/>
+          <a:p>
+            <a:pPr marL="0" indent="0" algn="l">
+              <a:lnSpc>
+                <a:spcPts val="1285"/>
+              </a:lnSpc>
+              <a:spcAft>
+                <a:spcPts val="400"/>
+              </a:spcAft>
+              <a:buNone/>
+            </a:pPr>
+            <a:r>
+              <a:rPr lang="en-US" sz="1050" b="1" dirty="0">
+                <a:solidFill>
+                  <a:srgbClr val="E8505B"/>
+                </a:solidFill>
+                <a:latin typeface="Arial" panose="020B0604020202090204" pitchFamily="34" charset="0"/>
+                <a:ea typeface="Arial" panose="020B0604020202090204" pitchFamily="34" charset="-122"/>
+                <a:cs typeface="Arial" panose="020B0604020202090204" pitchFamily="34" charset="-120"/>
+              </a:rPr>
+              <a:t>Critical caveat</a:t>
+            </a:r>
+            <a:endParaRPr lang="en-US" sz="1050" dirty="0"/>
+          </a:p>
+        </p:txBody>
+      </p:sp>
+      <p:sp>
+        <p:nvSpPr>
+          <p:cNvPr id="17" name="Text 15"/>
+          <p:cNvSpPr/>
+          <p:nvPr/>
+        </p:nvSpPr>
+        <p:spPr>
+          <a:xfrm>
+            <a:off x="5002400" y="3350000"/>
+            <a:ext cx="3704945" cy="310000"/>
+          </a:xfrm>
+          <a:prstGeom prst="rect">
+            <a:avLst/>
+          </a:prstGeom>
+          <a:noFill/>
+        </p:spPr>
+        <p:txBody>
+          <a:bodyPr wrap="square" lIns="0" tIns="0" rIns="0" bIns="0" rtlCol="0" anchor="t"/>
+          <a:lstStyle/>
+          <a:p>
+            <a:pPr marL="0" indent="0" algn="l">
+              <a:lnSpc>
+                <a:spcPts val="1285"/>
+              </a:lnSpc>
+              <a:spcAft>
+                <a:spcPts val="400"/>
+              </a:spcAft>
+              <a:buNone/>
+            </a:pPr>
+            <a:r>
+              <a:rPr lang="en-US" sz="850" dirty="0">
+                <a:solidFill>
+                  <a:srgbClr val="5D6D7E"/>
+                </a:solidFill>
+                <a:latin typeface="Arial" panose="020B0604020202090204" pitchFamily="34" charset="0"/>
+                <a:ea typeface="Arial" panose="020B0604020202090204" pitchFamily="34" charset="-122"/>
+                <a:cs typeface="Arial" panose="020B0604020202090204" pitchFamily="34" charset="-120"/>
+              </a:rPr>
+              <a:t>Perfect separation is a red flag: LDA may be capturing systematic stylistic or templating artifacts rather than genuine scientific themes. Human entropy = 0 (all in one topic) is suspicious. These results are exploratory and require validation with expert coding.</a:t>
+            </a:r>
+            <a:endParaRPr lang="en-US" sz="850" dirty="0"/>
+          </a:p>
+        </p:txBody>
+      </p:sp>
+    </p:spTree>
+  </p:cSld>
+  <p:clrMapOvr>
+    <a:masterClrMapping/>
+  </p:clrMapOvr>
+</p:sld>
+</file>
+
+<file path=ppt/slides/slide14.xml><?xml version="1.0" encoding="utf-8"?>
+<p:sld xmlns:a="http://schemas.openxmlformats.org/drawingml/2006/main" xmlns:r="http://schemas.openxmlformats.org/officeDocument/2006/relationships" xmlns:p="http://schemas.openxmlformats.org/presentationml/2006/main">
+  <p:cSld>
+    <p:bg>
+      <p:bgPr>
+        <a:solidFill>
+          <a:srgbClr val="FFFFFF"/>
+        </a:solidFill>
+        <a:effectLst/>
+      </p:bgPr>
+    </p:bg>
+    <p:spTree>
+      <p:nvGrpSpPr>
+        <p:cNvPr id="1" name=""/>
+        <p:cNvGrpSpPr/>
+        <p:nvPr/>
+      </p:nvGrpSpPr>
+      <p:grpSpPr>
+        <a:xfrm>
+          <a:off x="0" y="0"/>
+          <a:ext cx="0" cy="0"/>
+          <a:chOff x="0" y="0"/>
+          <a:chExt cx="0" cy="0"/>
+        </a:xfrm>
+      </p:grpSpPr>
+      <p:sp>
+        <p:nvSpPr>
+          <p:cNvPr id="2" name="Text 0"/>
+          <p:cNvSpPr/>
+          <p:nvPr/>
+        </p:nvSpPr>
+        <p:spPr>
+          <a:xfrm>
+            <a:off x="0" y="0"/>
+            <a:ext cx="9144000" cy="650677"/>
+          </a:xfrm>
+          <a:prstGeom prst="rect">
+            <a:avLst/>
+          </a:prstGeom>
+          <a:solidFill>
+            <a:srgbClr val="1B2A4A"/>
+          </a:solidFill>
+        </p:spPr>
+        <p:txBody>
+          <a:bodyPr wrap="square" rtlCol="0" anchor="ctr"/>
+          <a:lstStyle/>
+          <a:p>
+            <a:pPr marL="0" indent="0">
+              <a:buNone/>
+            </a:pPr>
+            <a:endParaRPr lang="en-US" dirty="0"/>
+          </a:p>
+        </p:txBody>
+      </p:sp>
+      <p:sp>
+        <p:nvSpPr>
+          <p:cNvPr id="3" name="Text 1"/>
+          <p:cNvSpPr/>
+          <p:nvPr/>
+        </p:nvSpPr>
+        <p:spPr>
+          <a:xfrm>
+            <a:off x="507950" y="177701"/>
+            <a:ext cx="8290661" cy="295275"/>
+          </a:xfrm>
+          <a:prstGeom prst="rect">
+            <a:avLst/>
+          </a:prstGeom>
+          <a:noFill/>
+        </p:spPr>
+        <p:txBody>
+          <a:bodyPr wrap="square" lIns="0" tIns="0" rIns="0" bIns="0" rtlCol="0" anchor="t"/>
+          <a:lstStyle/>
+          <a:p>
+            <a:pPr marL="0" indent="0" algn="l">
+              <a:buNone/>
+            </a:pPr>
+            <a:r>
+              <a:rPr lang="en-US" sz="2000" b="1" dirty="0">
+                <a:solidFill>
+                  <a:srgbClr val="FFFFFF"/>
+                </a:solidFill>
+                <a:latin typeface="Arial" panose="020B0604020202090204" pitchFamily="34" charset="0"/>
+                <a:ea typeface="Arial" panose="020B0604020202090204" pitchFamily="34" charset="-122"/>
+                <a:cs typeface="Arial" panose="020B0604020202090204" pitchFamily="34" charset="-120"/>
+              </a:rPr>
+              <a:t>Cluster Segregation Analysis</a:t>
+            </a:r>
+            <a:endParaRPr lang="en-US" sz="2000" dirty="0"/>
+          </a:p>
+        </p:txBody>
+      </p:sp>
+      <p:sp>
+        <p:nvSpPr>
+          <p:cNvPr id="4" name="Text 2"/>
+          <p:cNvSpPr/>
+          <p:nvPr/>
+        </p:nvSpPr>
+        <p:spPr>
+          <a:xfrm>
+            <a:off x="507950" y="853827"/>
+            <a:ext cx="8290661" cy="171450"/>
+          </a:xfrm>
+          <a:prstGeom prst="rect">
+            <a:avLst/>
+          </a:prstGeom>
+          <a:noFill/>
+        </p:spPr>
+        <p:txBody>
+          <a:bodyPr wrap="square" lIns="0" tIns="0" rIns="0" bIns="0" rtlCol="0" anchor="t"/>
+          <a:lstStyle/>
+          <a:p>
+            <a:pPr marL="0" indent="0" algn="l">
+              <a:spcAft>
+                <a:spcPts val="600"/>
+              </a:spcAft>
+              <a:buNone/>
+            </a:pPr>
+            <a:r>
+              <a:rPr lang="en-US" sz="1200" b="1" dirty="0">
+                <a:solidFill>
+                  <a:srgbClr val="1B2A4A"/>
+                </a:solidFill>
+                <a:latin typeface="Arial" panose="020B0604020202090204" pitchFamily="34" charset="0"/>
+                <a:ea typeface="Arial" panose="020B0604020202090204" pitchFamily="34" charset="-122"/>
+                <a:cs typeface="Arial" panose="020B0604020202090204" pitchFamily="34" charset="-120"/>
+              </a:rPr>
+              <a:t>Gaussian Mixture Model clustering (k=3, selected by BIC) with segregation metrics</a:t>
+            </a:r>
+            <a:endParaRPr lang="en-US" sz="1200" dirty="0"/>
+          </a:p>
+        </p:txBody>
+      </p:sp>
+      <p:sp>
+        <p:nvSpPr>
+          <p:cNvPr id="5" name="Text 3"/>
+          <p:cNvSpPr/>
+          <p:nvPr/>
+        </p:nvSpPr>
+        <p:spPr>
+          <a:xfrm>
+            <a:off x="507950" y="1101477"/>
+            <a:ext cx="444401" cy="25301"/>
+          </a:xfrm>
+          <a:prstGeom prst="rect">
+            <a:avLst/>
+          </a:prstGeom>
+          <a:solidFill>
+            <a:srgbClr val="E8505B"/>
+          </a:solidFill>
+        </p:spPr>
+        <p:txBody>
+          <a:bodyPr wrap="square" rtlCol="0" anchor="ctr"/>
+          <a:lstStyle/>
+          <a:p>
+            <a:pPr marL="0" indent="0">
+              <a:buNone/>
+            </a:pPr>
+            <a:endParaRPr lang="en-US" dirty="0"/>
+          </a:p>
+        </p:txBody>
+      </p:sp>
+      <p:pic>
+        <p:nvPicPr>
+          <p:cNvPr id="6" name="Picture 6"/>
+          <p:cNvPicPr>
+            <a:picLocks noChangeAspect="1"/>
+          </p:cNvPicPr>
+          <p:nvPr/>
+        </p:nvPicPr>
+        <p:blipFill>
+          <a:blip r:embed="rId2"/>
+          <a:stretch>
+            <a:fillRect/>
+          </a:stretch>
+        </p:blipFill>
+        <p:spPr>
+          <a:xfrm>
+            <a:off x="507950" y="1253728"/>
+            <a:ext cx="4200000" cy="3400000"/>
+          </a:xfrm>
+          <a:prstGeom prst="rect">
+            <a:avLst/>
+          </a:prstGeom>
+        </p:spPr>
+      </p:pic>
+      <p:sp>
+        <p:nvSpPr>
+          <p:cNvPr id="7" name="Text 5"/>
+          <p:cNvSpPr/>
+          <p:nvPr/>
+        </p:nvSpPr>
+        <p:spPr>
+          <a:xfrm>
+            <a:off x="4850000" y="1253728"/>
+            <a:ext cx="3937099" cy="850000"/>
+          </a:xfrm>
+          <a:prstGeom prst="roundRect">
+            <a:avLst>
+              <a:gd name="adj" fmla="val 3645"/>
+            </a:avLst>
+          </a:prstGeom>
+          <a:solidFill>
+            <a:srgbClr val="F7F9FC"/>
+          </a:solidFill>
+        </p:spPr>
+        <p:txBody>
+          <a:bodyPr wrap="square" rtlCol="0" anchor="ctr"/>
+          <a:lstStyle/>
+          <a:p>
+            <a:pPr marL="0" indent="0">
+              <a:buNone/>
+            </a:pPr>
+            <a:endParaRPr lang="en-US" dirty="0"/>
+          </a:p>
+        </p:txBody>
+      </p:sp>
+      <p:sp>
+        <p:nvSpPr>
+          <p:cNvPr id="8" name="Shape 6"/>
+          <p:cNvSpPr/>
+          <p:nvPr/>
+        </p:nvSpPr>
+        <p:spPr>
+          <a:xfrm>
+            <a:off x="4850000" y="1272778"/>
+            <a:ext cx="3937099" cy="0"/>
+          </a:xfrm>
+          <a:prstGeom prst="line">
+            <a:avLst/>
+          </a:prstGeom>
+          <a:noFill/>
+          <a:ln w="38100">
+            <a:solidFill>
+              <a:srgbClr val="2E86AB"/>
+            </a:solidFill>
+            <a:prstDash val="solid"/>
+          </a:ln>
+        </p:spPr>
+      </p:sp>
+      <p:sp>
+        <p:nvSpPr>
+          <p:cNvPr id="9" name="Text 7"/>
+          <p:cNvSpPr/>
+          <p:nvPr/>
+        </p:nvSpPr>
+        <p:spPr>
+          <a:xfrm>
+            <a:off x="5002400" y="1350000"/>
+            <a:ext cx="3704945" cy="152400"/>
+          </a:xfrm>
+          <a:prstGeom prst="rect">
+            <a:avLst/>
+          </a:prstGeom>
+          <a:noFill/>
+        </p:spPr>
+        <p:txBody>
+          <a:bodyPr wrap="square" lIns="0" tIns="0" rIns="0" bIns="0" rtlCol="0" anchor="t"/>
+          <a:lstStyle/>
+          <a:p>
+            <a:pPr marL="0" indent="0" algn="l">
+              <a:lnSpc>
+                <a:spcPts val="1285"/>
+              </a:lnSpc>
+              <a:spcAft>
+                <a:spcPts val="400"/>
+              </a:spcAft>
+              <a:buNone/>
+            </a:pPr>
+            <a:r>
+              <a:rPr lang="en-US" sz="1050" b="1" dirty="0">
+                <a:solidFill>
+                  <a:srgbClr val="1B2A4A"/>
+                </a:solidFill>
+                <a:latin typeface="Arial" panose="020B0604020202090204" pitchFamily="34" charset="0"/>
+                <a:ea typeface="Arial" panose="020B0604020202090204" pitchFamily="34" charset="-122"/>
+                <a:cs typeface="Arial" panose="020B0604020202090204" pitchFamily="34" charset="-120"/>
+              </a:rPr>
+              <a:t>Cluster composition reveals asymmetric segregation</a:t>
+            </a:r>
+            <a:endParaRPr lang="en-US" sz="1050" dirty="0"/>
+          </a:p>
+        </p:txBody>
+      </p:sp>
+      <p:sp>
+        <p:nvSpPr>
+          <p:cNvPr id="10" name="Text 8"/>
+          <p:cNvSpPr/>
+          <p:nvPr/>
+        </p:nvSpPr>
+        <p:spPr>
+          <a:xfrm>
+            <a:off x="5002400" y="1530000"/>
+            <a:ext cx="3704945" cy="500000"/>
+          </a:xfrm>
+          <a:prstGeom prst="rect">
+            <a:avLst/>
+          </a:prstGeom>
+          <a:noFill/>
+        </p:spPr>
+        <p:txBody>
+          <a:bodyPr wrap="square" lIns="0" tIns="0" rIns="0" bIns="0" rtlCol="0" anchor="t"/>
+          <a:lstStyle/>
+          <a:p>
+            <a:pPr marL="0" indent="0" algn="l">
+              <a:lnSpc>
+                <a:spcPts val="1285"/>
+              </a:lnSpc>
+              <a:spcAft>
+                <a:spcPts val="400"/>
+              </a:spcAft>
+              <a:buNone/>
+            </a:pPr>
+            <a:r>
+              <a:rPr lang="en-US" sz="900" dirty="0">
+                <a:solidFill>
+                  <a:srgbClr val="2C3E50"/>
+                </a:solidFill>
+                <a:latin typeface="Arial" panose="020B0604020202090204" pitchFamily="34" charset="0"/>
+                <a:ea typeface="Arial" panose="020B0604020202090204" pitchFamily="34" charset="-122"/>
+                <a:cs typeface="Arial" panose="020B0604020202090204" pitchFamily="34" charset="-120"/>
+              </a:rPr>
+              <a:t>Cluster 0 (n=27): 100% AI. Cluster 1 (n=7): 100% AI. Cluster 2 (n=58): 40% human, 60% AI. Two clusters are entirely AI-dominated. All 23 human proposals land in a single mixed cluster, while AI proposals spread across all three, suggesting AI occupies distinct conceptual regions that humans do not enter.</a:t>
+            </a:r>
+            <a:endParaRPr lang="en-US" sz="900" dirty="0"/>
+          </a:p>
+        </p:txBody>
+      </p:sp>
+      <p:sp>
+        <p:nvSpPr>
+          <p:cNvPr id="11" name="Text 9"/>
+          <p:cNvSpPr/>
+          <p:nvPr/>
+        </p:nvSpPr>
+        <p:spPr>
+          <a:xfrm>
+            <a:off x="4850000" y="2230000"/>
+            <a:ext cx="3937099" cy="700000"/>
+          </a:xfrm>
+          <a:prstGeom prst="roundRect">
+            <a:avLst>
+              <a:gd name="adj" fmla="val 3645"/>
+            </a:avLst>
+          </a:prstGeom>
+          <a:solidFill>
+            <a:srgbClr val="FDF8F8"/>
+          </a:solidFill>
+        </p:spPr>
+        <p:txBody>
+          <a:bodyPr wrap="square" rtlCol="0" anchor="ctr"/>
+          <a:lstStyle/>
+          <a:p>
+            <a:pPr marL="0" indent="0">
+              <a:buNone/>
+            </a:pPr>
+            <a:endParaRPr lang="en-US" dirty="0"/>
+          </a:p>
+        </p:txBody>
+      </p:sp>
+      <p:sp>
+        <p:nvSpPr>
+          <p:cNvPr id="12" name="Shape 10"/>
+          <p:cNvSpPr/>
+          <p:nvPr/>
+        </p:nvSpPr>
+        <p:spPr>
+          <a:xfrm>
+            <a:off x="4850000" y="2249050"/>
+            <a:ext cx="3937099" cy="0"/>
+          </a:xfrm>
+          <a:prstGeom prst="line">
+            <a:avLst/>
+          </a:prstGeom>
+          <a:noFill/>
+          <a:ln w="38100">
+            <a:solidFill>
+              <a:srgbClr val="E8505B"/>
+            </a:solidFill>
+            <a:prstDash val="solid"/>
+          </a:ln>
+        </p:spPr>
+      </p:sp>
+      <p:sp>
+        <p:nvSpPr>
+          <p:cNvPr id="13" name="Text 11"/>
+          <p:cNvSpPr/>
+          <p:nvPr/>
+        </p:nvSpPr>
+        <p:spPr>
+          <a:xfrm>
+            <a:off x="5002400" y="2330000"/>
+            <a:ext cx="3704945" cy="152400"/>
+          </a:xfrm>
+          <a:prstGeom prst="rect">
+            <a:avLst/>
+          </a:prstGeom>
+          <a:noFill/>
+        </p:spPr>
+        <p:txBody>
+          <a:bodyPr wrap="square" lIns="0" tIns="0" rIns="0" bIns="0" rtlCol="0" anchor="t"/>
+          <a:lstStyle/>
+          <a:p>
+            <a:pPr marL="0" indent="0" algn="l">
+              <a:lnSpc>
+                <a:spcPts val="1285"/>
+              </a:lnSpc>
+              <a:spcAft>
+                <a:spcPts val="400"/>
+              </a:spcAft>
+              <a:buNone/>
+            </a:pPr>
+            <a:r>
+              <a:rPr lang="en-US" sz="1050" b="1" dirty="0">
+                <a:solidFill>
+                  <a:srgbClr val="1B2A4A"/>
+                </a:solidFill>
+                <a:latin typeface="Arial" panose="020B0604020202090204" pitchFamily="34" charset="0"/>
+                <a:ea typeface="Arial" panose="020B0604020202090204" pitchFamily="34" charset="-122"/>
+                <a:cs typeface="Arial" panose="020B0604020202090204" pitchFamily="34" charset="-120"/>
+              </a:rPr>
+              <a:t>Segregation metrics</a:t>
+            </a:r>
+            <a:endParaRPr lang="en-US" sz="1050" dirty="0"/>
+          </a:p>
+        </p:txBody>
+      </p:sp>
+      <p:sp>
+        <p:nvSpPr>
+          <p:cNvPr id="14" name="Text 12"/>
+          <p:cNvSpPr/>
+          <p:nvPr/>
+        </p:nvSpPr>
+        <p:spPr>
+          <a:xfrm>
+            <a:off x="5002400" y="2510000"/>
+            <a:ext cx="3704945" cy="380000"/>
+          </a:xfrm>
+          <a:prstGeom prst="rect">
+            <a:avLst/>
+          </a:prstGeom>
+          <a:noFill/>
+        </p:spPr>
+        <p:txBody>
+          <a:bodyPr wrap="square" lIns="0" tIns="0" rIns="0" bIns="0" rtlCol="0" anchor="t"/>
+          <a:lstStyle/>
+          <a:p>
+            <a:pPr marL="0" indent="0" algn="l">
+              <a:lnSpc>
+                <a:spcPts val="1285"/>
+              </a:lnSpc>
+              <a:spcAft>
+                <a:spcPts val="400"/>
+              </a:spcAft>
+              <a:buNone/>
+            </a:pPr>
+            <a:r>
+              <a:rPr lang="en-US" sz="900" dirty="0">
+                <a:solidFill>
+                  <a:srgbClr val="2C3E50"/>
+                </a:solidFill>
+                <a:latin typeface="Arial" panose="020B0604020202090204" pitchFamily="34" charset="0"/>
+                <a:ea typeface="Arial" panose="020B0604020202090204" pitchFamily="34" charset="-122"/>
+                <a:cs typeface="Arial" panose="020B0604020202090204" pitchFamily="34" charset="-120"/>
+              </a:rPr>
+              <a:t>NMI = 0.197 (p &lt; 0.0001): clusters predict human/AI source better than chance. ARI = −0.035 (p = 0.86): no agreement beyond chance (expected given unbalanced groups). Between/within distance ratio = 1.085 (p = 0.004): human and AI proposals are measurably more distant from each other than from their own group.</a:t>
+            </a:r>
+            <a:endParaRPr lang="en-US" sz="900" dirty="0"/>
+          </a:p>
+        </p:txBody>
+      </p:sp>
+      <p:sp>
+        <p:nvSpPr>
+          <p:cNvPr id="15" name="Text 13"/>
+          <p:cNvSpPr/>
+          <p:nvPr/>
+        </p:nvSpPr>
+        <p:spPr>
+          <a:xfrm>
+            <a:off x="4850000" y="3050000"/>
+            <a:ext cx="3937099" cy="650000"/>
+          </a:xfrm>
+          <a:prstGeom prst="roundRect">
+            <a:avLst>
+              <a:gd name="adj" fmla="val 3645"/>
+            </a:avLst>
+          </a:prstGeom>
+          <a:solidFill>
+            <a:srgbClr val="F0F4F8"/>
+          </a:solidFill>
+        </p:spPr>
+        <p:txBody>
+          <a:bodyPr wrap="square" rtlCol="0" anchor="ctr"/>
+          <a:lstStyle/>
+          <a:p>
+            <a:pPr marL="0" indent="0">
+              <a:buNone/>
+            </a:pPr>
+            <a:endParaRPr lang="en-US" dirty="0"/>
+          </a:p>
+        </p:txBody>
+      </p:sp>
+      <p:sp>
+        <p:nvSpPr>
+          <p:cNvPr id="16" name="Shape 14"/>
+          <p:cNvSpPr/>
+          <p:nvPr/>
+        </p:nvSpPr>
+        <p:spPr>
+          <a:xfrm>
+            <a:off x="4850000" y="3069050"/>
+            <a:ext cx="3937099" cy="0"/>
+          </a:xfrm>
+          <a:prstGeom prst="line">
+            <a:avLst/>
+          </a:prstGeom>
+          <a:noFill/>
+          <a:ln w="38100">
+            <a:solidFill>
+              <a:srgbClr val="16A085"/>
+            </a:solidFill>
+            <a:prstDash val="solid"/>
+          </a:ln>
+        </p:spPr>
+      </p:sp>
+      <p:sp>
+        <p:nvSpPr>
+          <p:cNvPr id="17" name="Text 15"/>
+          <p:cNvSpPr/>
+          <p:nvPr/>
+        </p:nvSpPr>
+        <p:spPr>
+          <a:xfrm>
+            <a:off x="5002400" y="3150000"/>
+            <a:ext cx="3704945" cy="152400"/>
+          </a:xfrm>
+          <a:prstGeom prst="rect">
+            <a:avLst/>
+          </a:prstGeom>
+          <a:noFill/>
+        </p:spPr>
+        <p:txBody>
+          <a:bodyPr wrap="square" lIns="0" tIns="0" rIns="0" bIns="0" rtlCol="0" anchor="t"/>
+          <a:lstStyle/>
+          <a:p>
+            <a:pPr marL="0" indent="0" algn="l">
+              <a:lnSpc>
+                <a:spcPts val="1285"/>
+              </a:lnSpc>
+              <a:spcAft>
+                <a:spcPts val="400"/>
+              </a:spcAft>
+              <a:buNone/>
+            </a:pPr>
+            <a:r>
+              <a:rPr lang="en-US" sz="1050" b="1" dirty="0">
+                <a:solidFill>
+                  <a:srgbClr val="1B2A4A"/>
+                </a:solidFill>
+                <a:latin typeface="Arial" panose="020B0604020202090204" pitchFamily="34" charset="0"/>
+                <a:ea typeface="Arial" panose="020B0604020202090204" pitchFamily="34" charset="-122"/>
+                <a:cs typeface="Arial" panose="020B0604020202090204" pitchFamily="34" charset="-120"/>
+              </a:rPr>
+              <a:t>Connecting the evidence</a:t>
+            </a:r>
+            <a:endParaRPr lang="en-US" sz="1050" dirty="0"/>
+          </a:p>
+        </p:txBody>
+      </p:sp>
+      <p:sp>
+        <p:nvSpPr>
+          <p:cNvPr id="18" name="Text 16"/>
+          <p:cNvSpPr/>
+          <p:nvPr/>
+        </p:nvSpPr>
+        <p:spPr>
+          <a:xfrm>
+            <a:off x="5002400" y="3330000"/>
+            <a:ext cx="3704945" cy="330000"/>
+          </a:xfrm>
+          <a:prstGeom prst="rect">
+            <a:avLst/>
+          </a:prstGeom>
+          <a:noFill/>
+        </p:spPr>
+        <p:txBody>
+          <a:bodyPr wrap="square" lIns="0" tIns="0" rIns="0" bIns="0" rtlCol="0" anchor="t"/>
+          <a:lstStyle/>
+          <a:p>
+            <a:pPr marL="0" indent="0" algn="l">
+              <a:lnSpc>
+                <a:spcPts val="1285"/>
+              </a:lnSpc>
+              <a:spcAft>
+                <a:spcPts val="400"/>
+              </a:spcAft>
+              <a:buNone/>
+            </a:pPr>
+            <a:r>
+              <a:rPr lang="en-US" sz="900" dirty="0">
+                <a:solidFill>
+                  <a:srgbClr val="2C3E50"/>
+                </a:solidFill>
+                <a:latin typeface="Arial" panose="020B0604020202090204" pitchFamily="34" charset="0"/>
+                <a:ea typeface="Arial" panose="020B0604020202090204" pitchFamily="34" charset="-122"/>
+                <a:cs typeface="Arial" panose="020B0604020202090204" pitchFamily="34" charset="-120"/>
+              </a:rPr>
+              <a:t>Cluster segregation corroborates the nearest-neighbor finding (100% AI-AI nearest neighbors) and the topic separation. Across three independent methods — NN analysis, LDA topic modeling, and GMM clustering — humans and AI occupy different semantic territories.</a:t>
+            </a:r>
+            <a:endParaRPr lang="en-US" sz="900" dirty="0"/>
+          </a:p>
+        </p:txBody>
+      </p:sp>
+    </p:spTree>
+  </p:cSld>
+  <p:clrMapOvr>
+    <a:masterClrMapping/>
+  </p:clrMapOvr>
+</p:sld>
+</file>
+
+<file path=ppt/slides/slide15.xml><?xml version="1.0" encoding="utf-8"?>
+<p:sld xmlns:a="http://schemas.openxmlformats.org/drawingml/2006/main" xmlns:r="http://schemas.openxmlformats.org/officeDocument/2006/relationships" xmlns:p="http://schemas.openxmlformats.org/presentationml/2006/main">
+  <p:cSld>
+    <p:bg>
+      <p:bgPr>
+        <a:solidFill>
+          <a:srgbClr val="FFFFFF"/>
+        </a:solidFill>
+        <a:effectLst/>
+      </p:bgPr>
+    </p:bg>
+    <p:spTree>
+      <p:nvGrpSpPr>
+        <p:cNvPr id="1" name=""/>
+        <p:cNvGrpSpPr/>
+        <p:nvPr/>
+      </p:nvGrpSpPr>
+      <p:grpSpPr>
+        <a:xfrm>
+          <a:off x="0" y="0"/>
+          <a:ext cx="0" cy="0"/>
+          <a:chOff x="0" y="0"/>
+          <a:chExt cx="0" cy="0"/>
+        </a:xfrm>
+      </p:grpSpPr>
+      <p:sp>
+        <p:nvSpPr>
+          <p:cNvPr id="2" name="Text 0"/>
+          <p:cNvSpPr/>
+          <p:nvPr/>
+        </p:nvSpPr>
+        <p:spPr>
+          <a:xfrm>
+            <a:off x="0" y="0"/>
+            <a:ext cx="9144000" cy="650677"/>
+          </a:xfrm>
+          <a:prstGeom prst="rect">
+            <a:avLst/>
+          </a:prstGeom>
+          <a:solidFill>
+            <a:srgbClr val="1B2A4A"/>
+          </a:solidFill>
+        </p:spPr>
+        <p:txBody>
+          <a:bodyPr wrap="square" rtlCol="0" anchor="ctr"/>
+          <a:lstStyle/>
+          <a:p>
+            <a:pPr marL="0" indent="0">
+              <a:buNone/>
+            </a:pPr>
+            <a:endParaRPr lang="en-US" dirty="0"/>
+          </a:p>
+        </p:txBody>
+      </p:sp>
+      <p:sp>
+        <p:nvSpPr>
+          <p:cNvPr id="3" name="Text 1"/>
+          <p:cNvSpPr/>
+          <p:nvPr/>
+        </p:nvSpPr>
+        <p:spPr>
+          <a:xfrm>
+            <a:off x="507950" y="177701"/>
+            <a:ext cx="8290661" cy="295275"/>
+          </a:xfrm>
+          <a:prstGeom prst="rect">
+            <a:avLst/>
+          </a:prstGeom>
+          <a:noFill/>
+        </p:spPr>
+        <p:txBody>
+          <a:bodyPr wrap="square" lIns="0" tIns="0" rIns="0" bIns="0" rtlCol="0" anchor="t"/>
+          <a:lstStyle/>
+          <a:p>
+            <a:pPr marL="0" indent="0" algn="l">
+              <a:buNone/>
+            </a:pPr>
+            <a:r>
+              <a:rPr lang="en-US" sz="2000" b="1" dirty="0">
+                <a:solidFill>
+                  <a:srgbClr val="FFFFFF"/>
+                </a:solidFill>
+                <a:latin typeface="Arial" panose="020B0604020202090204" pitchFamily="34" charset="0"/>
+                <a:ea typeface="Arial" panose="020B0604020202090204" pitchFamily="34" charset="-122"/>
+                <a:cs typeface="Arial" panose="020B0604020202090204" pitchFamily="34" charset="-120"/>
+              </a:rPr>
+              <a:t>Integrated Findings Across All Analyses</a:t>
+            </a:r>
+            <a:endParaRPr lang="en-US" sz="2000" dirty="0"/>
+          </a:p>
+        </p:txBody>
+      </p:sp>
+      <p:sp>
+        <p:nvSpPr>
+          <p:cNvPr id="4" name="Text 2"/>
+          <p:cNvSpPr/>
+          <p:nvPr/>
+        </p:nvSpPr>
+        <p:spPr>
+          <a:xfrm>
+            <a:off x="507950" y="853827"/>
+            <a:ext cx="8290661" cy="171450"/>
+          </a:xfrm>
+          <a:prstGeom prst="rect">
+            <a:avLst/>
+          </a:prstGeom>
+          <a:noFill/>
+        </p:spPr>
+        <p:txBody>
+          <a:bodyPr wrap="square" lIns="0" tIns="0" rIns="0" bIns="0" rtlCol="0" anchor="t"/>
+          <a:lstStyle/>
+          <a:p>
+            <a:pPr marL="0" indent="0" algn="l">
+              <a:spcAft>
+                <a:spcPts val="600"/>
+              </a:spcAft>
+              <a:buNone/>
+            </a:pPr>
+            <a:r>
+              <a:rPr lang="en-US" sz="1200" b="1" dirty="0">
+                <a:solidFill>
+                  <a:srgbClr val="1B2A4A"/>
+                </a:solidFill>
+                <a:latin typeface="Arial" panose="020B0604020202090204" pitchFamily="34" charset="0"/>
+                <a:ea typeface="Arial" panose="020B0604020202090204" pitchFamily="34" charset="-122"/>
+                <a:cs typeface="Arial" panose="020B0604020202090204" pitchFamily="34" charset="-120"/>
+              </a:rPr>
+              <a:t>Convergent evidence from diversity, novelty, thematic, and cluster analyses</a:t>
+            </a:r>
+            <a:endParaRPr lang="en-US" sz="1200" dirty="0"/>
+          </a:p>
+        </p:txBody>
+      </p:sp>
+      <p:sp>
+        <p:nvSpPr>
+          <p:cNvPr id="5" name="Text 3"/>
+          <p:cNvSpPr/>
+          <p:nvPr/>
+        </p:nvSpPr>
+        <p:spPr>
+          <a:xfrm>
+            <a:off x="507950" y="1101477"/>
+            <a:ext cx="444401" cy="25301"/>
+          </a:xfrm>
+          <a:prstGeom prst="rect">
+            <a:avLst/>
+          </a:prstGeom>
+          <a:solidFill>
+            <a:srgbClr val="E8505B"/>
+          </a:solidFill>
+        </p:spPr>
+        <p:txBody>
+          <a:bodyPr wrap="square" rtlCol="0" anchor="ctr"/>
+          <a:lstStyle/>
+          <a:p>
+            <a:pPr marL="0" indent="0">
+              <a:buNone/>
+            </a:pPr>
+            <a:endParaRPr lang="en-US" dirty="0"/>
+          </a:p>
+        </p:txBody>
+      </p:sp>
+      <p:sp>
+        <p:nvSpPr>
+          <p:cNvPr id="6" name="Text 4"/>
+          <p:cNvSpPr/>
+          <p:nvPr/>
+        </p:nvSpPr>
+        <p:spPr>
+          <a:xfrm>
+            <a:off x="507950" y="1253728"/>
+            <a:ext cx="3937099" cy="1120000"/>
+          </a:xfrm>
+          <a:prstGeom prst="roundRect">
+            <a:avLst>
+              <a:gd name="adj" fmla="val 3645"/>
+            </a:avLst>
+          </a:prstGeom>
+          <a:solidFill>
+            <a:srgbClr val="FDF8F8"/>
+          </a:solidFill>
+        </p:spPr>
+        <p:txBody>
+          <a:bodyPr wrap="square" rtlCol="0" anchor="ctr"/>
+          <a:lstStyle/>
+          <a:p>
+            <a:pPr marL="0" indent="0">
+              <a:buNone/>
+            </a:pPr>
+            <a:endParaRPr lang="en-US" dirty="0"/>
+          </a:p>
+        </p:txBody>
+      </p:sp>
+      <p:sp>
+        <p:nvSpPr>
+          <p:cNvPr id="7" name="Shape 5"/>
+          <p:cNvSpPr/>
+          <p:nvPr/>
+        </p:nvSpPr>
+        <p:spPr>
+          <a:xfrm>
+            <a:off x="507950" y="1272778"/>
+            <a:ext cx="3937099" cy="0"/>
+          </a:xfrm>
+          <a:prstGeom prst="line">
+            <a:avLst/>
+          </a:prstGeom>
+          <a:noFill/>
+          <a:ln w="38100">
+            <a:solidFill>
+              <a:srgbClr val="E8505B"/>
+            </a:solidFill>
+            <a:prstDash val="solid"/>
+          </a:ln>
+        </p:spPr>
+      </p:sp>
+      <p:sp>
+        <p:nvSpPr>
+          <p:cNvPr id="8" name="Text 6"/>
+          <p:cNvSpPr/>
+          <p:nvPr/>
+        </p:nvSpPr>
+        <p:spPr>
+          <a:xfrm>
+            <a:off x="660350" y="1353728"/>
+            <a:ext cx="3700000" cy="152400"/>
+          </a:xfrm>
+          <a:prstGeom prst="rect">
+            <a:avLst/>
+          </a:prstGeom>
+          <a:noFill/>
+        </p:spPr>
+        <p:txBody>
+          <a:bodyPr wrap="square" lIns="0" tIns="0" rIns="0" bIns="0" rtlCol="0" anchor="t"/>
+          <a:lstStyle/>
+          <a:p>
+            <a:pPr marL="0" indent="0" algn="l">
+              <a:lnSpc>
+                <a:spcPts val="1285"/>
+              </a:lnSpc>
+              <a:spcAft>
+                <a:spcPts val="400"/>
+              </a:spcAft>
+              <a:buNone/>
+            </a:pPr>
+            <a:r>
+              <a:rPr lang="en-US" sz="1050" b="1" dirty="0">
+                <a:solidFill>
+                  <a:srgbClr val="1B2A4A"/>
+                </a:solidFill>
+                <a:latin typeface="Arial" panose="020B0604020202090204" pitchFamily="34" charset="0"/>
+                <a:ea typeface="Arial" panose="020B0604020202090204" pitchFamily="34" charset="-122"/>
+                <a:cs typeface="Arial" panose="020B0604020202090204" pitchFamily="34" charset="-120"/>
+              </a:rPr>
+              <a:t>Diversity ranking is consistent</a:t>
+            </a:r>
+            <a:endParaRPr lang="en-US" sz="1050" dirty="0"/>
+          </a:p>
+        </p:txBody>
+      </p:sp>
+      <p:sp>
+        <p:nvSpPr>
+          <p:cNvPr id="9" name="Text 7"/>
+          <p:cNvSpPr/>
+          <p:nvPr/>
+        </p:nvSpPr>
+        <p:spPr>
+          <a:xfrm>
+            <a:off x="660350" y="1533728"/>
+            <a:ext cx="3700000" cy="780000"/>
+          </a:xfrm>
+          <a:prstGeom prst="rect">
+            <a:avLst/>
+          </a:prstGeom>
+          <a:noFill/>
+        </p:spPr>
+        <p:txBody>
+          <a:bodyPr wrap="square" lIns="0" tIns="0" rIns="0" bIns="0" rtlCol="0" anchor="t"/>
+          <a:lstStyle/>
+          <a:p>
+            <a:pPr marL="0" indent="0" algn="l">
+              <a:lnSpc>
+                <a:spcPts val="1285"/>
+              </a:lnSpc>
+              <a:spcAft>
+                <a:spcPts val="400"/>
+              </a:spcAft>
+              <a:buNone/>
+            </a:pPr>
+            <a:r>
+              <a:rPr lang="en-US" sz="900" dirty="0">
+                <a:solidFill>
+                  <a:srgbClr val="2C3E50"/>
+                </a:solidFill>
+                <a:latin typeface="Arial" panose="020B0604020202090204" pitchFamily="34" charset="0"/>
+                <a:ea typeface="Arial" panose="020B0604020202090204" pitchFamily="34" charset="-122"/>
+                <a:cs typeface="Arial" panose="020B0604020202090204" pitchFamily="34" charset="-120"/>
+              </a:rPr>
+              <a:t>Claude &gt; Human &gt; Gemini &gt; GPT-5.2, confirmed by pairwise, centroid, and NN analyses. All three metrics agree: same ranking, consistent effect sizes, robust under permutation.</a:t>
+            </a:r>
+            <a:endParaRPr lang="en-US" sz="900" dirty="0"/>
+          </a:p>
+        </p:txBody>
+      </p:sp>
+      <p:sp>
+        <p:nvSpPr>
+          <p:cNvPr id="10" name="Text 8"/>
+          <p:cNvSpPr/>
+          <p:nvPr/>
+        </p:nvSpPr>
+        <p:spPr>
+          <a:xfrm>
+            <a:off x="4698950" y="1253728"/>
+            <a:ext cx="3937099" cy="1120000"/>
+          </a:xfrm>
+          <a:prstGeom prst="roundRect">
+            <a:avLst>
+              <a:gd name="adj" fmla="val 3645"/>
+            </a:avLst>
+          </a:prstGeom>
+          <a:solidFill>
+            <a:srgbClr val="F7F9FC"/>
+          </a:solidFill>
+        </p:spPr>
+        <p:txBody>
+          <a:bodyPr wrap="square" rtlCol="0" anchor="ctr"/>
+          <a:lstStyle/>
+          <a:p>
+            <a:pPr marL="0" indent="0">
+              <a:buNone/>
+            </a:pPr>
+            <a:endParaRPr lang="en-US" dirty="0"/>
+          </a:p>
+        </p:txBody>
+      </p:sp>
+      <p:sp>
+        <p:nvSpPr>
+          <p:cNvPr id="11" name="Shape 9"/>
+          <p:cNvSpPr/>
+          <p:nvPr/>
+        </p:nvSpPr>
+        <p:spPr>
+          <a:xfrm>
+            <a:off x="4698950" y="1272778"/>
+            <a:ext cx="3937099" cy="0"/>
+          </a:xfrm>
+          <a:prstGeom prst="line">
+            <a:avLst/>
+          </a:prstGeom>
+          <a:noFill/>
+          <a:ln w="38100">
+            <a:solidFill>
+              <a:srgbClr val="2E86AB"/>
+            </a:solidFill>
+            <a:prstDash val="solid"/>
+          </a:ln>
+        </p:spPr>
+      </p:sp>
+      <p:sp>
+        <p:nvSpPr>
+          <p:cNvPr id="12" name="Text 10"/>
+          <p:cNvSpPr/>
+          <p:nvPr/>
+        </p:nvSpPr>
+        <p:spPr>
+          <a:xfrm>
+            <a:off x="4851350" y="1353728"/>
+            <a:ext cx="3700000" cy="152400"/>
+          </a:xfrm>
+          <a:prstGeom prst="rect">
+            <a:avLst/>
+          </a:prstGeom>
+          <a:noFill/>
+        </p:spPr>
+        <p:txBody>
+          <a:bodyPr wrap="square" lIns="0" tIns="0" rIns="0" bIns="0" rtlCol="0" anchor="t"/>
+          <a:lstStyle/>
+          <a:p>
+            <a:pPr marL="0" indent="0" algn="l">
+              <a:lnSpc>
+                <a:spcPts val="1285"/>
+              </a:lnSpc>
+              <a:spcAft>
+                <a:spcPts val="400"/>
+              </a:spcAft>
+              <a:buNone/>
+            </a:pPr>
+            <a:r>
+              <a:rPr lang="en-US" sz="1050" b="1" dirty="0">
+                <a:solidFill>
+                  <a:srgbClr val="1B2A4A"/>
+                </a:solidFill>
+                <a:latin typeface="Arial" panose="020B0604020202090204" pitchFamily="34" charset="0"/>
+                <a:ea typeface="Arial" panose="020B0604020202090204" pitchFamily="34" charset="-122"/>
+                <a:cs typeface="Arial" panose="020B0604020202090204" pitchFamily="34" charset="-120"/>
+              </a:rPr>
+              <a:t>Novelty tracks a different dimension</a:t>
+            </a:r>
+            <a:endParaRPr lang="en-US" sz="1050" dirty="0"/>
+          </a:p>
+        </p:txBody>
+      </p:sp>
+      <p:sp>
+        <p:nvSpPr>
+          <p:cNvPr id="13" name="Text 11"/>
+          <p:cNvSpPr/>
+          <p:nvPr/>
+        </p:nvSpPr>
+        <p:spPr>
+          <a:xfrm>
+            <a:off x="4851350" y="1533728"/>
+            <a:ext cx="3700000" cy="780000"/>
+          </a:xfrm>
+          <a:prstGeom prst="rect">
+            <a:avLst/>
+          </a:prstGeom>
+          <a:noFill/>
+        </p:spPr>
+        <p:txBody>
+          <a:bodyPr wrap="square" lIns="0" tIns="0" rIns="0" bIns="0" rtlCol="0" anchor="t"/>
+          <a:lstStyle/>
+          <a:p>
+            <a:pPr marL="0" indent="0" algn="l">
+              <a:lnSpc>
+                <a:spcPts val="1285"/>
+              </a:lnSpc>
+              <a:spcAft>
+                <a:spcPts val="400"/>
+              </a:spcAft>
+              <a:buNone/>
+            </a:pPr>
+            <a:r>
+              <a:rPr lang="en-US" sz="900" dirty="0">
+                <a:solidFill>
+                  <a:srgbClr val="2C3E50"/>
+                </a:solidFill>
+                <a:latin typeface="Arial" panose="020B0604020202090204" pitchFamily="34" charset="0"/>
+                <a:ea typeface="Arial" panose="020B0604020202090204" pitchFamily="34" charset="-122"/>
+                <a:cs typeface="Arial" panose="020B0604020202090204" pitchFamily="34" charset="-120"/>
+              </a:rPr>
+              <a:t>Human &gt; Claude &gt; GPT-5.2 ≈ Gemini for novelty. Humans are both moderately diverse AND more novel. Claude is most diverse but only moderately novel, suggesting its spread is within AI-typical territory. Diversity ≠ novelty.</a:t>
+            </a:r>
+            <a:endParaRPr lang="en-US" sz="900" dirty="0"/>
+          </a:p>
+        </p:txBody>
+      </p:sp>
+      <p:sp>
+        <p:nvSpPr>
+          <p:cNvPr id="14" name="Text 12"/>
+          <p:cNvSpPr/>
+          <p:nvPr/>
+        </p:nvSpPr>
+        <p:spPr>
+          <a:xfrm>
+            <a:off x="507950" y="2500000"/>
+            <a:ext cx="3937099" cy="1120000"/>
+          </a:xfrm>
+          <a:prstGeom prst="roundRect">
+            <a:avLst>
+              <a:gd name="adj" fmla="val 3645"/>
+            </a:avLst>
+          </a:prstGeom>
+          <a:solidFill>
+            <a:srgbClr val="F7F9FC"/>
+          </a:solidFill>
+        </p:spPr>
+        <p:txBody>
+          <a:bodyPr wrap="square" rtlCol="0" anchor="ctr"/>
+          <a:lstStyle/>
+          <a:p>
+            <a:pPr marL="0" indent="0">
+              <a:buNone/>
+            </a:pPr>
+            <a:endParaRPr lang="en-US" dirty="0"/>
+          </a:p>
+        </p:txBody>
+      </p:sp>
+      <p:sp>
+        <p:nvSpPr>
+          <p:cNvPr id="15" name="Shape 13"/>
+          <p:cNvSpPr/>
+          <p:nvPr/>
+        </p:nvSpPr>
+        <p:spPr>
+          <a:xfrm>
+            <a:off x="507950" y="2519050"/>
+            <a:ext cx="3937099" cy="0"/>
+          </a:xfrm>
+          <a:prstGeom prst="line">
+            <a:avLst/>
+          </a:prstGeom>
+          <a:noFill/>
+          <a:ln w="38100">
+            <a:solidFill>
+              <a:srgbClr val="16A085"/>
+            </a:solidFill>
+            <a:prstDash val="solid"/>
+          </a:ln>
+        </p:spPr>
+      </p:sp>
+      <p:sp>
+        <p:nvSpPr>
+          <p:cNvPr id="16" name="Text 14"/>
+          <p:cNvSpPr/>
+          <p:nvPr/>
+        </p:nvSpPr>
+        <p:spPr>
+          <a:xfrm>
+            <a:off x="660350" y="2600000"/>
+            <a:ext cx="3700000" cy="152400"/>
+          </a:xfrm>
+          <a:prstGeom prst="rect">
+            <a:avLst/>
+          </a:prstGeom>
+          <a:noFill/>
+        </p:spPr>
+        <p:txBody>
+          <a:bodyPr wrap="square" lIns="0" tIns="0" rIns="0" bIns="0" rtlCol="0" anchor="t"/>
+          <a:lstStyle/>
+          <a:p>
+            <a:pPr marL="0" indent="0" algn="l">
+              <a:lnSpc>
+                <a:spcPts val="1285"/>
+              </a:lnSpc>
+              <a:spcAft>
+                <a:spcPts val="400"/>
+              </a:spcAft>
+              <a:buNone/>
+            </a:pPr>
+            <a:r>
+              <a:rPr lang="en-US" sz="1050" b="1" dirty="0">
+                <a:solidFill>
+                  <a:srgbClr val="1B2A4A"/>
+                </a:solidFill>
+                <a:latin typeface="Arial" panose="020B0604020202090204" pitchFamily="34" charset="0"/>
+                <a:ea typeface="Arial" panose="020B0604020202090204" pitchFamily="34" charset="-122"/>
+                <a:cs typeface="Arial" panose="020B0604020202090204" pitchFamily="34" charset="-120"/>
+              </a:rPr>
+              <a:t>Semantic segregation confirmed 3 ways</a:t>
+            </a:r>
+            <a:endParaRPr lang="en-US" sz="1050" dirty="0"/>
+          </a:p>
+        </p:txBody>
+      </p:sp>
+      <p:sp>
+        <p:nvSpPr>
+          <p:cNvPr id="17" name="Text 15"/>
+          <p:cNvSpPr/>
+          <p:nvPr/>
+        </p:nvSpPr>
+        <p:spPr>
+          <a:xfrm>
+            <a:off x="660350" y="2780000"/>
+            <a:ext cx="3700000" cy="780000"/>
+          </a:xfrm>
+          <a:prstGeom prst="rect">
+            <a:avLst/>
+          </a:prstGeom>
+          <a:noFill/>
+        </p:spPr>
+        <p:txBody>
+          <a:bodyPr wrap="square" lIns="0" tIns="0" rIns="0" bIns="0" rtlCol="0" anchor="t"/>
+          <a:lstStyle/>
+          <a:p>
+            <a:pPr marL="0" indent="0" algn="l">
+              <a:lnSpc>
+                <a:spcPts val="1285"/>
+              </a:lnSpc>
+              <a:spcAft>
+                <a:spcPts val="400"/>
+              </a:spcAft>
+              <a:buNone/>
+            </a:pPr>
+            <a:r>
+              <a:rPr lang="en-US" sz="900" dirty="0">
+                <a:solidFill>
+                  <a:srgbClr val="2C3E50"/>
+                </a:solidFill>
+                <a:latin typeface="Arial" panose="020B0604020202090204" pitchFamily="34" charset="0"/>
+                <a:ea typeface="Arial" panose="020B0604020202090204" pitchFamily="34" charset="-122"/>
+                <a:cs typeface="Arial" panose="020B0604020202090204" pitchFamily="34" charset="-120"/>
+              </a:rPr>
+              <a:t>100% AI-AI nearest neighbors (NN analysis). Complete topic separation (LDA). Two AI-only clusters (GMM, NMI p &lt; 0.0001). Human and AI proposals occupy different semantic regions, even when AI shows high internal diversity.</a:t>
+            </a:r>
+            <a:endParaRPr lang="en-US" sz="900" dirty="0"/>
+          </a:p>
+        </p:txBody>
+      </p:sp>
+      <p:sp>
+        <p:nvSpPr>
+          <p:cNvPr id="18" name="Text 16"/>
+          <p:cNvSpPr/>
+          <p:nvPr/>
+        </p:nvSpPr>
+        <p:spPr>
+          <a:xfrm>
+            <a:off x="4698950" y="2500000"/>
+            <a:ext cx="3937099" cy="1120000"/>
+          </a:xfrm>
+          <a:prstGeom prst="roundRect">
+            <a:avLst>
+              <a:gd name="adj" fmla="val 3645"/>
+            </a:avLst>
+          </a:prstGeom>
+          <a:solidFill>
+            <a:srgbClr val="F0F4F8"/>
+          </a:solidFill>
+        </p:spPr>
+        <p:txBody>
+          <a:bodyPr wrap="square" rtlCol="0" anchor="ctr"/>
+          <a:lstStyle/>
+          <a:p>
+            <a:pPr marL="0" indent="0">
+              <a:buNone/>
+            </a:pPr>
+            <a:endParaRPr lang="en-US" dirty="0"/>
+          </a:p>
+        </p:txBody>
+      </p:sp>
+      <p:sp>
+        <p:nvSpPr>
+          <p:cNvPr id="19" name="Shape 17"/>
+          <p:cNvSpPr/>
+          <p:nvPr/>
+        </p:nvSpPr>
+        <p:spPr>
+          <a:xfrm>
+            <a:off x="4698950" y="2519050"/>
+            <a:ext cx="3937099" cy="0"/>
+          </a:xfrm>
+          <a:prstGeom prst="line">
+            <a:avLst/>
+          </a:prstGeom>
+          <a:noFill/>
+          <a:ln w="38100">
+            <a:solidFill>
+              <a:srgbClr val="8E44AD"/>
+            </a:solidFill>
+            <a:prstDash val="solid"/>
+          </a:ln>
+        </p:spPr>
+      </p:sp>
+      <p:sp>
+        <p:nvSpPr>
+          <p:cNvPr id="20" name="Text 18"/>
+          <p:cNvSpPr/>
+          <p:nvPr/>
+        </p:nvSpPr>
+        <p:spPr>
+          <a:xfrm>
+            <a:off x="4851350" y="2600000"/>
+            <a:ext cx="3700000" cy="152400"/>
+          </a:xfrm>
+          <a:prstGeom prst="rect">
+            <a:avLst/>
+          </a:prstGeom>
+          <a:noFill/>
+        </p:spPr>
+        <p:txBody>
+          <a:bodyPr wrap="square" lIns="0" tIns="0" rIns="0" bIns="0" rtlCol="0" anchor="t"/>
+          <a:lstStyle/>
+          <a:p>
+            <a:pPr marL="0" indent="0" algn="l">
+              <a:lnSpc>
+                <a:spcPts val="1285"/>
+              </a:lnSpc>
+              <a:spcAft>
+                <a:spcPts val="400"/>
+              </a:spcAft>
+              <a:buNone/>
+            </a:pPr>
+            <a:r>
+              <a:rPr lang="en-US" sz="1050" b="1" dirty="0">
+                <a:solidFill>
+                  <a:srgbClr val="1B2A4A"/>
+                </a:solidFill>
+                <a:latin typeface="Arial" panose="020B0604020202090204" pitchFamily="34" charset="0"/>
+                <a:ea typeface="Arial" panose="020B0604020202090204" pitchFamily="34" charset="-122"/>
+                <a:cs typeface="Arial" panose="020B0604020202090204" pitchFamily="34" charset="-120"/>
+              </a:rPr>
+              <a:t>Aggregation masks real differences</a:t>
+            </a:r>
+            <a:endParaRPr lang="en-US" sz="1050" dirty="0"/>
+          </a:p>
+        </p:txBody>
+      </p:sp>
+      <p:sp>
+        <p:nvSpPr>
+          <p:cNvPr id="21" name="Text 19"/>
+          <p:cNvSpPr/>
+          <p:nvPr/>
+        </p:nvSpPr>
+        <p:spPr>
+          <a:xfrm>
+            <a:off x="4851350" y="2780000"/>
+            <a:ext cx="3700000" cy="780000"/>
+          </a:xfrm>
+          <a:prstGeom prst="rect">
+            <a:avLst/>
+          </a:prstGeom>
+          <a:noFill/>
+        </p:spPr>
+        <p:txBody>
+          <a:bodyPr wrap="square" lIns="0" tIns="0" rIns="0" bIns="0" rtlCol="0" anchor="t"/>
+          <a:lstStyle/>
+          <a:p>
+            <a:pPr marL="0" indent="0" algn="l">
+              <a:lnSpc>
+                <a:spcPts val="1285"/>
+              </a:lnSpc>
+              <a:spcAft>
+                <a:spcPts val="400"/>
+              </a:spcAft>
+              <a:buNone/>
+            </a:pPr>
+            <a:r>
+              <a:rPr lang="en-US" sz="900" dirty="0">
+                <a:solidFill>
+                  <a:srgbClr val="2C3E50"/>
+                </a:solidFill>
+                <a:latin typeface="Arial" panose="020B0604020202090204" pitchFamily="34" charset="0"/>
+                <a:ea typeface="Arial" panose="020B0604020202090204" pitchFamily="34" charset="-122"/>
+                <a:cs typeface="Arial" panose="020B0604020202090204" pitchFamily="34" charset="-120"/>
+              </a:rPr>
+              <a:t>“AI vs Human” centroid dispersion: non-significant (p = 0.22). But per-model: Claude d = +0.99, GPT-5.2 d = −1.00. Similarly, topic entropy (AI = 1.94, Human = 0.00) hides that humans produce truly distinctive ideas rather than a single narrow theme.</a:t>
+            </a:r>
+            <a:endParaRPr lang="en-US" sz="900" dirty="0"/>
+          </a:p>
+        </p:txBody>
+      </p:sp>
+      <p:sp>
+        <p:nvSpPr>
+          <p:cNvPr id="22" name="Text 20"/>
+          <p:cNvSpPr/>
+          <p:nvPr/>
+        </p:nvSpPr>
+        <p:spPr>
+          <a:xfrm>
+            <a:off x="507950" y="3746272"/>
+            <a:ext cx="8128099" cy="500000"/>
+          </a:xfrm>
+          <a:prstGeom prst="roundRect">
+            <a:avLst>
+              <a:gd name="adj" fmla="val 3000"/>
+            </a:avLst>
+          </a:prstGeom>
+          <a:solidFill>
+            <a:srgbClr val="1B2A4A"/>
+          </a:solidFill>
+        </p:spPr>
+        <p:txBody>
+          <a:bodyPr wrap="square" rtlCol="0" anchor="ctr"/>
+          <a:lstStyle/>
+          <a:p>
+            <a:pPr marL="0" indent="0">
+              <a:buNone/>
+            </a:pPr>
+            <a:endParaRPr lang="en-US" dirty="0"/>
+          </a:p>
+        </p:txBody>
+      </p:sp>
+      <p:sp>
+        <p:nvSpPr>
+          <p:cNvPr id="23" name="Text 21"/>
+          <p:cNvSpPr/>
+          <p:nvPr/>
+        </p:nvSpPr>
+        <p:spPr>
+          <a:xfrm>
+            <a:off x="660350" y="3846272"/>
+            <a:ext cx="7900000" cy="350000"/>
+          </a:xfrm>
+          <a:prstGeom prst="rect">
+            <a:avLst/>
+          </a:prstGeom>
+          <a:noFill/>
+        </p:spPr>
+        <p:txBody>
+          <a:bodyPr wrap="square" lIns="0" tIns="0" rIns="0" bIns="0" rtlCol="0" anchor="t"/>
+          <a:lstStyle/>
+          <a:p>
+            <a:pPr marL="0" indent="0" algn="l">
+              <a:lnSpc>
+                <a:spcPts val="1400"/>
+              </a:lnSpc>
+              <a:spcAft>
+                <a:spcPts val="400"/>
+              </a:spcAft>
+              <a:buNone/>
+            </a:pPr>
+            <a:r>
+              <a:rPr lang="en-US" sz="1000" b="1" dirty="0">
+                <a:solidFill>
+                  <a:srgbClr val="FFFFFF"/>
+                </a:solidFill>
+                <a:latin typeface="Arial" panose="020B0604020202090204" pitchFamily="34" charset="0"/>
+                <a:ea typeface="Arial" panose="020B0604020202090204" pitchFamily="34" charset="-122"/>
+                <a:cs typeface="Arial" panose="020B0604020202090204" pitchFamily="34" charset="-120"/>
+              </a:rPr>
+              <a:t>Bottom line: AI models generate systematically different kinds of ideas than humans, and they differ dramatically from each other. Human proposals are more novel relative to existing literature and occupy unique conceptual territory that no AI model fully reaches.</a:t>
+            </a:r>
+            <a:endParaRPr lang="en-US" sz="1000" dirty="0"/>
+          </a:p>
+        </p:txBody>
+      </p:sp>
+    </p:spTree>
+  </p:cSld>
+  <p:clrMapOvr>
+    <a:masterClrMapping/>
+  </p:clrMapOvr>
+</p:sld>
+</file>
+
+<file path=ppt/slides/slide16.xml><?xml version="1.0" encoding="utf-8"?>
+<p:sld xmlns:a="http://schemas.openxmlformats.org/drawingml/2006/main" xmlns:r="http://schemas.openxmlformats.org/officeDocument/2006/relationships" xmlns:p="http://schemas.openxmlformats.org/presentationml/2006/main">
+  <p:cSld>
+    <p:bg>
+      <p:bgPr>
+        <a:solidFill>
+          <a:srgbClr val="FFFFFF"/>
+        </a:solidFill>
+        <a:effectLst/>
+      </p:bgPr>
+    </p:bg>
+    <p:spTree>
+      <p:nvGrpSpPr>
+        <p:cNvPr id="1" name=""/>
+        <p:cNvGrpSpPr/>
+        <p:nvPr/>
+      </p:nvGrpSpPr>
+      <p:grpSpPr>
+        <a:xfrm>
+          <a:off x="0" y="0"/>
+          <a:ext cx="0" cy="0"/>
+          <a:chOff x="0" y="0"/>
+          <a:chExt cx="0" cy="0"/>
+        </a:xfrm>
+      </p:grpSpPr>
+      <p:sp>
+        <p:nvSpPr>
+          <p:cNvPr id="2" name="Text 0"/>
+          <p:cNvSpPr/>
+          <p:nvPr/>
+        </p:nvSpPr>
+        <p:spPr>
+          <a:xfrm>
+            <a:off x="0" y="0"/>
+            <a:ext cx="9144000" cy="650677"/>
+          </a:xfrm>
+          <a:prstGeom prst="rect">
+            <a:avLst/>
+          </a:prstGeom>
+          <a:solidFill>
+            <a:srgbClr val="1B2A4A"/>
+          </a:solidFill>
+        </p:spPr>
+        <p:txBody>
+          <a:bodyPr wrap="square" rtlCol="0" anchor="ctr"/>
+          <a:lstStyle/>
+          <a:p>
+            <a:pPr marL="0" indent="0">
+              <a:buNone/>
+            </a:pPr>
+            <a:endParaRPr lang="en-US" dirty="0"/>
+          </a:p>
+        </p:txBody>
+      </p:sp>
+      <p:sp>
+        <p:nvSpPr>
+          <p:cNvPr id="3" name="Text 1"/>
+          <p:cNvSpPr/>
+          <p:nvPr/>
+        </p:nvSpPr>
+        <p:spPr>
+          <a:xfrm>
+            <a:off x="507950" y="177701"/>
+            <a:ext cx="8290661" cy="295275"/>
+          </a:xfrm>
+          <a:prstGeom prst="rect">
+            <a:avLst/>
+          </a:prstGeom>
+          <a:noFill/>
+        </p:spPr>
+        <p:txBody>
+          <a:bodyPr wrap="square" lIns="0" tIns="0" rIns="0" bIns="0" rtlCol="0" anchor="t"/>
+          <a:lstStyle/>
+          <a:p>
+            <a:pPr marL="0" indent="0" algn="l">
+              <a:buNone/>
+            </a:pPr>
+            <a:r>
+              <a:rPr lang="en-US" sz="2000" b="1" dirty="0">
+                <a:solidFill>
+                  <a:srgbClr val="FFFFFF"/>
+                </a:solidFill>
+                <a:latin typeface="Arial" panose="020B0604020202090204" pitchFamily="34" charset="0"/>
+                <a:ea typeface="Arial" panose="020B0604020202090204" pitchFamily="34" charset="-122"/>
+                <a:cs typeface="Arial" panose="020B0604020202090204" pitchFamily="34" charset="-120"/>
+              </a:rPr>
+              <a:t>Key Findings</a:t>
+            </a:r>
+            <a:endParaRPr lang="en-US" sz="2000" dirty="0"/>
+          </a:p>
+        </p:txBody>
+      </p:sp>
+      <p:sp>
+        <p:nvSpPr>
+          <p:cNvPr id="4" name="Text 2"/>
+          <p:cNvSpPr/>
+          <p:nvPr/>
+        </p:nvSpPr>
+        <p:spPr>
+          <a:xfrm>
+            <a:off x="507950" y="853827"/>
+            <a:ext cx="3937099" cy="1050000"/>
+          </a:xfrm>
+          <a:prstGeom prst="roundRect">
+            <a:avLst>
+              <a:gd name="adj" fmla="val 3645"/>
+            </a:avLst>
+          </a:prstGeom>
+          <a:solidFill>
+            <a:srgbClr val="FDF8F8"/>
+          </a:solidFill>
+        </p:spPr>
+        <p:txBody>
+          <a:bodyPr wrap="square" rtlCol="0" anchor="ctr"/>
+          <a:lstStyle/>
+          <a:p>
+            <a:pPr marL="0" indent="0">
+              <a:buNone/>
+            </a:pPr>
+            <a:endParaRPr lang="en-US" dirty="0"/>
+          </a:p>
+        </p:txBody>
+      </p:sp>
+      <p:sp>
+        <p:nvSpPr>
+          <p:cNvPr id="5" name="Shape 3"/>
+          <p:cNvSpPr/>
+          <p:nvPr/>
+        </p:nvSpPr>
+        <p:spPr>
+          <a:xfrm>
+            <a:off x="507950" y="872877"/>
+            <a:ext cx="3937099" cy="0"/>
+          </a:xfrm>
+          <a:prstGeom prst="line">
+            <a:avLst/>
+          </a:prstGeom>
+          <a:noFill/>
+          <a:ln w="38100">
+            <a:solidFill>
+              <a:srgbClr val="E8505B"/>
+            </a:solidFill>
+            <a:prstDash val="solid"/>
+          </a:ln>
+        </p:spPr>
+      </p:sp>
+      <p:sp>
+        <p:nvSpPr>
+          <p:cNvPr id="6" name="Text 4"/>
+          <p:cNvSpPr/>
+          <p:nvPr/>
+        </p:nvSpPr>
+        <p:spPr>
+          <a:xfrm>
+            <a:off x="660350" y="999877"/>
+            <a:ext cx="3707099" cy="308521"/>
+          </a:xfrm>
+          <a:prstGeom prst="rect">
+            <a:avLst/>
+          </a:prstGeom>
+          <a:noFill/>
+        </p:spPr>
+        <p:txBody>
+          <a:bodyPr wrap="square" lIns="0" tIns="0" rIns="0" bIns="0" rtlCol="0" anchor="t"/>
+          <a:lstStyle/>
+          <a:p>
+            <a:pPr marL="0" indent="0" algn="l">
+              <a:lnSpc>
+                <a:spcPts val="2430"/>
+              </a:lnSpc>
+              <a:spcAft>
+                <a:spcPts val="400"/>
+              </a:spcAft>
+              <a:buNone/>
+            </a:pPr>
+            <a:r>
+              <a:rPr lang="en-US" sz="1800" b="1" dirty="0">
+                <a:solidFill>
+                  <a:srgbClr val="E8505B"/>
+                </a:solidFill>
+                <a:latin typeface="Arial" panose="020B0604020202090204" pitchFamily="34" charset="0"/>
+                <a:ea typeface="Arial" panose="020B0604020202090204" pitchFamily="34" charset="-122"/>
+                <a:cs typeface="Arial" panose="020B0604020202090204" pitchFamily="34" charset="-120"/>
+              </a:rPr>
+              <a:t>1</a:t>
+            </a:r>
+            <a:endParaRPr lang="en-US" sz="1800" dirty="0"/>
+          </a:p>
+        </p:txBody>
+      </p:sp>
+      <p:sp>
+        <p:nvSpPr>
+          <p:cNvPr id="7" name="Text 5"/>
+          <p:cNvSpPr/>
+          <p:nvPr/>
+        </p:nvSpPr>
+        <p:spPr>
+          <a:xfrm>
+            <a:off x="660350" y="1253827"/>
+            <a:ext cx="3707099" cy="152400"/>
+          </a:xfrm>
+          <a:prstGeom prst="rect">
+            <a:avLst/>
+          </a:prstGeom>
+          <a:noFill/>
+        </p:spPr>
+        <p:txBody>
+          <a:bodyPr wrap="square" lIns="0" tIns="0" rIns="0" bIns="0" rtlCol="0" anchor="t"/>
+          <a:lstStyle/>
+          <a:p>
+            <a:pPr marL="0" indent="0" algn="l">
+              <a:lnSpc>
+                <a:spcPts val="1285"/>
+              </a:lnSpc>
+              <a:spcAft>
+                <a:spcPts val="400"/>
+              </a:spcAft>
+              <a:buNone/>
+            </a:pPr>
+            <a:r>
+              <a:rPr lang="en-US" sz="1050" b="1" dirty="0">
+                <a:solidFill>
+                  <a:srgbClr val="1B2A4A"/>
+                </a:solidFill>
+                <a:latin typeface="Arial" panose="020B0604020202090204" pitchFamily="34" charset="0"/>
+                <a:ea typeface="Arial" panose="020B0604020202090204" pitchFamily="34" charset="-122"/>
+                <a:cs typeface="Arial" panose="020B0604020202090204" pitchFamily="34" charset="-120"/>
+              </a:rPr>
+              <a:t>Model-specific diversity varies dramatically</a:t>
+            </a:r>
+            <a:endParaRPr lang="en-US" sz="1050" dirty="0"/>
+          </a:p>
+        </p:txBody>
+      </p:sp>
+      <p:sp>
+        <p:nvSpPr>
+          <p:cNvPr id="8" name="Text 6"/>
+          <p:cNvSpPr/>
+          <p:nvPr/>
+        </p:nvSpPr>
+        <p:spPr>
+          <a:xfrm>
+            <a:off x="660350" y="1433827"/>
+            <a:ext cx="3707099" cy="420000"/>
+          </a:xfrm>
+          <a:prstGeom prst="rect">
+            <a:avLst/>
+          </a:prstGeom>
+          <a:noFill/>
+        </p:spPr>
+        <p:txBody>
+          <a:bodyPr wrap="square" lIns="0" tIns="0" rIns="0" bIns="0" rtlCol="0" anchor="t"/>
+          <a:lstStyle/>
+          <a:p>
+            <a:pPr marL="0" indent="0" algn="l">
+              <a:lnSpc>
+                <a:spcPts val="1285"/>
+              </a:lnSpc>
+              <a:spcAft>
+                <a:spcPts val="400"/>
+              </a:spcAft>
+              <a:buNone/>
+            </a:pPr>
+            <a:r>
+              <a:rPr lang="en-US" sz="900" dirty="0">
+                <a:solidFill>
+                  <a:srgbClr val="2C3E50"/>
+                </a:solidFill>
+                <a:latin typeface="Arial" panose="020B0604020202090204" pitchFamily="34" charset="0"/>
+                <a:ea typeface="Arial" panose="020B0604020202090204" pitchFamily="34" charset="-122"/>
+                <a:cs typeface="Arial" panose="020B0604020202090204" pitchFamily="34" charset="-120"/>
+              </a:rPr>
+              <a:t>Claude is more diverse than humans (d = +0.25, pairwise). GPT-5.2 shows mode collapse (d = −1.00). Gemini is intermediate (d = −0.73). There is no single “AI diversity” story.</a:t>
+            </a:r>
+            <a:endParaRPr lang="en-US" sz="900" dirty="0"/>
+          </a:p>
+        </p:txBody>
+      </p:sp>
+      <p:sp>
+        <p:nvSpPr>
+          <p:cNvPr id="9" name="Text 7"/>
+          <p:cNvSpPr/>
+          <p:nvPr/>
+        </p:nvSpPr>
+        <p:spPr>
+          <a:xfrm>
+            <a:off x="4698950" y="853827"/>
+            <a:ext cx="3937099" cy="1050000"/>
+          </a:xfrm>
+          <a:prstGeom prst="roundRect">
+            <a:avLst>
+              <a:gd name="adj" fmla="val 3645"/>
+            </a:avLst>
+          </a:prstGeom>
+          <a:solidFill>
+            <a:srgbClr val="F7F9FC"/>
+          </a:solidFill>
+        </p:spPr>
+        <p:txBody>
+          <a:bodyPr wrap="square" rtlCol="0" anchor="ctr"/>
+          <a:lstStyle/>
+          <a:p>
+            <a:pPr marL="0" indent="0">
+              <a:buNone/>
+            </a:pPr>
+            <a:endParaRPr lang="en-US" dirty="0"/>
+          </a:p>
+        </p:txBody>
+      </p:sp>
+      <p:sp>
+        <p:nvSpPr>
+          <p:cNvPr id="10" name="Shape 8"/>
+          <p:cNvSpPr/>
+          <p:nvPr/>
+        </p:nvSpPr>
+        <p:spPr>
+          <a:xfrm>
+            <a:off x="4698950" y="872877"/>
+            <a:ext cx="3937099" cy="0"/>
+          </a:xfrm>
+          <a:prstGeom prst="line">
+            <a:avLst/>
+          </a:prstGeom>
+          <a:noFill/>
+          <a:ln w="38100">
+            <a:solidFill>
+              <a:srgbClr val="2E86AB"/>
+            </a:solidFill>
+            <a:prstDash val="solid"/>
+          </a:ln>
+        </p:spPr>
+      </p:sp>
+      <p:sp>
+        <p:nvSpPr>
+          <p:cNvPr id="11" name="Text 9"/>
+          <p:cNvSpPr/>
+          <p:nvPr/>
+        </p:nvSpPr>
+        <p:spPr>
+          <a:xfrm>
+            <a:off x="4851350" y="999877"/>
+            <a:ext cx="3707099" cy="308521"/>
+          </a:xfrm>
+          <a:prstGeom prst="rect">
+            <a:avLst/>
+          </a:prstGeom>
+          <a:noFill/>
+        </p:spPr>
+        <p:txBody>
+          <a:bodyPr wrap="square" lIns="0" tIns="0" rIns="0" bIns="0" rtlCol="0" anchor="t"/>
+          <a:lstStyle/>
+          <a:p>
+            <a:pPr marL="0" indent="0" algn="l">
+              <a:lnSpc>
+                <a:spcPts val="2430"/>
+              </a:lnSpc>
+              <a:spcAft>
+                <a:spcPts val="400"/>
+              </a:spcAft>
+              <a:buNone/>
+            </a:pPr>
+            <a:r>
+              <a:rPr lang="en-US" sz="1800" b="1" dirty="0">
+                <a:solidFill>
+                  <a:srgbClr val="2E86AB"/>
+                </a:solidFill>
+                <a:latin typeface="Arial" panose="020B0604020202090204" pitchFamily="34" charset="0"/>
+                <a:ea typeface="Arial" panose="020B0604020202090204" pitchFamily="34" charset="-122"/>
+                <a:cs typeface="Arial" panose="020B0604020202090204" pitchFamily="34" charset="-120"/>
+              </a:rPr>
+              <a:t>2</a:t>
+            </a:r>
+            <a:endParaRPr lang="en-US" sz="1800" dirty="0"/>
+          </a:p>
+        </p:txBody>
+      </p:sp>
+      <p:sp>
+        <p:nvSpPr>
+          <p:cNvPr id="12" name="Text 10"/>
+          <p:cNvSpPr/>
+          <p:nvPr/>
+        </p:nvSpPr>
+        <p:spPr>
+          <a:xfrm>
+            <a:off x="4851350" y="1253827"/>
+            <a:ext cx="3707099" cy="152400"/>
+          </a:xfrm>
+          <a:prstGeom prst="rect">
+            <a:avLst/>
+          </a:prstGeom>
+          <a:noFill/>
+        </p:spPr>
+        <p:txBody>
+          <a:bodyPr wrap="square" lIns="0" tIns="0" rIns="0" bIns="0" rtlCol="0" anchor="t"/>
+          <a:lstStyle/>
+          <a:p>
+            <a:pPr marL="0" indent="0" algn="l">
+              <a:lnSpc>
+                <a:spcPts val="1285"/>
+              </a:lnSpc>
+              <a:spcAft>
+                <a:spcPts val="400"/>
+              </a:spcAft>
+              <a:buNone/>
+            </a:pPr>
+            <a:r>
+              <a:rPr lang="en-US" sz="1050" b="1" dirty="0">
+                <a:solidFill>
+                  <a:srgbClr val="1B2A4A"/>
+                </a:solidFill>
+                <a:latin typeface="Arial" panose="020B0604020202090204" pitchFamily="34" charset="0"/>
+                <a:ea typeface="Arial" panose="020B0604020202090204" pitchFamily="34" charset="-122"/>
+                <a:cs typeface="Arial" panose="020B0604020202090204" pitchFamily="34" charset="-120"/>
+              </a:rPr>
+              <a:t>Human proposals are more novel than AI</a:t>
+            </a:r>
+            <a:endParaRPr lang="en-US" sz="1050" dirty="0"/>
+          </a:p>
+        </p:txBody>
+      </p:sp>
+      <p:sp>
+        <p:nvSpPr>
+          <p:cNvPr id="13" name="Text 11"/>
+          <p:cNvSpPr/>
+          <p:nvPr/>
+        </p:nvSpPr>
+        <p:spPr>
+          <a:xfrm>
+            <a:off x="4851350" y="1433827"/>
+            <a:ext cx="3707099" cy="420000"/>
+          </a:xfrm>
+          <a:prstGeom prst="rect">
+            <a:avLst/>
+          </a:prstGeom>
+          <a:noFill/>
+        </p:spPr>
+        <p:txBody>
+          <a:bodyPr wrap="square" lIns="0" tIns="0" rIns="0" bIns="0" rtlCol="0" anchor="t"/>
+          <a:lstStyle/>
+          <a:p>
+            <a:pPr marL="0" indent="0" algn="l">
+              <a:lnSpc>
+                <a:spcPts val="1285"/>
+              </a:lnSpc>
+              <a:spcAft>
+                <a:spcPts val="400"/>
+              </a:spcAft>
+              <a:buNone/>
+            </a:pPr>
+            <a:r>
+              <a:rPr lang="en-US" sz="900" dirty="0">
+                <a:solidFill>
+                  <a:srgbClr val="2C3E50"/>
+                </a:solidFill>
+                <a:latin typeface="Arial" panose="020B0604020202090204" pitchFamily="34" charset="0"/>
+                <a:ea typeface="Arial" panose="020B0604020202090204" pitchFamily="34" charset="-122"/>
+                <a:cs typeface="Arial" panose="020B0604020202090204" pitchFamily="34" charset="-120"/>
+              </a:rPr>
+              <a:t>Human mean novelty 0.151 vs AI 0.117 (d = −0.34, medium). Claude’s novelty is closest to human (not significant), while GPT-5.2 and Gemini are significantly less novel — their output stays close to published literature.</a:t>
+            </a:r>
+            <a:endParaRPr lang="en-US" sz="900" dirty="0"/>
+          </a:p>
+        </p:txBody>
+      </p:sp>
+      <p:sp>
+        <p:nvSpPr>
+          <p:cNvPr id="14" name="Text 12"/>
+          <p:cNvSpPr/>
+          <p:nvPr/>
+        </p:nvSpPr>
+        <p:spPr>
+          <a:xfrm>
+            <a:off x="507950" y="2050000"/>
+            <a:ext cx="3937099" cy="1050000"/>
+          </a:xfrm>
+          <a:prstGeom prst="roundRect">
+            <a:avLst>
+              <a:gd name="adj" fmla="val 3645"/>
+            </a:avLst>
+          </a:prstGeom>
+          <a:solidFill>
+            <a:srgbClr val="F7F9FC"/>
+          </a:solidFill>
+        </p:spPr>
+        <p:txBody>
+          <a:bodyPr wrap="square" rtlCol="0" anchor="ctr"/>
+          <a:lstStyle/>
+          <a:p>
+            <a:pPr marL="0" indent="0">
+              <a:buNone/>
+            </a:pPr>
+            <a:endParaRPr lang="en-US" dirty="0"/>
+          </a:p>
+        </p:txBody>
+      </p:sp>
+      <p:sp>
+        <p:nvSpPr>
+          <p:cNvPr id="15" name="Shape 13"/>
+          <p:cNvSpPr/>
+          <p:nvPr/>
+        </p:nvSpPr>
+        <p:spPr>
+          <a:xfrm>
+            <a:off x="507950" y="2069050"/>
+            <a:ext cx="3937099" cy="0"/>
+          </a:xfrm>
+          <a:prstGeom prst="line">
+            <a:avLst/>
+          </a:prstGeom>
+          <a:noFill/>
+          <a:ln w="38100">
+            <a:solidFill>
+              <a:srgbClr val="2E86AB"/>
+            </a:solidFill>
+            <a:prstDash val="solid"/>
+          </a:ln>
+        </p:spPr>
+      </p:sp>
+      <p:sp>
+        <p:nvSpPr>
+          <p:cNvPr id="16" name="Text 14"/>
+          <p:cNvSpPr/>
+          <p:nvPr/>
+        </p:nvSpPr>
+        <p:spPr>
+          <a:xfrm>
+            <a:off x="660350" y="2196050"/>
+            <a:ext cx="3707099" cy="308521"/>
+          </a:xfrm>
+          <a:prstGeom prst="rect">
+            <a:avLst/>
+          </a:prstGeom>
+          <a:noFill/>
+        </p:spPr>
+        <p:txBody>
+          <a:bodyPr wrap="square" lIns="0" tIns="0" rIns="0" bIns="0" rtlCol="0" anchor="t"/>
+          <a:lstStyle/>
+          <a:p>
+            <a:pPr marL="0" indent="0" algn="l">
+              <a:lnSpc>
+                <a:spcPts val="2430"/>
+              </a:lnSpc>
+              <a:spcAft>
+                <a:spcPts val="400"/>
+              </a:spcAft>
+              <a:buNone/>
+            </a:pPr>
+            <a:r>
+              <a:rPr lang="en-US" sz="1800" b="1" dirty="0">
+                <a:solidFill>
+                  <a:srgbClr val="2E86AB"/>
+                </a:solidFill>
+                <a:latin typeface="Arial" panose="020B0604020202090204" pitchFamily="34" charset="0"/>
+                <a:ea typeface="Arial" panose="020B0604020202090204" pitchFamily="34" charset="-122"/>
+                <a:cs typeface="Arial" panose="020B0604020202090204" pitchFamily="34" charset="-120"/>
+              </a:rPr>
+              <a:t>3</a:t>
+            </a:r>
+            <a:endParaRPr lang="en-US" sz="1800" dirty="0"/>
+          </a:p>
+        </p:txBody>
+      </p:sp>
+      <p:sp>
+        <p:nvSpPr>
+          <p:cNvPr id="17" name="Text 15"/>
+          <p:cNvSpPr/>
+          <p:nvPr/>
+        </p:nvSpPr>
+        <p:spPr>
+          <a:xfrm>
+            <a:off x="660350" y="2450000"/>
+            <a:ext cx="3707099" cy="152400"/>
+          </a:xfrm>
+          <a:prstGeom prst="rect">
+            <a:avLst/>
+          </a:prstGeom>
+          <a:noFill/>
+        </p:spPr>
+        <p:txBody>
+          <a:bodyPr wrap="square" lIns="0" tIns="0" rIns="0" bIns="0" rtlCol="0" anchor="t"/>
+          <a:lstStyle/>
+          <a:p>
+            <a:pPr marL="0" indent="0" algn="l">
+              <a:lnSpc>
+                <a:spcPts val="1285"/>
+              </a:lnSpc>
+              <a:spcAft>
+                <a:spcPts val="400"/>
+              </a:spcAft>
+              <a:buNone/>
+            </a:pPr>
+            <a:r>
+              <a:rPr lang="en-US" sz="1050" b="1" dirty="0">
+                <a:solidFill>
+                  <a:srgbClr val="1B2A4A"/>
+                </a:solidFill>
+                <a:latin typeface="Arial" panose="020B0604020202090204" pitchFamily="34" charset="0"/>
+                <a:ea typeface="Arial" panose="020B0604020202090204" pitchFamily="34" charset="-122"/>
+                <a:cs typeface="Arial" panose="020B0604020202090204" pitchFamily="34" charset="-120"/>
+              </a:rPr>
+              <a:t>Human and AI occupy different semantic territory</a:t>
+            </a:r>
+            <a:endParaRPr lang="en-US" sz="1050" dirty="0"/>
+          </a:p>
+        </p:txBody>
+      </p:sp>
+      <p:sp>
+        <p:nvSpPr>
+          <p:cNvPr id="18" name="Text 16"/>
+          <p:cNvSpPr/>
+          <p:nvPr/>
+        </p:nvSpPr>
+        <p:spPr>
+          <a:xfrm>
+            <a:off x="660350" y="2630000"/>
+            <a:ext cx="3707099" cy="420000"/>
+          </a:xfrm>
+          <a:prstGeom prst="rect">
+            <a:avLst/>
+          </a:prstGeom>
+          <a:noFill/>
+        </p:spPr>
+        <p:txBody>
+          <a:bodyPr wrap="square" lIns="0" tIns="0" rIns="0" bIns="0" rtlCol="0" anchor="t"/>
+          <a:lstStyle/>
+          <a:p>
+            <a:pPr marL="0" indent="0" algn="l">
+              <a:lnSpc>
+                <a:spcPts val="1285"/>
+              </a:lnSpc>
+              <a:spcAft>
+                <a:spcPts val="400"/>
+              </a:spcAft>
+              <a:buNone/>
+            </a:pPr>
+            <a:r>
+              <a:rPr lang="en-US" sz="900" dirty="0">
+                <a:solidFill>
+                  <a:srgbClr val="2C3E50"/>
+                </a:solidFill>
+                <a:latin typeface="Arial" panose="020B0604020202090204" pitchFamily="34" charset="0"/>
+                <a:ea typeface="Arial" panose="020B0604020202090204" pitchFamily="34" charset="-122"/>
+                <a:cs typeface="Arial" panose="020B0604020202090204" pitchFamily="34" charset="-120"/>
+              </a:rPr>
+              <a:t>100% of AI nearest neighbors are other AI proposals. GMM clustering: 2 of 3 clusters are AI-only (NMI = 0.20, p &lt; 0.0001). LDA: complete topic separation. Humans and AI generate fundamentally different kinds of ideas.</a:t>
+            </a:r>
+            <a:endParaRPr lang="en-US" sz="900" dirty="0"/>
+          </a:p>
+        </p:txBody>
+      </p:sp>
+      <p:sp>
+        <p:nvSpPr>
+          <p:cNvPr id="19" name="Text 17"/>
+          <p:cNvSpPr/>
+          <p:nvPr/>
+        </p:nvSpPr>
+        <p:spPr>
+          <a:xfrm>
+            <a:off x="4698950" y="2050000"/>
+            <a:ext cx="3937099" cy="1050000"/>
+          </a:xfrm>
+          <a:prstGeom prst="roundRect">
+            <a:avLst>
+              <a:gd name="adj" fmla="val 3645"/>
+            </a:avLst>
+          </a:prstGeom>
+          <a:solidFill>
+            <a:srgbClr val="F0F4F8"/>
+          </a:solidFill>
+        </p:spPr>
+        <p:txBody>
+          <a:bodyPr wrap="square" rtlCol="0" anchor="ctr"/>
+          <a:lstStyle/>
+          <a:p>
+            <a:pPr marL="0" indent="0">
+              <a:buNone/>
+            </a:pPr>
+            <a:endParaRPr lang="en-US" dirty="0"/>
+          </a:p>
+        </p:txBody>
+      </p:sp>
+      <p:sp>
+        <p:nvSpPr>
+          <p:cNvPr id="20" name="Shape 18"/>
+          <p:cNvSpPr/>
+          <p:nvPr/>
+        </p:nvSpPr>
+        <p:spPr>
+          <a:xfrm>
+            <a:off x="4698950" y="2069050"/>
+            <a:ext cx="3937099" cy="0"/>
+          </a:xfrm>
+          <a:prstGeom prst="line">
+            <a:avLst/>
+          </a:prstGeom>
+          <a:noFill/>
+          <a:ln w="38100">
+            <a:solidFill>
+              <a:srgbClr val="16A085"/>
+            </a:solidFill>
+            <a:prstDash val="solid"/>
+          </a:ln>
+        </p:spPr>
+      </p:sp>
+      <p:sp>
+        <p:nvSpPr>
+          <p:cNvPr id="21" name="Text 19"/>
+          <p:cNvSpPr/>
+          <p:nvPr/>
+        </p:nvSpPr>
+        <p:spPr>
+          <a:xfrm>
+            <a:off x="4851350" y="2196050"/>
+            <a:ext cx="3707099" cy="308521"/>
+          </a:xfrm>
+          <a:prstGeom prst="rect">
+            <a:avLst/>
+          </a:prstGeom>
+          <a:noFill/>
+        </p:spPr>
+        <p:txBody>
+          <a:bodyPr wrap="square" lIns="0" tIns="0" rIns="0" bIns="0" rtlCol="0" anchor="t"/>
+          <a:lstStyle/>
+          <a:p>
+            <a:pPr marL="0" indent="0" algn="l">
+              <a:lnSpc>
+                <a:spcPts val="2430"/>
+              </a:lnSpc>
+              <a:spcAft>
+                <a:spcPts val="400"/>
+              </a:spcAft>
+              <a:buNone/>
+            </a:pPr>
+            <a:r>
+              <a:rPr lang="en-US" sz="1800" b="1" dirty="0">
+                <a:solidFill>
+                  <a:srgbClr val="16A085"/>
+                </a:solidFill>
+                <a:latin typeface="Arial" panose="020B0604020202090204" pitchFamily="34" charset="0"/>
+                <a:ea typeface="Arial" panose="020B0604020202090204" pitchFamily="34" charset="-122"/>
+                <a:cs typeface="Arial" panose="020B0604020202090204" pitchFamily="34" charset="-120"/>
+              </a:rPr>
+              <a:t>4</a:t>
+            </a:r>
+            <a:endParaRPr lang="en-US" sz="1800" dirty="0"/>
+          </a:p>
+        </p:txBody>
+      </p:sp>
+      <p:sp>
+        <p:nvSpPr>
+          <p:cNvPr id="22" name="Text 20"/>
+          <p:cNvSpPr/>
+          <p:nvPr/>
+        </p:nvSpPr>
+        <p:spPr>
+          <a:xfrm>
+            <a:off x="4851350" y="2450000"/>
+            <a:ext cx="3707099" cy="152400"/>
+          </a:xfrm>
+          <a:prstGeom prst="rect">
+            <a:avLst/>
+          </a:prstGeom>
+          <a:noFill/>
+        </p:spPr>
+        <p:txBody>
+          <a:bodyPr wrap="square" lIns="0" tIns="0" rIns="0" bIns="0" rtlCol="0" anchor="t"/>
+          <a:lstStyle/>
+          <a:p>
+            <a:pPr marL="0" indent="0" algn="l">
+              <a:lnSpc>
+                <a:spcPts val="1285"/>
+              </a:lnSpc>
+              <a:spcAft>
+                <a:spcPts val="400"/>
+              </a:spcAft>
+              <a:buNone/>
+            </a:pPr>
+            <a:r>
+              <a:rPr lang="en-US" sz="1050" b="1" dirty="0">
+                <a:solidFill>
+                  <a:srgbClr val="1B2A4A"/>
+                </a:solidFill>
+                <a:latin typeface="Arial" panose="020B0604020202090204" pitchFamily="34" charset="0"/>
+                <a:ea typeface="Arial" panose="020B0604020202090204" pitchFamily="34" charset="-122"/>
+                <a:cs typeface="Arial" panose="020B0604020202090204" pitchFamily="34" charset="-120"/>
+              </a:rPr>
+              <a:t>Diversity does not equal novelty</a:t>
+            </a:r>
+            <a:endParaRPr lang="en-US" sz="1050" dirty="0"/>
+          </a:p>
+        </p:txBody>
+      </p:sp>
+      <p:sp>
+        <p:nvSpPr>
+          <p:cNvPr id="23" name="Text 21"/>
+          <p:cNvSpPr/>
+          <p:nvPr/>
+        </p:nvSpPr>
+        <p:spPr>
+          <a:xfrm>
+            <a:off x="4851350" y="2630000"/>
+            <a:ext cx="3707099" cy="420000"/>
+          </a:xfrm>
+          <a:prstGeom prst="rect">
+            <a:avLst/>
+          </a:prstGeom>
+          <a:noFill/>
+        </p:spPr>
+        <p:txBody>
+          <a:bodyPr wrap="square" lIns="0" tIns="0" rIns="0" bIns="0" rtlCol="0" anchor="t"/>
+          <a:lstStyle/>
+          <a:p>
+            <a:pPr marL="0" indent="0" algn="l">
+              <a:lnSpc>
+                <a:spcPts val="1285"/>
+              </a:lnSpc>
+              <a:spcAft>
+                <a:spcPts val="400"/>
+              </a:spcAft>
+              <a:buNone/>
+            </a:pPr>
+            <a:r>
+              <a:rPr lang="en-US" sz="900" dirty="0">
+                <a:solidFill>
+                  <a:srgbClr val="2C3E50"/>
+                </a:solidFill>
+                <a:latin typeface="Arial" panose="020B0604020202090204" pitchFamily="34" charset="0"/>
+                <a:ea typeface="Arial" panose="020B0604020202090204" pitchFamily="34" charset="-122"/>
+                <a:cs typeface="Arial" panose="020B0604020202090204" pitchFamily="34" charset="-120"/>
+              </a:rPr>
+              <a:t>Claude produces the most diverse proposals, but they are only moderately novel. Human proposals are moderately diverse but most novel. High diversity within AI space may reflect variation among training-data-typical framings, not genuinely new ideas.</a:t>
+            </a:r>
+            <a:endParaRPr lang="en-US" sz="900" dirty="0"/>
+          </a:p>
+        </p:txBody>
+      </p:sp>
+      <p:sp>
+        <p:nvSpPr>
+          <p:cNvPr id="24" name="Text 22"/>
+          <p:cNvSpPr/>
+          <p:nvPr/>
+        </p:nvSpPr>
+        <p:spPr>
+          <a:xfrm>
+            <a:off x="507950" y="3300000"/>
+            <a:ext cx="8128099" cy="650000"/>
+          </a:xfrm>
+          <a:prstGeom prst="roundRect">
+            <a:avLst>
+              <a:gd name="adj" fmla="val 5000"/>
+            </a:avLst>
+          </a:prstGeom>
+          <a:solidFill>
+            <a:srgbClr val="F5F5F5"/>
+          </a:solidFill>
+        </p:spPr>
+        <p:txBody>
+          <a:bodyPr wrap="square" rtlCol="0" anchor="ctr"/>
+          <a:lstStyle/>
+          <a:p>
+            <a:pPr marL="0" indent="0">
+              <a:buNone/>
+            </a:pPr>
+            <a:endParaRPr lang="en-US" dirty="0"/>
+          </a:p>
+        </p:txBody>
+      </p:sp>
+      <p:sp>
+        <p:nvSpPr>
+          <p:cNvPr id="25" name="Text 23"/>
+          <p:cNvSpPr/>
+          <p:nvPr/>
+        </p:nvSpPr>
+        <p:spPr>
+          <a:xfrm>
+            <a:off x="660350" y="3380000"/>
+            <a:ext cx="7900000" cy="200000"/>
+          </a:xfrm>
+          <a:prstGeom prst="rect">
+            <a:avLst/>
+          </a:prstGeom>
+          <a:noFill/>
+        </p:spPr>
+        <p:txBody>
+          <a:bodyPr wrap="square" lIns="0" tIns="0" rIns="0" bIns="0" rtlCol="0" anchor="t"/>
+          <a:lstStyle/>
+          <a:p>
+            <a:pPr marL="0" indent="0" algn="l">
+              <a:lnSpc>
+                <a:spcPts val="1285"/>
+              </a:lnSpc>
+              <a:spcAft>
+                <a:spcPts val="400"/>
+              </a:spcAft>
+              <a:buNone/>
+            </a:pPr>
+            <a:r>
+              <a:rPr lang="en-US" sz="1100" b="1" dirty="0">
+                <a:solidFill>
+                  <a:srgbClr val="1B2A4A"/>
+                </a:solidFill>
+                <a:latin typeface="Arial" panose="020B0604020202090204" pitchFamily="34" charset="0"/>
+                <a:ea typeface="Arial" panose="020B0604020202090204" pitchFamily="34" charset="-122"/>
+                <a:cs typeface="Arial" panose="020B0604020202090204" pitchFamily="34" charset="-120"/>
+              </a:rPr>
+              <a:t>Overarching narrative</a:t>
+            </a:r>
+            <a:endParaRPr lang="en-US" sz="1100" dirty="0"/>
+          </a:p>
+        </p:txBody>
+      </p:sp>
+      <p:sp>
+        <p:nvSpPr>
+          <p:cNvPr id="26" name="Text 24"/>
+          <p:cNvSpPr/>
+          <p:nvPr/>
+        </p:nvSpPr>
+        <p:spPr>
+          <a:xfrm>
+            <a:off x="660350" y="3610000"/>
+            <a:ext cx="7900000" cy="300000"/>
+          </a:xfrm>
+          <a:prstGeom prst="rect">
+            <a:avLst/>
+          </a:prstGeom>
+          <a:noFill/>
+        </p:spPr>
+        <p:txBody>
+          <a:bodyPr wrap="square" lIns="0" tIns="0" rIns="0" bIns="0" rtlCol="0" anchor="t"/>
+          <a:lstStyle/>
+          <a:p>
+            <a:pPr marL="0" indent="0" algn="l">
+              <a:lnSpc>
+                <a:spcPts val="1285"/>
+              </a:lnSpc>
+              <a:spcAft>
+                <a:spcPts val="400"/>
+              </a:spcAft>
+              <a:buNone/>
+            </a:pPr>
+            <a:r>
+              <a:rPr lang="en-US" sz="900" dirty="0">
+                <a:solidFill>
+                  <a:srgbClr val="2C3E50"/>
+                </a:solidFill>
+                <a:latin typeface="Arial" panose="020B0604020202090204" pitchFamily="34" charset="0"/>
+                <a:ea typeface="Arial" panose="020B0604020202090204" pitchFamily="34" charset="-122"/>
+                <a:cs typeface="Arial" panose="020B0604020202090204" pitchFamily="34" charset="-120"/>
+              </a:rPr>
+              <a:t>AI models can produce diverse proposals on paper, but that diversity operates within a different conceptual space than humans. Human scientists bring genuinely novel perspectives — ideas further from published literature and outside the semantic territory AI models inhabit. This suggests AI is better positioned as an ideation complement to, rather than replacement for, human researchers.</a:t>
+            </a:r>
+            <a:endParaRPr lang="en-US" sz="900" dirty="0"/>
+          </a:p>
+        </p:txBody>
+      </p:sp>
+    </p:spTree>
+  </p:cSld>
+  <p:clrMapOvr>
+    <a:masterClrMapping/>
+  </p:clrMapOvr>
+</p:sld>
+</file>
+
+<file path=ppt/slides/slide17.xml><?xml version="1.0" encoding="utf-8"?>
+<p:sld xmlns:a="http://schemas.openxmlformats.org/drawingml/2006/main" xmlns:r="http://schemas.openxmlformats.org/officeDocument/2006/relationships" xmlns:p="http://schemas.openxmlformats.org/presentationml/2006/main">
+  <p:cSld>
+    <p:bg>
+      <p:bgPr>
+        <a:solidFill>
+          <a:srgbClr val="FFFFFF"/>
+        </a:solidFill>
+        <a:effectLst/>
+      </p:bgPr>
+    </p:bg>
+    <p:spTree>
+      <p:nvGrpSpPr>
+        <p:cNvPr id="1" name=""/>
+        <p:cNvGrpSpPr/>
+        <p:nvPr/>
+      </p:nvGrpSpPr>
+      <p:grpSpPr>
+        <a:xfrm>
+          <a:off x="0" y="0"/>
+          <a:ext cx="0" cy="0"/>
+          <a:chOff x="0" y="0"/>
+          <a:chExt cx="0" cy="0"/>
+        </a:xfrm>
+      </p:grpSpPr>
+      <p:sp>
+        <p:nvSpPr>
+          <p:cNvPr id="2" name="Text 0"/>
+          <p:cNvSpPr/>
+          <p:nvPr/>
+        </p:nvSpPr>
+        <p:spPr>
+          <a:xfrm>
+            <a:off x="0" y="0"/>
+            <a:ext cx="9144000" cy="650677"/>
+          </a:xfrm>
+          <a:prstGeom prst="rect">
+            <a:avLst/>
+          </a:prstGeom>
+          <a:solidFill>
+            <a:srgbClr val="1B2A4A"/>
+          </a:solidFill>
+        </p:spPr>
+        <p:txBody>
+          <a:bodyPr wrap="square" rtlCol="0" anchor="ctr"/>
+          <a:lstStyle/>
+          <a:p>
+            <a:pPr marL="0" indent="0">
+              <a:buNone/>
+            </a:pPr>
+            <a:endParaRPr lang="en-US" dirty="0"/>
+          </a:p>
+        </p:txBody>
+      </p:sp>
+      <p:sp>
+        <p:nvSpPr>
+          <p:cNvPr id="3" name="Text 1"/>
+          <p:cNvSpPr/>
+          <p:nvPr/>
+        </p:nvSpPr>
+        <p:spPr>
+          <a:xfrm>
+            <a:off x="507950" y="177701"/>
+            <a:ext cx="8290661" cy="295275"/>
+          </a:xfrm>
+          <a:prstGeom prst="rect">
+            <a:avLst/>
+          </a:prstGeom>
+          <a:noFill/>
+        </p:spPr>
+        <p:txBody>
+          <a:bodyPr wrap="square" lIns="0" tIns="0" rIns="0" bIns="0" rtlCol="0" anchor="t"/>
+          <a:lstStyle/>
+          <a:p>
+            <a:pPr marL="0" indent="0" algn="l">
+              <a:buNone/>
+            </a:pPr>
+            <a:r>
+              <a:rPr lang="en-US" sz="2000" b="1" dirty="0">
+                <a:solidFill>
+                  <a:srgbClr val="FFFFFF"/>
+                </a:solidFill>
+                <a:latin typeface="Arial" panose="020B0604020202090204" pitchFamily="34" charset="0"/>
+                <a:ea typeface="Arial" panose="020B0604020202090204" pitchFamily="34" charset="-122"/>
+                <a:cs typeface="Arial" panose="020B0604020202090204" pitchFamily="34" charset="-120"/>
+              </a:rPr>
+              <a:t>Implications &amp; Limitations</a:t>
+            </a:r>
+            <a:endParaRPr lang="en-US" sz="2000" dirty="0"/>
+          </a:p>
+        </p:txBody>
+      </p:sp>
+      <p:sp>
+        <p:nvSpPr>
+          <p:cNvPr id="4" name="Text 2"/>
+          <p:cNvSpPr/>
+          <p:nvPr/>
+        </p:nvSpPr>
+        <p:spPr>
+          <a:xfrm>
+            <a:off x="507950" y="853827"/>
+            <a:ext cx="8290661" cy="171450"/>
+          </a:xfrm>
+          <a:prstGeom prst="rect">
+            <a:avLst/>
+          </a:prstGeom>
+          <a:noFill/>
+        </p:spPr>
+        <p:txBody>
+          <a:bodyPr wrap="square" lIns="0" tIns="0" rIns="0" bIns="0" rtlCol="0" anchor="t"/>
+          <a:lstStyle/>
+          <a:p>
+            <a:pPr marL="0" indent="0" algn="l">
+              <a:spcAft>
+                <a:spcPts val="600"/>
+              </a:spcAft>
+              <a:buNone/>
+            </a:pPr>
+            <a:r>
+              <a:rPr lang="en-US" sz="1200" b="1" dirty="0">
+                <a:solidFill>
+                  <a:srgbClr val="1B2A4A"/>
+                </a:solidFill>
+                <a:latin typeface="Arial" panose="020B0604020202090204" pitchFamily="34" charset="0"/>
+                <a:ea typeface="Arial" panose="020B0604020202090204" pitchFamily="34" charset="-122"/>
+                <a:cs typeface="Arial" panose="020B0604020202090204" pitchFamily="34" charset="-120"/>
+              </a:rPr>
+              <a:t>What This Means</a:t>
+            </a:r>
+            <a:endParaRPr lang="en-US" sz="1200" dirty="0"/>
+          </a:p>
+        </p:txBody>
+      </p:sp>
+      <p:sp>
+        <p:nvSpPr>
+          <p:cNvPr id="5" name="Text 3"/>
+          <p:cNvSpPr/>
+          <p:nvPr/>
+        </p:nvSpPr>
+        <p:spPr>
+          <a:xfrm>
+            <a:off x="507950" y="1101477"/>
+            <a:ext cx="444401" cy="25301"/>
+          </a:xfrm>
+          <a:prstGeom prst="rect">
+            <a:avLst/>
+          </a:prstGeom>
+          <a:solidFill>
+            <a:srgbClr val="E8505B"/>
+          </a:solidFill>
+        </p:spPr>
+        <p:txBody>
+          <a:bodyPr wrap="square" rtlCol="0" anchor="ctr"/>
+          <a:lstStyle/>
+          <a:p>
+            <a:pPr marL="0" indent="0">
+              <a:buNone/>
+            </a:pPr>
+            <a:endParaRPr lang="en-US" dirty="0"/>
+          </a:p>
+        </p:txBody>
+      </p:sp>
+      <p:sp>
+        <p:nvSpPr>
+          <p:cNvPr id="6" name="Text 4"/>
+          <p:cNvSpPr/>
+          <p:nvPr/>
+        </p:nvSpPr>
+        <p:spPr>
+          <a:xfrm>
+            <a:off x="507950" y="1253728"/>
+            <a:ext cx="3962400" cy="900000"/>
+          </a:xfrm>
+          <a:prstGeom prst="rect">
+            <a:avLst/>
+          </a:prstGeom>
+          <a:solidFill>
+            <a:srgbClr val="F7F9FC"/>
+          </a:solidFill>
+        </p:spPr>
+        <p:txBody>
+          <a:bodyPr wrap="square" rtlCol="0" anchor="ctr"/>
+          <a:lstStyle/>
+          <a:p>
+            <a:pPr marL="0" indent="0">
+              <a:buNone/>
+            </a:pPr>
+            <a:endParaRPr lang="en-US" dirty="0"/>
+          </a:p>
+        </p:txBody>
+      </p:sp>
+      <p:sp>
+        <p:nvSpPr>
+          <p:cNvPr id="7" name="Shape 5"/>
+          <p:cNvSpPr/>
+          <p:nvPr/>
+        </p:nvSpPr>
+        <p:spPr>
+          <a:xfrm>
+            <a:off x="527000" y="1253728"/>
+            <a:ext cx="0" cy="900000"/>
+          </a:xfrm>
+          <a:prstGeom prst="line">
+            <a:avLst/>
+          </a:prstGeom>
+          <a:noFill/>
+          <a:ln w="38100">
+            <a:solidFill>
+              <a:srgbClr val="2E86AB"/>
+            </a:solidFill>
+            <a:prstDash val="solid"/>
+          </a:ln>
+        </p:spPr>
+      </p:sp>
+      <p:sp>
+        <p:nvSpPr>
+          <p:cNvPr id="8" name="Text 6"/>
+          <p:cNvSpPr/>
+          <p:nvPr/>
+        </p:nvSpPr>
+        <p:spPr>
+          <a:xfrm>
+            <a:off x="698450" y="1329928"/>
+            <a:ext cx="3682400" cy="171301"/>
+          </a:xfrm>
+          <a:prstGeom prst="rect">
+            <a:avLst/>
+          </a:prstGeom>
+          <a:noFill/>
+        </p:spPr>
+        <p:txBody>
+          <a:bodyPr wrap="square" lIns="0" tIns="0" rIns="0" bIns="0" rtlCol="0" anchor="t"/>
+          <a:lstStyle/>
+          <a:p>
+            <a:pPr marL="0" indent="0" algn="l">
+              <a:lnSpc>
+                <a:spcPts val="1350"/>
+              </a:lnSpc>
+              <a:spcAft>
+                <a:spcPts val="400"/>
+              </a:spcAft>
+              <a:buNone/>
+            </a:pPr>
+            <a:r>
+              <a:rPr lang="en-US" sz="1000" b="1" dirty="0">
+                <a:solidFill>
+                  <a:srgbClr val="2C3E50"/>
+                </a:solidFill>
+                <a:latin typeface="Arial" panose="020B0604020202090204" pitchFamily="34" charset="0"/>
+                <a:ea typeface="Arial" panose="020B0604020202090204" pitchFamily="34" charset="-122"/>
+                <a:cs typeface="Arial" panose="020B0604020202090204" pitchFamily="34" charset="-120"/>
+              </a:rPr>
+              <a:t>AI models are not interchangeable for scientific ideation</a:t>
+            </a:r>
+            <a:endParaRPr lang="en-US" sz="1000" dirty="0"/>
+          </a:p>
+        </p:txBody>
+      </p:sp>
+      <p:sp>
+        <p:nvSpPr>
+          <p:cNvPr id="9" name="Text 7"/>
+          <p:cNvSpPr/>
+          <p:nvPr/>
+        </p:nvSpPr>
+        <p:spPr>
+          <a:xfrm>
+            <a:off x="698450" y="1543728"/>
+            <a:ext cx="3682400" cy="550000"/>
+          </a:xfrm>
+          <a:prstGeom prst="rect">
+            <a:avLst/>
+          </a:prstGeom>
+          <a:noFill/>
+        </p:spPr>
+        <p:txBody>
+          <a:bodyPr wrap="square" lIns="0" tIns="0" rIns="0" bIns="0" rtlCol="0" anchor="t"/>
+          <a:lstStyle/>
+          <a:p>
+            <a:pPr marL="0" indent="0" algn="l">
+              <a:lnSpc>
+                <a:spcPts val="1150"/>
+              </a:lnSpc>
+              <a:spcAft>
+                <a:spcPts val="400"/>
+              </a:spcAft>
+              <a:buNone/>
+            </a:pPr>
+            <a:r>
+              <a:rPr lang="en-US" sz="850" dirty="0">
+                <a:solidFill>
+                  <a:srgbClr val="5D6D7E"/>
+                </a:solidFill>
+                <a:latin typeface="Arial" panose="020B0604020202090204" pitchFamily="34" charset="0"/>
+                <a:ea typeface="Arial" panose="020B0604020202090204" pitchFamily="34" charset="-122"/>
+                <a:cs typeface="Arial" panose="020B0604020202090204" pitchFamily="34" charset="-120"/>
+              </a:rPr>
+              <a:t>GPT-5.2’s mode collapse vs Claude’s subcluster diversity means model choice drastically affects the space of ideas. Researchers should test multiple models and evaluate outputs comparatively, not assume one model represents “AI.”</a:t>
+            </a:r>
+            <a:endParaRPr lang="en-US" sz="850" dirty="0"/>
+          </a:p>
+        </p:txBody>
+      </p:sp>
+      <p:sp>
+        <p:nvSpPr>
+          <p:cNvPr id="10" name="Text 8"/>
+          <p:cNvSpPr/>
+          <p:nvPr/>
+        </p:nvSpPr>
+        <p:spPr>
+          <a:xfrm>
+            <a:off x="507950" y="2270000"/>
+            <a:ext cx="3962400" cy="900000"/>
+          </a:xfrm>
+          <a:prstGeom prst="rect">
+            <a:avLst/>
+          </a:prstGeom>
+          <a:solidFill>
+            <a:srgbClr val="F7F9FC"/>
+          </a:solidFill>
+        </p:spPr>
+        <p:txBody>
+          <a:bodyPr wrap="square" rtlCol="0" anchor="ctr"/>
+          <a:lstStyle/>
+          <a:p>
+            <a:pPr marL="0" indent="0">
+              <a:buNone/>
+            </a:pPr>
+            <a:endParaRPr lang="en-US" dirty="0"/>
+          </a:p>
+        </p:txBody>
+      </p:sp>
+      <p:sp>
+        <p:nvSpPr>
+          <p:cNvPr id="11" name="Shape 9"/>
+          <p:cNvSpPr/>
+          <p:nvPr/>
+        </p:nvSpPr>
+        <p:spPr>
+          <a:xfrm>
+            <a:off x="527000" y="2270000"/>
+            <a:ext cx="0" cy="900000"/>
+          </a:xfrm>
+          <a:prstGeom prst="line">
+            <a:avLst/>
+          </a:prstGeom>
+          <a:noFill/>
+          <a:ln w="38100">
+            <a:solidFill>
+              <a:srgbClr val="16A085"/>
+            </a:solidFill>
+            <a:prstDash val="solid"/>
+          </a:ln>
+        </p:spPr>
+      </p:sp>
+      <p:sp>
+        <p:nvSpPr>
+          <p:cNvPr id="12" name="Text 10"/>
+          <p:cNvSpPr/>
+          <p:nvPr/>
+        </p:nvSpPr>
+        <p:spPr>
+          <a:xfrm>
+            <a:off x="698450" y="2346200"/>
+            <a:ext cx="3682400" cy="171301"/>
+          </a:xfrm>
+          <a:prstGeom prst="rect">
+            <a:avLst/>
+          </a:prstGeom>
+          <a:noFill/>
+        </p:spPr>
+        <p:txBody>
+          <a:bodyPr wrap="square" lIns="0" tIns="0" rIns="0" bIns="0" rtlCol="0" anchor="t"/>
+          <a:lstStyle/>
+          <a:p>
+            <a:pPr marL="0" indent="0" algn="l">
+              <a:lnSpc>
+                <a:spcPts val="1350"/>
+              </a:lnSpc>
+              <a:spcAft>
+                <a:spcPts val="400"/>
+              </a:spcAft>
+              <a:buNone/>
+            </a:pPr>
+            <a:r>
+              <a:rPr lang="en-US" sz="1000" b="1" dirty="0">
+                <a:solidFill>
+                  <a:srgbClr val="2C3E50"/>
+                </a:solidFill>
+                <a:latin typeface="Arial" panose="020B0604020202090204" pitchFamily="34" charset="0"/>
+                <a:ea typeface="Arial" panose="020B0604020202090204" pitchFamily="34" charset="-122"/>
+                <a:cs typeface="Arial" panose="020B0604020202090204" pitchFamily="34" charset="-120"/>
+              </a:rPr>
+              <a:t>Human novelty advantage suggests complementary roles</a:t>
+            </a:r>
+            <a:endParaRPr lang="en-US" sz="1000" dirty="0"/>
+          </a:p>
+        </p:txBody>
+      </p:sp>
+      <p:sp>
+        <p:nvSpPr>
+          <p:cNvPr id="13" name="Text 11"/>
+          <p:cNvSpPr/>
+          <p:nvPr/>
+        </p:nvSpPr>
+        <p:spPr>
+          <a:xfrm>
+            <a:off x="698450" y="2560000"/>
+            <a:ext cx="3682400" cy="550000"/>
+          </a:xfrm>
+          <a:prstGeom prst="rect">
+            <a:avLst/>
+          </a:prstGeom>
+          <a:noFill/>
+        </p:spPr>
+        <p:txBody>
+          <a:bodyPr wrap="square" lIns="0" tIns="0" rIns="0" bIns="0" rtlCol="0" anchor="t"/>
+          <a:lstStyle/>
+          <a:p>
+            <a:pPr marL="0" indent="0" algn="l">
+              <a:lnSpc>
+                <a:spcPts val="1150"/>
+              </a:lnSpc>
+              <a:spcAft>
+                <a:spcPts val="400"/>
+              </a:spcAft>
+              <a:buNone/>
+            </a:pPr>
+            <a:r>
+              <a:rPr lang="en-US" sz="850" dirty="0">
+                <a:solidFill>
+                  <a:srgbClr val="5D6D7E"/>
+                </a:solidFill>
+                <a:latin typeface="Arial" panose="020B0604020202090204" pitchFamily="34" charset="0"/>
+                <a:ea typeface="Arial" panose="020B0604020202090204" pitchFamily="34" charset="-122"/>
+                <a:cs typeface="Arial" panose="020B0604020202090204" pitchFamily="34" charset="-120"/>
+              </a:rPr>
+              <a:t>Human proposals venture further from published literature, indicating that human scientists bring perspectives not derivable from training data alone. AI may be most valuable for extending existing lines of inquiry, while humans contribute genuinely novel framings.</a:t>
+            </a:r>
+            <a:endParaRPr lang="en-US" sz="850" dirty="0"/>
+          </a:p>
+        </p:txBody>
+      </p:sp>
+      <p:sp>
+        <p:nvSpPr>
+          <p:cNvPr id="14" name="Text 12"/>
+          <p:cNvSpPr/>
+          <p:nvPr/>
+        </p:nvSpPr>
+        <p:spPr>
+          <a:xfrm>
+            <a:off x="507950" y="3290000"/>
+            <a:ext cx="3962400" cy="900000"/>
+          </a:xfrm>
+          <a:prstGeom prst="rect">
+            <a:avLst/>
+          </a:prstGeom>
+          <a:solidFill>
+            <a:srgbClr val="F0F4F8"/>
+          </a:solidFill>
+        </p:spPr>
+        <p:txBody>
+          <a:bodyPr wrap="square" rtlCol="0" anchor="ctr"/>
+          <a:lstStyle/>
+          <a:p>
+            <a:pPr marL="0" indent="0">
+              <a:buNone/>
+            </a:pPr>
+            <a:endParaRPr lang="en-US" dirty="0"/>
+          </a:p>
+        </p:txBody>
+      </p:sp>
+      <p:sp>
+        <p:nvSpPr>
+          <p:cNvPr id="15" name="Shape 13"/>
+          <p:cNvSpPr/>
+          <p:nvPr/>
+        </p:nvSpPr>
+        <p:spPr>
+          <a:xfrm>
+            <a:off x="527000" y="3290000"/>
+            <a:ext cx="0" cy="900000"/>
+          </a:xfrm>
+          <a:prstGeom prst="line">
+            <a:avLst/>
+          </a:prstGeom>
+          <a:noFill/>
+          <a:ln w="38100">
+            <a:solidFill>
+              <a:srgbClr val="8E44AD"/>
+            </a:solidFill>
+            <a:prstDash val="solid"/>
+          </a:ln>
+        </p:spPr>
+      </p:sp>
+      <p:sp>
+        <p:nvSpPr>
+          <p:cNvPr id="16" name="Text 14"/>
+          <p:cNvSpPr/>
+          <p:nvPr/>
+        </p:nvSpPr>
+        <p:spPr>
+          <a:xfrm>
+            <a:off x="698450" y="3366200"/>
+            <a:ext cx="3682400" cy="171301"/>
+          </a:xfrm>
+          <a:prstGeom prst="rect">
+            <a:avLst/>
+          </a:prstGeom>
+          <a:noFill/>
+        </p:spPr>
+        <p:txBody>
+          <a:bodyPr wrap="square" lIns="0" tIns="0" rIns="0" bIns="0" rtlCol="0" anchor="t"/>
+          <a:lstStyle/>
+          <a:p>
+            <a:pPr marL="0" indent="0" algn="l">
+              <a:lnSpc>
+                <a:spcPts val="1350"/>
+              </a:lnSpc>
+              <a:spcAft>
+                <a:spcPts val="400"/>
+              </a:spcAft>
+              <a:buNone/>
+            </a:pPr>
+            <a:r>
+              <a:rPr lang="en-US" sz="1000" b="1" dirty="0">
+                <a:solidFill>
+                  <a:srgbClr val="2C3E50"/>
+                </a:solidFill>
+                <a:latin typeface="Arial" panose="020B0604020202090204" pitchFamily="34" charset="0"/>
+                <a:ea typeface="Arial" panose="020B0604020202090204" pitchFamily="34" charset="-122"/>
+                <a:cs typeface="Arial" panose="020B0604020202090204" pitchFamily="34" charset="-120"/>
+              </a:rPr>
+              <a:t>Semantic segregation raises questions about AI’s “idea space”</a:t>
+            </a:r>
+            <a:endParaRPr lang="en-US" sz="1000" dirty="0"/>
+          </a:p>
+        </p:txBody>
+      </p:sp>
+      <p:sp>
+        <p:nvSpPr>
+          <p:cNvPr id="17" name="Text 15"/>
+          <p:cNvSpPr/>
+          <p:nvPr/>
+        </p:nvSpPr>
+        <p:spPr>
+          <a:xfrm>
+            <a:off x="698450" y="3580000"/>
+            <a:ext cx="3682400" cy="550000"/>
+          </a:xfrm>
+          <a:prstGeom prst="rect">
+            <a:avLst/>
+          </a:prstGeom>
+          <a:noFill/>
+        </p:spPr>
+        <p:txBody>
+          <a:bodyPr wrap="square" lIns="0" tIns="0" rIns="0" bIns="0" rtlCol="0" anchor="t"/>
+          <a:lstStyle/>
+          <a:p>
+            <a:pPr marL="0" indent="0" algn="l">
+              <a:lnSpc>
+                <a:spcPts val="1150"/>
+              </a:lnSpc>
+              <a:spcAft>
+                <a:spcPts val="400"/>
+              </a:spcAft>
+              <a:buNone/>
+            </a:pPr>
+            <a:r>
+              <a:rPr lang="en-US" sz="850" dirty="0">
+                <a:solidFill>
+                  <a:srgbClr val="5D6D7E"/>
+                </a:solidFill>
+                <a:latin typeface="Arial" panose="020B0604020202090204" pitchFamily="34" charset="0"/>
+                <a:ea typeface="Arial" panose="020B0604020202090204" pitchFamily="34" charset="-122"/>
+                <a:cs typeface="Arial" panose="020B0604020202090204" pitchFamily="34" charset="-120"/>
+              </a:rPr>
+              <a:t>The consistent finding that AI and human proposals occupy distinct territories — confirmed by NN, LDA, and GMM analyses — suggests systematic differences in how AI frames research. This may limit AI’s ability to surface truly unconventional ideas.</a:t>
+            </a:r>
+            <a:endParaRPr lang="en-US" sz="850" dirty="0"/>
+          </a:p>
+        </p:txBody>
+      </p:sp>
+      <p:sp>
+        <p:nvSpPr>
+          <p:cNvPr id="18" name="Text 16"/>
+          <p:cNvSpPr/>
+          <p:nvPr/>
+        </p:nvSpPr>
+        <p:spPr>
+          <a:xfrm>
+            <a:off x="4673501" y="1253728"/>
+            <a:ext cx="3962549" cy="2800000"/>
+          </a:xfrm>
+          <a:prstGeom prst="rect">
+            <a:avLst/>
+          </a:prstGeom>
+          <a:solidFill>
+            <a:srgbClr val="FDF8F8"/>
+          </a:solidFill>
+        </p:spPr>
+        <p:txBody>
+          <a:bodyPr wrap="square" rtlCol="0" anchor="ctr"/>
+          <a:lstStyle/>
+          <a:p>
+            <a:pPr marL="0" indent="0">
+              <a:buNone/>
+            </a:pPr>
+            <a:endParaRPr lang="en-US" dirty="0"/>
+          </a:p>
+        </p:txBody>
+      </p:sp>
+      <p:sp>
+        <p:nvSpPr>
+          <p:cNvPr id="19" name="Shape 17"/>
+          <p:cNvSpPr/>
+          <p:nvPr/>
+        </p:nvSpPr>
+        <p:spPr>
+          <a:xfrm>
+            <a:off x="4692551" y="1253728"/>
+            <a:ext cx="0" cy="2800000"/>
+          </a:xfrm>
+          <a:prstGeom prst="line">
+            <a:avLst/>
+          </a:prstGeom>
+          <a:noFill/>
+          <a:ln w="38100">
+            <a:solidFill>
+              <a:srgbClr val="E8505B"/>
+            </a:solidFill>
+            <a:prstDash val="solid"/>
+          </a:ln>
+        </p:spPr>
+      </p:sp>
+      <p:sp>
+        <p:nvSpPr>
+          <p:cNvPr id="20" name="Text 18"/>
+          <p:cNvSpPr/>
+          <p:nvPr/>
+        </p:nvSpPr>
+        <p:spPr>
+          <a:xfrm>
+            <a:off x="4864001" y="1350000"/>
+            <a:ext cx="3600000" cy="200000"/>
+          </a:xfrm>
+          <a:prstGeom prst="rect">
+            <a:avLst/>
+          </a:prstGeom>
+          <a:noFill/>
+        </p:spPr>
+        <p:txBody>
+          <a:bodyPr wrap="square" lIns="0" tIns="0" rIns="0" bIns="0" rtlCol="0" anchor="t"/>
+          <a:lstStyle/>
+          <a:p>
+            <a:pPr marL="0" indent="0" algn="l">
+              <a:lnSpc>
+                <a:spcPts val="1600"/>
+              </a:lnSpc>
+              <a:spcAft>
+                <a:spcPts val="400"/>
+              </a:spcAft>
+              <a:buNone/>
+            </a:pPr>
+            <a:r>
+              <a:rPr lang="en-US" sz="1200" b="1" dirty="0">
+                <a:solidFill>
+                  <a:srgbClr val="E8505B"/>
+                </a:solidFill>
+                <a:latin typeface="Arial" panose="020B0604020202090204" pitchFamily="34" charset="0"/>
+                <a:ea typeface="Arial" panose="020B0604020202090204" pitchFamily="34" charset="-122"/>
+                <a:cs typeface="Arial" panose="020B0604020202090204" pitchFamily="34" charset="-120"/>
+              </a:rPr>
+              <a:t>Limitations</a:t>
+            </a:r>
+            <a:endParaRPr lang="en-US" sz="1200" dirty="0"/>
+          </a:p>
+        </p:txBody>
+      </p:sp>
+      <p:sp>
+        <p:nvSpPr>
+          <p:cNvPr id="21" name="Text 19"/>
+          <p:cNvSpPr/>
+          <p:nvPr/>
+        </p:nvSpPr>
+        <p:spPr>
+          <a:xfrm>
+            <a:off x="4864001" y="1600000"/>
+            <a:ext cx="3600000" cy="200000"/>
+          </a:xfrm>
+          <a:prstGeom prst="rect">
+            <a:avLst/>
+          </a:prstGeom>
+          <a:noFill/>
+        </p:spPr>
+        <p:txBody>
+          <a:bodyPr wrap="square" lIns="0" tIns="0" rIns="0" bIns="0" rtlCol="0" anchor="t"/>
+          <a:lstStyle/>
+          <a:p>
+            <a:pPr marL="0" indent="0" algn="l">
+              <a:lnSpc>
+                <a:spcPts val="1050"/>
+              </a:lnSpc>
+              <a:spcAft>
+                <a:spcPts val="400"/>
+              </a:spcAft>
+              <a:buNone/>
+            </a:pPr>
+            <a:r>
+              <a:rPr lang="en-US" sz="800" dirty="0">
+                <a:solidFill>
+                  <a:srgbClr val="2C3E50"/>
+                </a:solidFill>
+                <a:latin typeface="Arial" panose="020B0604020202090204" pitchFamily="34" charset="0"/>
+                <a:ea typeface="Arial" panose="020B0604020202090204" pitchFamily="34" charset="-122"/>
+                <a:cs typeface="Arial" panose="020B0604020202090204" pitchFamily="34" charset="-120"/>
+              </a:rPr>
+              <a:t>• Single funding call (NCEMS) — generalizability is unknown.</a:t>
+            </a:r>
+            <a:endParaRPr lang="en-US" sz="800" dirty="0"/>
+          </a:p>
+        </p:txBody>
+      </p:sp>
+      <p:sp>
+        <p:nvSpPr>
+          <p:cNvPr id="21" name="Text 19"/>
+          <p:cNvSpPr/>
+          <p:nvPr/>
+        </p:nvSpPr>
+        <p:spPr>
+          <a:xfrm>
+            <a:off x="4864001" y="1870000"/>
+            <a:ext cx="3600000" cy="200000"/>
+          </a:xfrm>
+          <a:prstGeom prst="rect">
+            <a:avLst/>
+          </a:prstGeom>
+          <a:noFill/>
+        </p:spPr>
+        <p:txBody>
+          <a:bodyPr wrap="square" lIns="0" tIns="0" rIns="0" bIns="0" rtlCol="0" anchor="t"/>
+          <a:lstStyle/>
+          <a:p>
+            <a:pPr marL="0" indent="0" algn="l">
+              <a:lnSpc>
+                <a:spcPts val="1050"/>
+              </a:lnSpc>
+              <a:spcAft>
+                <a:spcPts val="400"/>
+              </a:spcAft>
+              <a:buNone/>
+            </a:pPr>
+            <a:r>
+              <a:rPr lang="en-US" sz="800" dirty="0">
+                <a:solidFill>
+                  <a:srgbClr val="2C3E50"/>
+                </a:solidFill>
+                <a:latin typeface="Arial" panose="020B0604020202090204" pitchFamily="34" charset="0"/>
+                <a:ea typeface="Arial" panose="020B0604020202090204" pitchFamily="34" charset="-122"/>
+                <a:cs typeface="Arial" panose="020B0604020202090204" pitchFamily="34" charset="-120"/>
+              </a:rPr>
+              <a:t>• Small, unbalanced sample (23 human vs. 69 AI). Power is limited for subtle effects.</a:t>
+            </a:r>
+            <a:endParaRPr lang="en-US" sz="800" dirty="0"/>
+          </a:p>
+        </p:txBody>
+      </p:sp>
+      <p:sp>
+        <p:nvSpPr>
+          <p:cNvPr id="21" name="Text 19"/>
+          <p:cNvSpPr/>
+          <p:nvPr/>
+        </p:nvSpPr>
+        <p:spPr>
+          <a:xfrm>
+            <a:off x="4864001" y="2140000"/>
+            <a:ext cx="3600000" cy="200000"/>
+          </a:xfrm>
+          <a:prstGeom prst="rect">
+            <a:avLst/>
+          </a:prstGeom>
+          <a:noFill/>
+        </p:spPr>
+        <p:txBody>
+          <a:bodyPr wrap="square" lIns="0" tIns="0" rIns="0" bIns="0" rtlCol="0" anchor="t"/>
+          <a:lstStyle/>
+          <a:p>
+            <a:pPr marL="0" indent="0" algn="l">
+              <a:lnSpc>
+                <a:spcPts val="1050"/>
+              </a:lnSpc>
+              <a:spcAft>
+                <a:spcPts val="400"/>
+              </a:spcAft>
+              <a:buNone/>
+            </a:pPr>
+            <a:r>
+              <a:rPr lang="en-US" sz="800" dirty="0">
+                <a:solidFill>
+                  <a:srgbClr val="2C3E50"/>
+                </a:solidFill>
+                <a:latin typeface="Arial" panose="020B0604020202090204" pitchFamily="34" charset="0"/>
+                <a:ea typeface="Arial" panose="020B0604020202090204" pitchFamily="34" charset="-122"/>
+                <a:cs typeface="Arial" panose="020B0604020202090204" pitchFamily="34" charset="-120"/>
+              </a:rPr>
+              <a:t>• Embedding distance ≠ conceptual diversity. BioLinkBERT may conflate stylistic with semantic differences. Expert validation is needed.</a:t>
+            </a:r>
+            <a:endParaRPr lang="en-US" sz="800" dirty="0"/>
+          </a:p>
+        </p:txBody>
+      </p:sp>
+      <p:sp>
+        <p:nvSpPr>
+          <p:cNvPr id="21" name="Text 19"/>
+          <p:cNvSpPr/>
+          <p:nvPr/>
+        </p:nvSpPr>
+        <p:spPr>
+          <a:xfrm>
+            <a:off x="4864001" y="2410000"/>
+            <a:ext cx="3600000" cy="200000"/>
+          </a:xfrm>
+          <a:prstGeom prst="rect">
+            <a:avLst/>
+          </a:prstGeom>
+          <a:noFill/>
+        </p:spPr>
+        <p:txBody>
+          <a:bodyPr wrap="square" lIns="0" tIns="0" rIns="0" bIns="0" rtlCol="0" anchor="t"/>
+          <a:lstStyle/>
+          <a:p>
+            <a:pPr marL="0" indent="0" algn="l">
+              <a:lnSpc>
+                <a:spcPts val="1050"/>
+              </a:lnSpc>
+              <a:spcAft>
+                <a:spcPts val="400"/>
+              </a:spcAft>
+              <a:buNone/>
+            </a:pPr>
+            <a:r>
+              <a:rPr lang="en-US" sz="800" dirty="0">
+                <a:solidFill>
+                  <a:srgbClr val="2C3E50"/>
+                </a:solidFill>
+                <a:latin typeface="Arial" panose="020B0604020202090204" pitchFamily="34" charset="0"/>
+                <a:ea typeface="Arial" panose="020B0604020202090204" pitchFamily="34" charset="-122"/>
+                <a:cs typeface="Arial" panose="020B0604020202090204" pitchFamily="34" charset="-120"/>
+              </a:rPr>
+              <a:t>• Novelty score conflates novelty with incoherence. High distance from literature could mean a genuinely new idea OR a poorly formulated one.</a:t>
+            </a:r>
+            <a:endParaRPr lang="en-US" sz="800" dirty="0"/>
+          </a:p>
+        </p:txBody>
+      </p:sp>
+      <p:sp>
+        <p:nvSpPr>
+          <p:cNvPr id="21" name="Text 19"/>
+          <p:cNvSpPr/>
+          <p:nvPr/>
+        </p:nvSpPr>
+        <p:spPr>
+          <a:xfrm>
+            <a:off x="4864001" y="2680000"/>
+            <a:ext cx="3600000" cy="200000"/>
+          </a:xfrm>
+          <a:prstGeom prst="rect">
+            <a:avLst/>
+          </a:prstGeom>
+          <a:noFill/>
+        </p:spPr>
+        <p:txBody>
+          <a:bodyPr wrap="square" lIns="0" tIns="0" rIns="0" bIns="0" rtlCol="0" anchor="t"/>
+          <a:lstStyle/>
+          <a:p>
+            <a:pPr marL="0" indent="0" algn="l">
+              <a:lnSpc>
+                <a:spcPts val="1050"/>
+              </a:lnSpc>
+              <a:spcAft>
+                <a:spcPts val="400"/>
+              </a:spcAft>
+              <a:buNone/>
+            </a:pPr>
+            <a:r>
+              <a:rPr lang="en-US" sz="800" dirty="0">
+                <a:solidFill>
+                  <a:srgbClr val="2C3E50"/>
+                </a:solidFill>
+                <a:latin typeface="Arial" panose="020B0604020202090204" pitchFamily="34" charset="0"/>
+                <a:ea typeface="Arial" panose="020B0604020202090204" pitchFamily="34" charset="-122"/>
+                <a:cs typeface="Arial" panose="020B0604020202090204" pitchFamily="34" charset="-120"/>
+              </a:rPr>
+              <a:t>• Topic separation may be an artifact of writing style or prompt templating, not genuine thematic differences. LDA results are exploratory.</a:t>
+            </a:r>
+            <a:endParaRPr lang="en-US" sz="800" dirty="0"/>
+          </a:p>
+        </p:txBody>
+      </p:sp>
+      <p:sp>
+        <p:nvSpPr>
+          <p:cNvPr id="21" name="Text 19"/>
+          <p:cNvSpPr/>
+          <p:nvPr/>
+        </p:nvSpPr>
+        <p:spPr>
+          <a:xfrm>
+            <a:off x="4864001" y="2950000"/>
+            <a:ext cx="3600000" cy="200000"/>
+          </a:xfrm>
+          <a:prstGeom prst="rect">
+            <a:avLst/>
+          </a:prstGeom>
+          <a:noFill/>
+        </p:spPr>
+        <p:txBody>
+          <a:bodyPr wrap="square" lIns="0" tIns="0" rIns="0" bIns="0" rtlCol="0" anchor="t"/>
+          <a:lstStyle/>
+          <a:p>
+            <a:pPr marL="0" indent="0" algn="l">
+              <a:lnSpc>
+                <a:spcPts val="1050"/>
+              </a:lnSpc>
+              <a:spcAft>
+                <a:spcPts val="400"/>
+              </a:spcAft>
+              <a:buNone/>
+            </a:pPr>
+            <a:r>
+              <a:rPr lang="en-US" sz="800" dirty="0">
+                <a:solidFill>
+                  <a:srgbClr val="2C3E50"/>
+                </a:solidFill>
+                <a:latin typeface="Arial" panose="020B0604020202090204" pitchFamily="34" charset="0"/>
+                <a:ea typeface="Arial" panose="020B0604020202090204" pitchFamily="34" charset="-122"/>
+                <a:cs typeface="Arial" panose="020B0604020202090204" pitchFamily="34" charset="-120"/>
+              </a:rPr>
+              <a:t>• Population mismatch: humans wrote under real funding stakes; AI under zero stakes. This confounds any comparison of quality or effort.</a:t>
+            </a:r>
+            <a:endParaRPr lang="en-US" sz="800" dirty="0"/>
+          </a:p>
+        </p:txBody>
+      </p:sp>
+      <p:sp>
+        <p:nvSpPr>
+          <p:cNvPr id="21" name="Text 19"/>
+          <p:cNvSpPr/>
+          <p:nvPr/>
+        </p:nvSpPr>
+        <p:spPr>
+          <a:xfrm>
+            <a:off x="4864001" y="3220000"/>
+            <a:ext cx="3600000" cy="200000"/>
+          </a:xfrm>
+          <a:prstGeom prst="rect">
+            <a:avLst/>
+          </a:prstGeom>
+          <a:noFill/>
+        </p:spPr>
+        <p:txBody>
+          <a:bodyPr wrap="square" lIns="0" tIns="0" rIns="0" bIns="0" rtlCol="0" anchor="t"/>
+          <a:lstStyle/>
+          <a:p>
+            <a:pPr marL="0" indent="0" algn="l">
+              <a:lnSpc>
+                <a:spcPts val="1050"/>
+              </a:lnSpc>
+              <a:spcAft>
+                <a:spcPts val="400"/>
+              </a:spcAft>
+              <a:buNone/>
+            </a:pPr>
+            <a:r>
+              <a:rPr lang="en-US" sz="800" dirty="0">
+                <a:solidFill>
+                  <a:srgbClr val="2C3E50"/>
+                </a:solidFill>
+                <a:latin typeface="Arial" panose="020B0604020202090204" pitchFamily="34" charset="0"/>
+                <a:ea typeface="Arial" panose="020B0604020202090204" pitchFamily="34" charset="-122"/>
+                <a:cs typeface="Arial" panose="020B0604020202090204" pitchFamily="34" charset="-120"/>
+              </a:rPr>
+              <a:t>• No quality evaluation yet — diversity and novelty do not imply good science. Human expert review (planned) is the critical missing piece.</a:t>
+            </a:r>
+            <a:endParaRPr lang="en-US" sz="800" dirty="0"/>
+          </a:p>
+        </p:txBody>
+      </p:sp>
+      <p:sp>
+        <p:nvSpPr>
+          <p:cNvPr id="30" name="Text 28"/>
+          <p:cNvSpPr/>
+          <p:nvPr/>
+        </p:nvSpPr>
+        <p:spPr>
+          <a:xfrm>
+            <a:off x="507950" y="4200000"/>
+            <a:ext cx="8128099" cy="380000"/>
+          </a:xfrm>
+          <a:prstGeom prst="roundRect">
+            <a:avLst>
+              <a:gd name="adj" fmla="val 3000"/>
+            </a:avLst>
+          </a:prstGeom>
+          <a:solidFill>
+            <a:srgbClr val="1B2A4A"/>
+          </a:solidFill>
+        </p:spPr>
+        <p:txBody>
+          <a:bodyPr wrap="square" rtlCol="0" anchor="ctr"/>
+          <a:lstStyle/>
+          <a:p>
+            <a:pPr marL="0" indent="0">
+              <a:buNone/>
+            </a:pPr>
+            <a:endParaRPr lang="en-US" dirty="0"/>
+          </a:p>
+        </p:txBody>
+      </p:sp>
+      <p:sp>
+        <p:nvSpPr>
+          <p:cNvPr id="31" name="Text 29"/>
+          <p:cNvSpPr/>
+          <p:nvPr/>
+        </p:nvSpPr>
+        <p:spPr>
+          <a:xfrm>
+            <a:off x="660350" y="4260000"/>
+            <a:ext cx="7900000" cy="260000"/>
+          </a:xfrm>
+          <a:prstGeom prst="rect">
+            <a:avLst/>
+          </a:prstGeom>
+          <a:noFill/>
+        </p:spPr>
+        <p:txBody>
+          <a:bodyPr wrap="square" lIns="0" tIns="0" rIns="0" bIns="0" rtlCol="0" anchor="t"/>
+          <a:lstStyle/>
+          <a:p>
+            <a:pPr marL="0" indent="0" algn="l">
+              <a:lnSpc>
+                <a:spcPts val="1200"/>
+              </a:lnSpc>
+              <a:spcAft>
+                <a:spcPts val="400"/>
+              </a:spcAft>
+              <a:buNone/>
+            </a:pPr>
+            <a:r>
+              <a:rPr lang="en-US" sz="900" b="1" dirty="0">
+                <a:solidFill>
+                  <a:srgbClr val="FFFFFF"/>
+                </a:solidFill>
+                <a:latin typeface="Arial" panose="020B0604020202090204" pitchFamily="34" charset="0"/>
+                <a:ea typeface="Arial" panose="020B0604020202090204" pitchFamily="34" charset="-122"/>
+                <a:cs typeface="Arial" panose="020B0604020202090204" pitchFamily="34" charset="-120"/>
+              </a:rPr>
+              <a:t>Next steps: (1) Human expert evaluation of proposal quality; (2) Augmented conditions (literature-enriched, persona-based prompts); (3) Construct validation of embedding metrics; (4) Larger sample sizes across multiple funding calls.</a:t>
+            </a:r>
+            <a:endParaRPr lang="en-US" sz="900" dirty="0"/>
+          </a:p>
+        </p:txBody>
+      </p:sp>
+    </p:spTree>
+  </p:cSld>
+  <p:clrMapOvr>
+    <a:masterClrMapping/>
+  </p:clrMapOvr>
+</p:sld>
+</file>
+
+<file path=ppt/slides/slide18.xml><?xml version="1.0" encoding="utf-8"?>
+<p:sld xmlns:a="http://schemas.openxmlformats.org/drawingml/2006/main" xmlns:r="http://schemas.openxmlformats.org/officeDocument/2006/relationships" xmlns:p="http://schemas.openxmlformats.org/presentationml/2006/main">
+  <p:cSld>
+    <p:bg>
+      <p:bgPr>
+        <a:solidFill>
+          <a:srgbClr val="FFFFFF"/>
+        </a:solidFill>
+        <a:effectLst/>
+      </p:bgPr>
+    </p:bg>
+    <p:spTree>
+      <p:nvGrpSpPr>
+        <p:cNvPr id="1" name=""/>
+        <p:cNvGrpSpPr/>
+        <p:nvPr/>
+      </p:nvGrpSpPr>
+      <p:grpSpPr>
+        <a:xfrm>
+          <a:off x="0" y="0"/>
+          <a:ext cx="0" cy="0"/>
+          <a:chOff x="0" y="0"/>
+          <a:chExt cx="0" cy="0"/>
+        </a:xfrm>
+      </p:grpSpPr>
+      <p:sp>
+        <p:nvSpPr>
+          <p:cNvPr id="2" name="Text 0"/>
+          <p:cNvSpPr/>
+          <p:nvPr/>
+        </p:nvSpPr>
+        <p:spPr>
+          <a:xfrm>
+            <a:off x="0" y="0"/>
+            <a:ext cx="9144000" cy="650677"/>
+          </a:xfrm>
+          <a:prstGeom prst="rect">
+            <a:avLst/>
+          </a:prstGeom>
+          <a:solidFill>
+            <a:srgbClr val="1B2A4A"/>
+          </a:solidFill>
+        </p:spPr>
+        <p:txBody>
+          <a:bodyPr wrap="square" rtlCol="0" anchor="ctr"/>
+          <a:lstStyle/>
+          <a:p>
+            <a:pPr marL="0" indent="0">
+              <a:buNone/>
+            </a:pPr>
+            <a:endParaRPr lang="en-US" dirty="0"/>
+          </a:p>
+        </p:txBody>
+      </p:sp>
+      <p:sp>
+        <p:nvSpPr>
+          <p:cNvPr id="3" name="Text 1"/>
+          <p:cNvSpPr/>
+          <p:nvPr/>
+        </p:nvSpPr>
+        <p:spPr>
+          <a:xfrm>
+            <a:off x="507950" y="177701"/>
+            <a:ext cx="8290661" cy="295275"/>
+          </a:xfrm>
+          <a:prstGeom prst="rect">
+            <a:avLst/>
+          </a:prstGeom>
+          <a:noFill/>
+        </p:spPr>
+        <p:txBody>
+          <a:bodyPr wrap="square" lIns="0" tIns="0" rIns="0" bIns="0" rtlCol="0" anchor="t"/>
+          <a:lstStyle/>
+          <a:p>
+            <a:pPr marL="0" indent="0" algn="l">
+              <a:buNone/>
+            </a:pPr>
+            <a:r>
+              <a:rPr lang="en-US" sz="2000" b="1" dirty="0">
+                <a:solidFill>
+                  <a:srgbClr val="FFFFFF"/>
+                </a:solidFill>
+                <a:latin typeface="Arial" panose="020B0604020202090204" pitchFamily="34" charset="0"/>
+                <a:ea typeface="Arial" panose="020B0604020202090204" pitchFamily="34" charset="-122"/>
+                <a:cs typeface="Arial" panose="020B0604020202090204" pitchFamily="34" charset="-120"/>
+              </a:rPr>
+              <a:t>Defining Novelty &amp; the Literature Corpus</a:t>
+            </a:r>
+            <a:endParaRPr lang="en-US" sz="2000" dirty="0"/>
+          </a:p>
+        </p:txBody>
+      </p:sp>
+      <p:sp>
+        <p:nvSpPr>
+          <p:cNvPr id="4" name="Text 2"/>
+          <p:cNvSpPr/>
+          <p:nvPr/>
+        </p:nvSpPr>
+        <p:spPr>
+          <a:xfrm>
+            <a:off x="507950" y="853827"/>
+            <a:ext cx="3951021" cy="200025"/>
+          </a:xfrm>
+          <a:prstGeom prst="rect">
+            <a:avLst/>
+          </a:prstGeom>
+          <a:noFill/>
+        </p:spPr>
+        <p:txBody>
+          <a:bodyPr wrap="square" lIns="0" tIns="0" rIns="0" bIns="0" rtlCol="0" anchor="t"/>
+          <a:lstStyle/>
+          <a:p>
+            <a:pPr marL="0" indent="0" algn="l">
+              <a:lnSpc>
+                <a:spcPts val="1285"/>
+              </a:lnSpc>
+              <a:spcAft>
+                <a:spcPts val="400"/>
+              </a:spcAft>
+              <a:buNone/>
+            </a:pPr>
+            <a:r>
+              <a:rPr lang="en-US" sz="1300" b="1" dirty="0">
+                <a:solidFill>
+                  <a:srgbClr val="1B2A4A"/>
+                </a:solidFill>
+                <a:latin typeface="Arial" panose="020B0604020202090204" pitchFamily="34" charset="0"/>
+                <a:ea typeface="Arial" panose="020B0604020202090204" pitchFamily="34" charset="-122"/>
+                <a:cs typeface="Arial" panose="020B0604020202090204" pitchFamily="34" charset="-120"/>
+              </a:rPr>
+              <a:t>How is novelty measured?</a:t>
+            </a:r>
+            <a:endParaRPr lang="en-US" sz="1300" dirty="0"/>
+          </a:p>
+        </p:txBody>
+      </p:sp>
+      <p:sp>
+        <p:nvSpPr>
+          <p:cNvPr id="5" name="Text 3"/>
+          <p:cNvSpPr/>
+          <p:nvPr/>
+        </p:nvSpPr>
+        <p:spPr>
+          <a:xfrm>
+            <a:off x="507950" y="1100000"/>
+            <a:ext cx="507950" cy="25301"/>
+          </a:xfrm>
+          <a:prstGeom prst="rect">
+            <a:avLst/>
+          </a:prstGeom>
+          <a:solidFill>
+            <a:srgbClr val="E8505B"/>
+          </a:solidFill>
+        </p:spPr>
+        <p:txBody>
+          <a:bodyPr wrap="square" rtlCol="0" anchor="ctr"/>
+          <a:lstStyle/>
+          <a:p>
+            <a:pPr marL="0" indent="0">
+              <a:buNone/>
+            </a:pPr>
+            <a:endParaRPr lang="en-US" dirty="0"/>
+          </a:p>
+        </p:txBody>
+      </p:sp>
+      <p:sp>
+        <p:nvSpPr>
+          <p:cNvPr id="6" name="Text 4"/>
+          <p:cNvSpPr/>
+          <p:nvPr/>
+        </p:nvSpPr>
+        <p:spPr>
+          <a:xfrm>
+            <a:off x="507950" y="1180000"/>
+            <a:ext cx="3951021" cy="700000"/>
+          </a:xfrm>
+          <a:prstGeom prst="roundRect">
+            <a:avLst>
+              <a:gd name="adj" fmla="val 3000"/>
+            </a:avLst>
+          </a:prstGeom>
+          <a:solidFill>
+            <a:srgbClr val="F7F9FC"/>
+          </a:solidFill>
+        </p:spPr>
+        <p:txBody>
+          <a:bodyPr wrap="square" rtlCol="0" anchor="ctr"/>
+          <a:lstStyle/>
+          <a:p>
+            <a:pPr marL="0" indent="0">
+              <a:buNone/>
+            </a:pPr>
+            <a:endParaRPr lang="en-US" dirty="0"/>
+          </a:p>
+        </p:txBody>
+      </p:sp>
+      <p:sp>
+        <p:nvSpPr>
+          <p:cNvPr id="7" name="Shape 5"/>
+          <p:cNvSpPr/>
+          <p:nvPr/>
+        </p:nvSpPr>
+        <p:spPr>
+          <a:xfrm>
+            <a:off x="507950" y="1199050"/>
+            <a:ext cx="3951021" cy="0"/>
+          </a:xfrm>
+          <a:prstGeom prst="line">
+            <a:avLst/>
+          </a:prstGeom>
+          <a:noFill/>
+          <a:ln w="38100">
+            <a:solidFill>
+              <a:srgbClr val="2E86AB"/>
+            </a:solidFill>
+            <a:prstDash val="solid"/>
+          </a:ln>
+        </p:spPr>
+      </p:sp>
+      <p:sp>
+        <p:nvSpPr>
+          <p:cNvPr id="8" name="Text 6"/>
+          <p:cNvSpPr/>
+          <p:nvPr/>
+        </p:nvSpPr>
+        <p:spPr>
+          <a:xfrm>
+            <a:off x="660350" y="1240000"/>
+            <a:ext cx="3700000" cy="620000"/>
+          </a:xfrm>
+          <a:prstGeom prst="rect">
+            <a:avLst/>
+          </a:prstGeom>
+          <a:noFill/>
+        </p:spPr>
+        <p:txBody>
+          <a:bodyPr wrap="square" lIns="0" tIns="0" rIns="0" bIns="0" rtlCol="0" anchor="t"/>
+          <a:lstStyle/>
+          <a:p>
+            <a:pPr marL="0" indent="0" algn="l">
+              <a:lnSpc>
+                <a:spcPts val="1150"/>
+              </a:lnSpc>
+              <a:spcAft>
+                <a:spcPts val="400"/>
+              </a:spcAft>
+              <a:buNone/>
+            </a:pPr>
+            <a:r>
+              <a:rPr lang="en-US" sz="900" dirty="0">
+                <a:solidFill>
+                  <a:srgbClr val="2C3E50"/>
+                </a:solidFill>
+                <a:latin typeface="Arial" panose="020B0604020202090204" pitchFamily="34" charset="0"/>
+                <a:ea typeface="Arial" panose="020B0604020202090204" pitchFamily="34" charset="-122"/>
+                <a:cs typeface="Arial" panose="020B0604020202090204" pitchFamily="34" charset="-120"/>
+              </a:rPr>
+              <a:t>For each proposal, we find its k=10 nearest neighbors in a reference corpus of published PubMed articles and compute the mean cosine distance. A higher score means the proposal is further from anything previously published — it explores territory that the existing literature does not cover. We embed only the title + abstract of each proposal (not the full text) to ensure a fair comparison with the PubMed abstracts.</a:t>
+            </a:r>
+            <a:endParaRPr lang="en-US" sz="900" dirty="0"/>
+          </a:p>
+        </p:txBody>
+      </p:sp>
+      <p:sp>
+        <p:nvSpPr>
+          <p:cNvPr id="9" name="Text 7"/>
+          <p:cNvSpPr/>
+          <p:nvPr/>
+        </p:nvSpPr>
+        <p:spPr>
+          <a:xfrm>
+            <a:off x="507950" y="1980000"/>
+            <a:ext cx="3951021" cy="200025"/>
+          </a:xfrm>
+          <a:prstGeom prst="rect">
+            <a:avLst/>
+          </a:prstGeom>
+          <a:noFill/>
+        </p:spPr>
+        <p:txBody>
+          <a:bodyPr wrap="square" lIns="0" tIns="0" rIns="0" bIns="0" rtlCol="0" anchor="t"/>
+          <a:lstStyle/>
+          <a:p>
+            <a:pPr marL="0" indent="0" algn="l">
+              <a:lnSpc>
+                <a:spcPts val="1285"/>
+              </a:lnSpc>
+              <a:spcAft>
+                <a:spcPts val="400"/>
+              </a:spcAft>
+              <a:buNone/>
+            </a:pPr>
+            <a:r>
+              <a:rPr lang="en-US" sz="1200" b="1" dirty="0">
+                <a:solidFill>
+                  <a:srgbClr val="1B2A4A"/>
+                </a:solidFill>
+                <a:latin typeface="Arial" panose="020B0604020202090204" pitchFamily="34" charset="0"/>
+                <a:ea typeface="Arial" panose="020B0604020202090204" pitchFamily="34" charset="-122"/>
+                <a:cs typeface="Arial" panose="020B0604020202090204" pitchFamily="34" charset="-120"/>
+              </a:rPr>
+              <a:t>How does novelty differ from diversity?</a:t>
+            </a:r>
+            <a:endParaRPr lang="en-US" sz="1200" dirty="0"/>
+          </a:p>
+        </p:txBody>
+      </p:sp>
+      <p:sp>
+        <p:nvSpPr>
+          <p:cNvPr id="10" name="Text 8"/>
+          <p:cNvSpPr/>
+          <p:nvPr/>
+        </p:nvSpPr>
+        <p:spPr>
+          <a:xfrm>
+            <a:off x="507950" y="2230000"/>
+            <a:ext cx="507950" cy="25301"/>
+          </a:xfrm>
+          <a:prstGeom prst="rect">
+            <a:avLst/>
+          </a:prstGeom>
+          <a:solidFill>
+            <a:srgbClr val="16A085"/>
+          </a:solidFill>
+        </p:spPr>
+        <p:txBody>
+          <a:bodyPr wrap="square" rtlCol="0" anchor="ctr"/>
+          <a:lstStyle/>
+          <a:p>
+            <a:pPr marL="0" indent="0">
+              <a:buNone/>
+            </a:pPr>
+            <a:endParaRPr lang="en-US" dirty="0"/>
+          </a:p>
+        </p:txBody>
+      </p:sp>
+      <p:sp>
+        <p:nvSpPr>
+          <p:cNvPr id="11" name="Text 9"/>
+          <p:cNvSpPr/>
+          <p:nvPr/>
+        </p:nvSpPr>
+        <p:spPr>
+          <a:xfrm>
+            <a:off x="507950" y="2310000"/>
+            <a:ext cx="1900000" cy="630000"/>
+          </a:xfrm>
+          <a:prstGeom prst="roundRect">
+            <a:avLst>
+              <a:gd name="adj" fmla="val 3000"/>
+            </a:avLst>
+          </a:prstGeom>
+          <a:solidFill>
+            <a:srgbClr val="FDF8F8"/>
+          </a:solidFill>
+        </p:spPr>
+        <p:txBody>
+          <a:bodyPr wrap="square" rtlCol="0" anchor="ctr"/>
+          <a:lstStyle/>
+          <a:p>
+            <a:pPr marL="0" indent="0">
+              <a:buNone/>
+            </a:pPr>
+            <a:endParaRPr lang="en-US" dirty="0"/>
+          </a:p>
+        </p:txBody>
+      </p:sp>
+      <p:sp>
+        <p:nvSpPr>
+          <p:cNvPr id="12" name="Shape 10"/>
+          <p:cNvSpPr/>
+          <p:nvPr/>
+        </p:nvSpPr>
+        <p:spPr>
+          <a:xfrm>
+            <a:off x="507950" y="2329050"/>
+            <a:ext cx="1900000" cy="0"/>
+          </a:xfrm>
+          <a:prstGeom prst="line">
+            <a:avLst/>
+          </a:prstGeom>
+          <a:noFill/>
+          <a:ln w="38100">
+            <a:solidFill>
+              <a:srgbClr val="E8505B"/>
+            </a:solidFill>
+            <a:prstDash val="solid"/>
+          </a:ln>
+        </p:spPr>
+      </p:sp>
+      <p:sp>
+        <p:nvSpPr>
+          <p:cNvPr id="13" name="Text 11"/>
+          <p:cNvSpPr/>
+          <p:nvPr/>
+        </p:nvSpPr>
+        <p:spPr>
+          <a:xfrm>
+            <a:off x="622250" y="2370000"/>
+            <a:ext cx="1700000" cy="150000"/>
+          </a:xfrm>
+          <a:prstGeom prst="rect">
+            <a:avLst/>
+          </a:prstGeom>
+          <a:noFill/>
+        </p:spPr>
+        <p:txBody>
+          <a:bodyPr wrap="square" lIns="0" tIns="0" rIns="0" bIns="0" rtlCol="0" anchor="t"/>
+          <a:lstStyle/>
+          <a:p>
+            <a:pPr marL="0" indent="0" algn="l">
+              <a:lnSpc>
+                <a:spcPts val="1400"/>
+              </a:lnSpc>
+              <a:spcAft>
+                <a:spcPts val="400"/>
+              </a:spcAft>
+              <a:buNone/>
+            </a:pPr>
+            <a:r>
+              <a:rPr lang="en-US" sz="1050" b="1" dirty="0">
+                <a:solidFill>
+                  <a:srgbClr val="E8505B"/>
+                </a:solidFill>
+                <a:latin typeface="Arial" panose="020B0604020202090204" pitchFamily="34" charset="0"/>
+                <a:ea typeface="Arial" panose="020B0604020202090204" pitchFamily="34" charset="-122"/>
+                <a:cs typeface="Arial" panose="020B0604020202090204" pitchFamily="34" charset="-120"/>
+              </a:rPr>
+              <a:t>Diversity</a:t>
+            </a:r>
+            <a:endParaRPr lang="en-US" sz="1050" dirty="0"/>
+          </a:p>
+        </p:txBody>
+      </p:sp>
+      <p:sp>
+        <p:nvSpPr>
+          <p:cNvPr id="14" name="Text 12"/>
+          <p:cNvSpPr/>
+          <p:nvPr/>
+        </p:nvSpPr>
+        <p:spPr>
+          <a:xfrm>
+            <a:off x="622250" y="2520000"/>
+            <a:ext cx="1700000" cy="380000"/>
+          </a:xfrm>
+          <a:prstGeom prst="rect">
+            <a:avLst/>
+          </a:prstGeom>
+          <a:noFill/>
+        </p:spPr>
+        <p:txBody>
+          <a:bodyPr wrap="square" lIns="0" tIns="0" rIns="0" bIns="0" rtlCol="0" anchor="t"/>
+          <a:lstStyle/>
+          <a:p>
+            <a:pPr marL="0" indent="0" algn="l">
+              <a:lnSpc>
+                <a:spcPts val="1050"/>
+              </a:lnSpc>
+              <a:spcAft>
+                <a:spcPts val="400"/>
+              </a:spcAft>
+              <a:buNone/>
+            </a:pPr>
+            <a:r>
+              <a:rPr lang="en-US" sz="800" dirty="0">
+                <a:solidFill>
+                  <a:srgbClr val="2C3E50"/>
+                </a:solidFill>
+                <a:latin typeface="Arial" panose="020B0604020202090204" pitchFamily="34" charset="0"/>
+                <a:ea typeface="Arial" panose="020B0604020202090204" pitchFamily="34" charset="-122"/>
+                <a:cs typeface="Arial" panose="020B0604020202090204" pitchFamily="34" charset="-120"/>
+              </a:rPr>
+              <a:t>Compares proposals to each other within a group. A diverse group produces varied ideas, but those ideas may all be well-known in the literature. Reference: internal (proposals vs. proposals).</a:t>
+            </a:r>
+            <a:endParaRPr lang="en-US" sz="800" dirty="0"/>
+          </a:p>
+        </p:txBody>
+      </p:sp>
+      <p:sp>
+        <p:nvSpPr>
+          <p:cNvPr id="15" name="Text 13"/>
+          <p:cNvSpPr/>
+          <p:nvPr/>
+        </p:nvSpPr>
+        <p:spPr>
+          <a:xfrm>
+            <a:off x="2557950" y="2310000"/>
+            <a:ext cx="1900000" cy="630000"/>
+          </a:xfrm>
+          <a:prstGeom prst="roundRect">
+            <a:avLst>
+              <a:gd name="adj" fmla="val 3000"/>
+            </a:avLst>
+          </a:prstGeom>
+          <a:solidFill>
+            <a:srgbClr val="F7F9FC"/>
+          </a:solidFill>
+        </p:spPr>
+        <p:txBody>
+          <a:bodyPr wrap="square" rtlCol="0" anchor="ctr"/>
+          <a:lstStyle/>
+          <a:p>
+            <a:pPr marL="0" indent="0">
+              <a:buNone/>
+            </a:pPr>
+            <a:endParaRPr lang="en-US" dirty="0"/>
+          </a:p>
+        </p:txBody>
+      </p:sp>
+      <p:sp>
+        <p:nvSpPr>
+          <p:cNvPr id="16" name="Shape 14"/>
+          <p:cNvSpPr/>
+          <p:nvPr/>
+        </p:nvSpPr>
+        <p:spPr>
+          <a:xfrm>
+            <a:off x="2557950" y="2329050"/>
+            <a:ext cx="1900000" cy="0"/>
+          </a:xfrm>
+          <a:prstGeom prst="line">
+            <a:avLst/>
+          </a:prstGeom>
+          <a:noFill/>
+          <a:ln w="38100">
+            <a:solidFill>
+              <a:srgbClr val="2E86AB"/>
+            </a:solidFill>
+            <a:prstDash val="solid"/>
+          </a:ln>
+        </p:spPr>
+      </p:sp>
+      <p:sp>
+        <p:nvSpPr>
+          <p:cNvPr id="17" name="Text 15"/>
+          <p:cNvSpPr/>
+          <p:nvPr/>
+        </p:nvSpPr>
+        <p:spPr>
+          <a:xfrm>
+            <a:off x="2672250" y="2370000"/>
+            <a:ext cx="1700000" cy="150000"/>
+          </a:xfrm>
+          <a:prstGeom prst="rect">
+            <a:avLst/>
+          </a:prstGeom>
+          <a:noFill/>
+        </p:spPr>
+        <p:txBody>
+          <a:bodyPr wrap="square" lIns="0" tIns="0" rIns="0" bIns="0" rtlCol="0" anchor="t"/>
+          <a:lstStyle/>
+          <a:p>
+            <a:pPr marL="0" indent="0" algn="l">
+              <a:lnSpc>
+                <a:spcPts val="1400"/>
+              </a:lnSpc>
+              <a:spcAft>
+                <a:spcPts val="400"/>
+              </a:spcAft>
+              <a:buNone/>
+            </a:pPr>
+            <a:r>
+              <a:rPr lang="en-US" sz="1050" b="1" dirty="0">
+                <a:solidFill>
+                  <a:srgbClr val="2E86AB"/>
+                </a:solidFill>
+                <a:latin typeface="Arial" panose="020B0604020202090204" pitchFamily="34" charset="0"/>
+                <a:ea typeface="Arial" panose="020B0604020202090204" pitchFamily="34" charset="-122"/>
+                <a:cs typeface="Arial" panose="020B0604020202090204" pitchFamily="34" charset="-120"/>
+              </a:rPr>
+              <a:t>Novelty</a:t>
+            </a:r>
+            <a:endParaRPr lang="en-US" sz="1050" dirty="0"/>
+          </a:p>
+        </p:txBody>
+      </p:sp>
+      <p:sp>
+        <p:nvSpPr>
+          <p:cNvPr id="18" name="Text 16"/>
+          <p:cNvSpPr/>
+          <p:nvPr/>
+        </p:nvSpPr>
+        <p:spPr>
+          <a:xfrm>
+            <a:off x="2672250" y="2520000"/>
+            <a:ext cx="1700000" cy="380000"/>
+          </a:xfrm>
+          <a:prstGeom prst="rect">
+            <a:avLst/>
+          </a:prstGeom>
+          <a:noFill/>
+        </p:spPr>
+        <p:txBody>
+          <a:bodyPr wrap="square" lIns="0" tIns="0" rIns="0" bIns="0" rtlCol="0" anchor="t"/>
+          <a:lstStyle/>
+          <a:p>
+            <a:pPr marL="0" indent="0" algn="l">
+              <a:lnSpc>
+                <a:spcPts val="1050"/>
+              </a:lnSpc>
+              <a:spcAft>
+                <a:spcPts val="400"/>
+              </a:spcAft>
+              <a:buNone/>
+            </a:pPr>
+            <a:r>
+              <a:rPr lang="en-US" sz="800" dirty="0">
+                <a:solidFill>
+                  <a:srgbClr val="2C3E50"/>
+                </a:solidFill>
+                <a:latin typeface="Arial" panose="020B0604020202090204" pitchFamily="34" charset="0"/>
+                <a:ea typeface="Arial" panose="020B0604020202090204" pitchFamily="34" charset="-122"/>
+                <a:cs typeface="Arial" panose="020B0604020202090204" pitchFamily="34" charset="-120"/>
+              </a:rPr>
+              <a:t>Compares proposals to published literature. A novel proposal explores territory that no published paper covers, regardless of how similar it is to other proposals. Reference: external (proposals vs. PubMed).</a:t>
+            </a:r>
+            <a:endParaRPr lang="en-US" sz="800" dirty="0"/>
+          </a:p>
+        </p:txBody>
+      </p:sp>
+      <p:sp>
+        <p:nvSpPr>
+          <p:cNvPr id="19" name="Text 17"/>
+          <p:cNvSpPr/>
+          <p:nvPr/>
+        </p:nvSpPr>
+        <p:spPr>
+          <a:xfrm>
+            <a:off x="507950" y="3040000"/>
+            <a:ext cx="3951021" cy="350000"/>
+          </a:xfrm>
+          <a:prstGeom prst="roundRect">
+            <a:avLst>
+              <a:gd name="adj" fmla="val 3000"/>
+            </a:avLst>
+          </a:prstGeom>
+          <a:solidFill>
+            <a:srgbClr val="1B2A4A"/>
+          </a:solidFill>
+        </p:spPr>
+        <p:txBody>
+          <a:bodyPr wrap="square" rtlCol="0" anchor="ctr"/>
+          <a:lstStyle/>
+          <a:p>
+            <a:pPr marL="0" indent="0">
+              <a:buNone/>
+            </a:pPr>
+            <a:endParaRPr lang="en-US" dirty="0"/>
+          </a:p>
+        </p:txBody>
+      </p:sp>
+      <p:sp>
+        <p:nvSpPr>
+          <p:cNvPr id="20" name="Text 18"/>
+          <p:cNvSpPr/>
+          <p:nvPr/>
+        </p:nvSpPr>
+        <p:spPr>
+          <a:xfrm>
+            <a:off x="660350" y="3080000"/>
+            <a:ext cx="3700000" cy="280000"/>
+          </a:xfrm>
+          <a:prstGeom prst="rect">
+            <a:avLst/>
+          </a:prstGeom>
+          <a:noFill/>
+        </p:spPr>
+        <p:txBody>
+          <a:bodyPr wrap="square" lIns="0" tIns="0" rIns="0" bIns="0" rtlCol="0" anchor="t"/>
+          <a:lstStyle/>
+          <a:p>
+            <a:pPr marL="0" indent="0" algn="l">
+              <a:lnSpc>
+                <a:spcPts val="1100"/>
+              </a:lnSpc>
+              <a:spcAft>
+                <a:spcPts val="400"/>
+              </a:spcAft>
+              <a:buNone/>
+            </a:pPr>
+            <a:r>
+              <a:rPr lang="en-US" sz="850" b="1" dirty="0">
+                <a:solidFill>
+                  <a:srgbClr val="FFFFFF"/>
+                </a:solidFill>
+                <a:latin typeface="Arial" panose="020B0604020202090204" pitchFamily="34" charset="0"/>
+                <a:ea typeface="Arial" panose="020B0604020202090204" pitchFamily="34" charset="-122"/>
+                <a:cs typeface="Arial" panose="020B0604020202090204" pitchFamily="34" charset="-120"/>
+              </a:rPr>
+              <a:t>Implication: A model can be highly diverse (varied output) but low novelty (ideas the field already knows), or low diversity (repetitive) but high novelty (repetitively novel). These are independent dimensions.</a:t>
+            </a:r>
+            <a:endParaRPr lang="en-US" sz="850" dirty="0"/>
+          </a:p>
+        </p:txBody>
+      </p:sp>
+      <p:sp>
+        <p:nvSpPr>
+          <p:cNvPr id="21" name="Text 19"/>
+          <p:cNvSpPr/>
+          <p:nvPr/>
+        </p:nvSpPr>
+        <p:spPr>
+          <a:xfrm>
+            <a:off x="4762500" y="853827"/>
+            <a:ext cx="3873550" cy="200025"/>
+          </a:xfrm>
+          <a:prstGeom prst="rect">
+            <a:avLst/>
+          </a:prstGeom>
+          <a:noFill/>
+        </p:spPr>
+        <p:txBody>
+          <a:bodyPr wrap="square" lIns="0" tIns="0" rIns="0" bIns="0" rtlCol="0" anchor="t"/>
+          <a:lstStyle/>
+          <a:p>
+            <a:pPr marL="0" indent="0" algn="l">
+              <a:lnSpc>
+                <a:spcPts val="1285"/>
+              </a:lnSpc>
+              <a:spcAft>
+                <a:spcPts val="400"/>
+              </a:spcAft>
+              <a:buNone/>
+            </a:pPr>
+            <a:r>
+              <a:rPr lang="en-US" sz="1300" b="1" dirty="0">
+                <a:solidFill>
+                  <a:srgbClr val="1B2A4A"/>
+                </a:solidFill>
+                <a:latin typeface="Arial" panose="020B0604020202090204" pitchFamily="34" charset="0"/>
+                <a:ea typeface="Arial" panose="020B0604020202090204" pitchFamily="34" charset="-122"/>
+                <a:cs typeface="Arial" panose="020B0604020202090204" pitchFamily="34" charset="-120"/>
+              </a:rPr>
+              <a:t>Reference Literature Corpus</a:t>
+            </a:r>
+            <a:endParaRPr lang="en-US" sz="1300" dirty="0"/>
+          </a:p>
+        </p:txBody>
+      </p:sp>
+      <p:sp>
+        <p:nvSpPr>
+          <p:cNvPr id="22" name="Text 20"/>
+          <p:cNvSpPr/>
+          <p:nvPr/>
+        </p:nvSpPr>
+        <p:spPr>
+          <a:xfrm>
+            <a:off x="4762500" y="1100000"/>
+            <a:ext cx="507950" cy="25301"/>
+          </a:xfrm>
+          <a:prstGeom prst="rect">
+            <a:avLst/>
+          </a:prstGeom>
+          <a:solidFill>
+            <a:srgbClr val="2E86AB"/>
+          </a:solidFill>
+        </p:spPr>
+        <p:txBody>
+          <a:bodyPr wrap="square" rtlCol="0" anchor="ctr"/>
+          <a:lstStyle/>
+          <a:p>
+            <a:pPr marL="0" indent="0">
+              <a:buNone/>
+            </a:pPr>
+            <a:endParaRPr lang="en-US" dirty="0"/>
+          </a:p>
+        </p:txBody>
+      </p:sp>
+      <p:pic>
+        <p:nvPicPr>
+          <p:cNvPr id="23" name="Picture 23"/>
+          <p:cNvPicPr>
+            <a:picLocks noChangeAspect="1"/>
+          </p:cNvPicPr>
+          <p:nvPr/>
+        </p:nvPicPr>
+        <p:blipFill>
+          <a:blip r:embed="rId2"/>
+          <a:stretch>
+            <a:fillRect/>
+          </a:stretch>
+        </p:blipFill>
+        <p:spPr>
+          <a:xfrm>
+            <a:off x="4762500" y="1180000"/>
+            <a:ext cx="3873550" cy="2000000"/>
+          </a:xfrm>
+          <a:prstGeom prst="rect">
+            <a:avLst/>
+          </a:prstGeom>
+        </p:spPr>
+      </p:pic>
+      <p:sp>
+        <p:nvSpPr>
+          <p:cNvPr id="24" name="Text 22"/>
+          <p:cNvSpPr/>
+          <p:nvPr/>
+        </p:nvSpPr>
+        <p:spPr>
+          <a:xfrm>
+            <a:off x="4762500" y="3280000"/>
+            <a:ext cx="3873550" cy="1120000"/>
+          </a:xfrm>
+          <a:prstGeom prst="roundRect">
+            <a:avLst>
+              <a:gd name="adj" fmla="val 3000"/>
+            </a:avLst>
+          </a:prstGeom>
+          <a:solidFill>
+            <a:srgbClr val="F0F4F8"/>
+          </a:solidFill>
+        </p:spPr>
+        <p:txBody>
+          <a:bodyPr wrap="square" rtlCol="0" anchor="ctr"/>
+          <a:lstStyle/>
+          <a:p>
+            <a:pPr marL="0" indent="0">
+              <a:buNone/>
+            </a:pPr>
+            <a:endParaRPr lang="en-US" dirty="0"/>
+          </a:p>
+        </p:txBody>
+      </p:sp>
+      <p:sp>
+        <p:nvSpPr>
+          <p:cNvPr id="25" name="Shape 23"/>
+          <p:cNvSpPr/>
+          <p:nvPr/>
+        </p:nvSpPr>
+        <p:spPr>
+          <a:xfrm>
+            <a:off x="4781550" y="3280000"/>
+            <a:ext cx="0" cy="1120000"/>
+          </a:xfrm>
+          <a:prstGeom prst="line">
+            <a:avLst/>
+          </a:prstGeom>
+          <a:noFill/>
+          <a:ln w="38100">
+            <a:solidFill>
+              <a:srgbClr val="2E86AB"/>
+            </a:solidFill>
+            <a:prstDash val="solid"/>
+          </a:ln>
+        </p:spPr>
+      </p:sp>
+      <p:sp>
+        <p:nvSpPr>
+          <p:cNvPr id="26" name="Text 24"/>
+          <p:cNvSpPr/>
+          <p:nvPr/>
+        </p:nvSpPr>
+        <p:spPr>
+          <a:xfrm>
+            <a:off x="4953000" y="3320000"/>
+            <a:ext cx="3600000" cy="150000"/>
+          </a:xfrm>
+          <a:prstGeom prst="rect">
+            <a:avLst/>
+          </a:prstGeom>
+          <a:noFill/>
+        </p:spPr>
+        <p:txBody>
+          <a:bodyPr wrap="square" lIns="0" tIns="0" rIns="0" bIns="0" rtlCol="0" anchor="t"/>
+          <a:lstStyle/>
+          <a:p>
+            <a:pPr marL="0" indent="0" algn="l">
+              <a:lnSpc>
+                <a:spcPts val="1400"/>
+              </a:lnSpc>
+              <a:spcAft>
+                <a:spcPts val="400"/>
+              </a:spcAft>
+              <a:buNone/>
+            </a:pPr>
+            <a:r>
+              <a:rPr lang="en-US" sz="1000" b="1" dirty="0">
+                <a:solidFill>
+                  <a:srgbClr val="1B2A4A"/>
+                </a:solidFill>
+                <a:latin typeface="Arial" panose="020B0604020202090204" pitchFamily="34" charset="0"/>
+                <a:ea typeface="Arial" panose="020B0604020202090204" pitchFamily="34" charset="-122"/>
+                <a:cs typeface="Arial" panose="020B0604020202090204" pitchFamily="34" charset="-120"/>
+              </a:rPr>
+              <a:t>350 PubMed articles from 7 targeted queries</a:t>
+            </a:r>
+            <a:endParaRPr lang="en-US" sz="1000" dirty="0"/>
+          </a:p>
+        </p:txBody>
+      </p:sp>
+      <p:sp>
+        <p:nvSpPr>
+          <p:cNvPr id="27" name="Text 25"/>
+          <p:cNvSpPr/>
+          <p:nvPr/>
+        </p:nvSpPr>
+        <p:spPr>
+          <a:xfrm>
+            <a:off x="4953000" y="3490000"/>
+            <a:ext cx="3600000" cy="860000"/>
+          </a:xfrm>
+          <a:prstGeom prst="rect">
+            <a:avLst/>
+          </a:prstGeom>
+          <a:noFill/>
+        </p:spPr>
+        <p:txBody>
+          <a:bodyPr wrap="square" lIns="0" tIns="0" rIns="0" bIns="0" rtlCol="0" anchor="t"/>
+          <a:lstStyle/>
+          <a:p>
+            <a:pPr marL="0" indent="0" algn="l">
+              <a:lnSpc>
+                <a:spcPts val="1000"/>
+              </a:lnSpc>
+              <a:spcAft>
+                <a:spcPts val="400"/>
+              </a:spcAft>
+              <a:buNone/>
+            </a:pPr>
+            <a:r>
+              <a:rPr lang="en-US" sz="780" dirty="0">
+                <a:solidFill>
+                  <a:srgbClr val="2C3E50"/>
+                </a:solidFill>
+                <a:latin typeface="Arial" panose="020B0604020202090204" pitchFamily="34" charset="0"/>
+                <a:ea typeface="Arial" panose="020B0604020202090204" pitchFamily="34" charset="-122"/>
+                <a:cs typeface="Arial" panose="020B0604020202090204" pitchFamily="34" charset="-120"/>
+              </a:rPr>
+              <a:t>• Emergent properties in molecular/cellular biology (59 articles)
+• Mesoscale biology &amp; biomolecular organization (49)
+• Biomolecular condensates &amp; phase separation (49)
+• Multi-omics data integration (50)
+• AI/ML in molecular &amp; cellular biology (59)
+• Systems biology &amp; network analysis (44)
+• Protein self-assembly &amp; supramolecular organization (40)
+Mean abstract length: 1,351 characters. Embedded with BioLinkBERT using same pipeline as proposals.</a:t>
+            </a:r>
+            <a:endParaRPr lang="en-US" sz="780" dirty="0"/>
+          </a:p>
+        </p:txBody>
+      </p:sp>
+    </p:spTree>
+  </p:cSld>
+  <p:clrMapOvr>
+    <a:masterClrMapping/>
+  </p:clrMapOvr>
+</p:sld>
+</file>
+
 <file path=ppt/slides/slide2.xml><?xml version="1.0" encoding="utf-8"?>
 <p:sld xmlns:a="http://schemas.openxmlformats.org/drawingml/2006/main" xmlns:r="http://schemas.openxmlformats.org/officeDocument/2006/relationships" xmlns:p="http://schemas.openxmlformats.org/presentationml/2006/main">
   <p:cSld>
@@ -4192,7 +10193,7 @@
                 <a:ea typeface="Arial" panose="020B0604020202090204" pitchFamily="34" charset="-122"/>
                 <a:cs typeface="Arial" panose="020B0604020202090204" pitchFamily="34" charset="-120"/>
               </a:rPr>
-              <a:t>Do AI-generated research proposals exhibit less diversity than human-written proposals when responding to the same funding call?</a:t>
+              <a:t>How do AI-generated research proposals compare to human-written proposals in diversity, novelty, and thematic content when responding to the same funding call?</a:t>
             </a:r>
             <a:endParaRPr lang="en-US" sz="1050" dirty="0"/>
           </a:p>
@@ -4236,7 +10237,7 @@
                 <a:ea typeface="Arial" panose="020B0604020202090204" pitchFamily="34" charset="-122"/>
                 <a:cs typeface="Arial" panose="020B0604020202090204" pitchFamily="34" charset="-120"/>
               </a:rPr>
-              <a:t>We compare proposals written by humans and three frontier AI models for the NSF NCEMS call on emergence in molecular and cellular biosciences.</a:t>
+              <a:t>We compare 23 human proposals and 69 AI proposals (from three frontier models) for the NSF NCEMS call, using embedding-based analyses across three dimensions: internal diversity, novelty relative to published literature, and thematic/cluster composition.</a:t>
             </a:r>
             <a:endParaRPr lang="en-US" sz="1050" dirty="0"/>
           </a:p>
@@ -5181,7 +11182,7 @@
                 <a:ea typeface="Arial" panose="020B0604020202090204" pitchFamily="34" charset="-122"/>
                 <a:cs typeface="Arial" panose="020B0604020202090204" pitchFamily="34" charset="-120"/>
               </a:rPr>
-              <a:t>All models received the same funding call, background literature, and evaluation criteria that the human applicants had.</a:t>
+              <a:t>All models received the same funding call and evaluation criteria. All analyses use BioLinkBERT embeddings with non-parametric statistical tests.</a:t>
             </a:r>
             <a:endParaRPr lang="en-US" sz="1050" dirty="0"/>
           </a:p>
@@ -5225,7 +11226,7 @@
                 <a:ea typeface="Arial" panose="020B0604020202090204" pitchFamily="34" charset="-122"/>
                 <a:cs typeface="Arial" panose="020B0604020202090204" pitchFamily="34" charset="-120"/>
               </a:rPr>
-              <a:t>Diversity is measured via three complementary embedding-space analyses with non-parametric statistical tests.</a:t>
+              <a:t>Analysis spans three parts: (1) within-group diversity via pairwise, centroid, and nearest-neighbor metrics; (2) novelty via distance to a PubMed literature corpus; (3) thematic separation via topic modeling and cluster analysis.</a:t>
             </a:r>
             <a:endParaRPr lang="en-US" sz="1050" dirty="0"/>
           </a:p>
@@ -5339,8 +11340,8 @@
         </p:nvSpPr>
         <p:spPr>
           <a:xfrm>
-            <a:off x="507950" y="828377"/>
-            <a:ext cx="4417365" cy="171450"/>
+            <a:off x="507950" y="853827"/>
+            <a:ext cx="3951021" cy="200025"/>
           </a:xfrm>
           <a:prstGeom prst="rect">
             <a:avLst/>
@@ -5352,13 +11353,16 @@
           <a:lstStyle/>
           <a:p>
             <a:pPr marL="0" indent="0" algn="l">
+              <a:lnSpc>
+                <a:spcPts val="1285"/>
+              </a:lnSpc>
               <a:spcAft>
                 <a:spcPts val="400"/>
               </a:spcAft>
               <a:buNone/>
             </a:pPr>
             <a:r>
-              <a:rPr lang="en-US" sz="1200" b="1" dirty="0">
+              <a:rPr lang="en-US" sz="1300" b="1" dirty="0">
                 <a:solidFill>
                   <a:srgbClr val="1B2A4A"/>
                 </a:solidFill>
@@ -5368,7 +11372,7 @@
               </a:rPr>
               <a:t>Embedding Pipeline</a:t>
             </a:r>
-            <a:endParaRPr lang="en-US" sz="1200" dirty="0"/>
+            <a:endParaRPr lang="en-US" sz="1300" dirty="0"/>
           </a:p>
         </p:txBody>
       </p:sp>
@@ -5380,7 +11384,320 @@
         </p:nvSpPr>
         <p:spPr>
           <a:xfrm>
-            <a:off x="507950" y="1050578"/>
+            <a:off x="507950" y="1100000"/>
+            <a:ext cx="507950" cy="25301"/>
+          </a:xfrm>
+          <a:prstGeom prst="rect">
+            <a:avLst/>
+          </a:prstGeom>
+          <a:solidFill>
+            <a:srgbClr val="E8505B"/>
+          </a:solidFill>
+        </p:spPr>
+        <p:txBody>
+          <a:bodyPr wrap="square" rtlCol="0" anchor="ctr"/>
+          <a:lstStyle/>
+          <a:p>
+            <a:pPr marL="0" indent="0">
+              <a:buNone/>
+            </a:pPr>
+            <a:endParaRPr lang="en-US" dirty="0"/>
+          </a:p>
+        </p:txBody>
+      </p:sp>
+      <p:sp>
+        <p:nvSpPr>
+          <p:cNvPr id="6" name="Text 4"/>
+          <p:cNvSpPr/>
+          <p:nvPr/>
+        </p:nvSpPr>
+        <p:spPr>
+          <a:xfrm>
+            <a:off x="507950" y="1180000"/>
+            <a:ext cx="3951021" cy="340000"/>
+          </a:xfrm>
+          <a:prstGeom prst="roundRect">
+            <a:avLst>
+              <a:gd name="adj" fmla="val 3000"/>
+            </a:avLst>
+          </a:prstGeom>
+          <a:solidFill>
+            <a:srgbClr val="F0F4F8"/>
+          </a:solidFill>
+        </p:spPr>
+        <p:txBody>
+          <a:bodyPr wrap="square" rtlCol="0" anchor="ctr"/>
+          <a:lstStyle/>
+          <a:p>
+            <a:pPr marL="0" indent="0">
+              <a:buNone/>
+            </a:pPr>
+            <a:endParaRPr lang="en-US" dirty="0"/>
+          </a:p>
+        </p:txBody>
+      </p:sp>
+      <p:sp>
+        <p:nvSpPr>
+          <p:cNvPr id="7" name="Shape 5"/>
+          <p:cNvSpPr/>
+          <p:nvPr/>
+        </p:nvSpPr>
+        <p:spPr>
+          <a:xfrm>
+            <a:off x="527000" y="1180000"/>
+            <a:ext cx="0" cy="340000"/>
+          </a:xfrm>
+          <a:prstGeom prst="line">
+            <a:avLst/>
+          </a:prstGeom>
+          <a:noFill/>
+          <a:ln w="38100">
+            <a:solidFill>
+              <a:srgbClr val="2E86AB"/>
+            </a:solidFill>
+            <a:prstDash val="solid"/>
+          </a:ln>
+        </p:spPr>
+      </p:sp>
+      <p:sp>
+        <p:nvSpPr>
+          <p:cNvPr id="8" name="Text 6"/>
+          <p:cNvSpPr/>
+          <p:nvPr/>
+        </p:nvSpPr>
+        <p:spPr>
+          <a:xfrm>
+            <a:off x="698450" y="1200000"/>
+            <a:ext cx="3700000" cy="130000"/>
+          </a:xfrm>
+          <a:prstGeom prst="rect">
+            <a:avLst/>
+          </a:prstGeom>
+          <a:noFill/>
+        </p:spPr>
+        <p:txBody>
+          <a:bodyPr wrap="square" lIns="0" tIns="0" rIns="0" bIns="0" rtlCol="0" anchor="t"/>
+          <a:lstStyle/>
+          <a:p>
+            <a:pPr marL="0" indent="0" algn="l">
+              <a:lnSpc>
+                <a:spcPts val="1400"/>
+              </a:lnSpc>
+              <a:spcAft>
+                <a:spcPts val="400"/>
+              </a:spcAft>
+              <a:buNone/>
+            </a:pPr>
+            <a:r>
+              <a:rPr lang="en-US" sz="1050" b="1" dirty="0">
+                <a:solidFill>
+                  <a:srgbClr val="1B2A4A"/>
+                </a:solidFill>
+                <a:latin typeface="Arial" panose="020B0604020202090204" pitchFamily="34" charset="0"/>
+                <a:ea typeface="Arial" panose="020B0604020202090204" pitchFamily="34" charset="-122"/>
+                <a:cs typeface="Arial" panose="020B0604020202090204" pitchFamily="34" charset="-120"/>
+              </a:rPr>
+              <a:t>BioLinkBERT-large</a:t>
+            </a:r>
+            <a:endParaRPr lang="en-US" sz="1050" dirty="0"/>
+          </a:p>
+        </p:txBody>
+      </p:sp>
+      <p:sp>
+        <p:nvSpPr>
+          <p:cNvPr id="9" name="Text 7"/>
+          <p:cNvSpPr/>
+          <p:nvPr/>
+        </p:nvSpPr>
+        <p:spPr>
+          <a:xfrm>
+            <a:off x="698450" y="1340000"/>
+            <a:ext cx="3700000" cy="150000"/>
+          </a:xfrm>
+          <a:prstGeom prst="rect">
+            <a:avLst/>
+          </a:prstGeom>
+          <a:noFill/>
+        </p:spPr>
+        <p:txBody>
+          <a:bodyPr wrap="square" lIns="0" tIns="0" rIns="0" bIns="0" rtlCol="0" anchor="t"/>
+          <a:lstStyle/>
+          <a:p>
+            <a:pPr marL="0" indent="0" algn="l">
+              <a:lnSpc>
+                <a:spcPts val="1050"/>
+              </a:lnSpc>
+              <a:spcAft>
+                <a:spcPts val="400"/>
+              </a:spcAft>
+              <a:buNone/>
+            </a:pPr>
+            <a:r>
+              <a:rPr lang="en-US" sz="800" dirty="0">
+                <a:solidFill>
+                  <a:srgbClr val="5D6D7E"/>
+                </a:solidFill>
+                <a:latin typeface="Arial" panose="020B0604020202090204" pitchFamily="34" charset="0"/>
+                <a:ea typeface="Arial" panose="020B0604020202090204" pitchFamily="34" charset="-122"/>
+                <a:cs typeface="Arial" panose="020B0604020202090204" pitchFamily="34" charset="-120"/>
+              </a:rPr>
+              <a:t>340M-param biomedical model pretrained on PubMed with citation links. Encodes each proposal as a 1024-dim vector (400-word overlapping chunks, averaged).</a:t>
+            </a:r>
+            <a:endParaRPr lang="en-US" sz="800" dirty="0"/>
+          </a:p>
+        </p:txBody>
+      </p:sp>
+      <p:sp>
+        <p:nvSpPr>
+          <p:cNvPr id="10" name="Text 8"/>
+          <p:cNvSpPr/>
+          <p:nvPr/>
+        </p:nvSpPr>
+        <p:spPr>
+          <a:xfrm>
+            <a:off x="507950" y="1580000"/>
+            <a:ext cx="3951021" cy="240000"/>
+          </a:xfrm>
+          <a:prstGeom prst="roundRect">
+            <a:avLst>
+              <a:gd name="adj" fmla="val 3000"/>
+            </a:avLst>
+          </a:prstGeom>
+          <a:solidFill>
+            <a:srgbClr val="F0F4F8"/>
+          </a:solidFill>
+        </p:spPr>
+        <p:txBody>
+          <a:bodyPr wrap="square" rtlCol="0" anchor="ctr"/>
+          <a:lstStyle/>
+          <a:p>
+            <a:pPr marL="0" indent="0">
+              <a:buNone/>
+            </a:pPr>
+            <a:endParaRPr lang="en-US" dirty="0"/>
+          </a:p>
+        </p:txBody>
+      </p:sp>
+      <p:sp>
+        <p:nvSpPr>
+          <p:cNvPr id="11" name="Shape 9"/>
+          <p:cNvSpPr/>
+          <p:nvPr/>
+        </p:nvSpPr>
+        <p:spPr>
+          <a:xfrm>
+            <a:off x="527000" y="1580000"/>
+            <a:ext cx="0" cy="240000"/>
+          </a:xfrm>
+          <a:prstGeom prst="line">
+            <a:avLst/>
+          </a:prstGeom>
+          <a:noFill/>
+          <a:ln w="38100">
+            <a:solidFill>
+              <a:srgbClr val="2E86AB"/>
+            </a:solidFill>
+            <a:prstDash val="solid"/>
+          </a:ln>
+        </p:spPr>
+      </p:sp>
+      <p:sp>
+        <p:nvSpPr>
+          <p:cNvPr id="12" name="Text 10"/>
+          <p:cNvSpPr/>
+          <p:nvPr/>
+        </p:nvSpPr>
+        <p:spPr>
+          <a:xfrm>
+            <a:off x="698450" y="1600000"/>
+            <a:ext cx="3700000" cy="130000"/>
+          </a:xfrm>
+          <a:prstGeom prst="rect">
+            <a:avLst/>
+          </a:prstGeom>
+          <a:noFill/>
+        </p:spPr>
+        <p:txBody>
+          <a:bodyPr wrap="square" lIns="0" tIns="0" rIns="0" bIns="0" rtlCol="0" anchor="t"/>
+          <a:lstStyle/>
+          <a:p>
+            <a:pPr marL="0" indent="0" algn="l">
+              <a:lnSpc>
+                <a:spcPts val="1050"/>
+              </a:lnSpc>
+              <a:spcAft>
+                <a:spcPts val="400"/>
+              </a:spcAft>
+              <a:buNone/>
+            </a:pPr>
+            <a:r>
+              <a:rPr lang="en-US" sz="800" dirty="0">
+                <a:solidFill>
+                  <a:srgbClr val="5D6D7E"/>
+                </a:solidFill>
+                <a:latin typeface="Arial" panose="020B0604020202090204" pitchFamily="34" charset="0"/>
+                <a:ea typeface="Arial" panose="020B0604020202090204" pitchFamily="34" charset="-122"/>
+                <a:cs typeface="Arial" panose="020B0604020202090204" pitchFamily="34" charset="-120"/>
+              </a:rPr>
+              <a:t>Cosine distance in 1024-dim space for all metrics. Mann-Whitney U, Cliff’s delta, and permutation tests (10K iterations) for all comparisons.</a:t>
+            </a:r>
+            <a:endParaRPr lang="en-US" sz="800" dirty="0"/>
+          </a:p>
+        </p:txBody>
+      </p:sp>
+      <p:sp>
+        <p:nvSpPr>
+          <p:cNvPr id="13" name="Text 11"/>
+          <p:cNvSpPr/>
+          <p:nvPr/>
+        </p:nvSpPr>
+        <p:spPr>
+          <a:xfrm>
+            <a:off x="507950" y="1920000"/>
+            <a:ext cx="3951021" cy="200025"/>
+          </a:xfrm>
+          <a:prstGeom prst="rect">
+            <a:avLst/>
+          </a:prstGeom>
+          <a:noFill/>
+        </p:spPr>
+        <p:txBody>
+          <a:bodyPr wrap="square" lIns="0" tIns="0" rIns="0" bIns="0" rtlCol="0" anchor="t"/>
+          <a:lstStyle/>
+          <a:p>
+            <a:pPr marL="0" indent="0" algn="l">
+              <a:lnSpc>
+                <a:spcPts val="1285"/>
+              </a:lnSpc>
+              <a:spcAft>
+                <a:spcPts val="400"/>
+              </a:spcAft>
+              <a:buNone/>
+            </a:pPr>
+            <a:r>
+              <a:rPr lang="en-US" sz="1300" b="1" dirty="0">
+                <a:solidFill>
+                  <a:srgbClr val="1B2A4A"/>
+                </a:solidFill>
+                <a:latin typeface="Arial" panose="020B0604020202090204" pitchFamily="34" charset="0"/>
+                <a:ea typeface="Arial" panose="020B0604020202090204" pitchFamily="34" charset="-122"/>
+                <a:cs typeface="Arial" panose="020B0604020202090204" pitchFamily="34" charset="-120"/>
+              </a:rPr>
+              <a:t>Key Metric Definitions</a:t>
+            </a:r>
+            <a:endParaRPr lang="en-US" sz="1300" dirty="0"/>
+          </a:p>
+        </p:txBody>
+      </p:sp>
+      <p:sp>
+        <p:nvSpPr>
+          <p:cNvPr id="14" name="Text 12"/>
+          <p:cNvSpPr/>
+          <p:nvPr/>
+        </p:nvSpPr>
+        <p:spPr>
+          <a:xfrm>
+            <a:off x="507950" y="2170000"/>
             <a:ext cx="507950" cy="25301"/>
           </a:xfrm>
           <a:prstGeom prst="rect">
@@ -5403,739 +11720,19 @@
       </p:sp>
       <p:sp>
         <p:nvSpPr>
-          <p:cNvPr id="6" name="Text 4"/>
-          <p:cNvSpPr/>
-          <p:nvPr/>
-        </p:nvSpPr>
-        <p:spPr>
-          <a:xfrm>
-            <a:off x="507950" y="1190179"/>
-            <a:ext cx="4330750" cy="549176"/>
+          <p:cNvPr id="15" name="Text 13"/>
+          <p:cNvSpPr/>
+          <p:nvPr/>
+        </p:nvSpPr>
+        <p:spPr>
+          <a:xfrm>
+            <a:off x="507950" y="2260000"/>
+            <a:ext cx="3951021" cy="580000"/>
           </a:xfrm>
           <a:prstGeom prst="roundRect">
             <a:avLst>
-              <a:gd name="adj" fmla="val 6938"/>
+              <a:gd name="adj" fmla="val 3000"/>
             </a:avLst>
-          </a:prstGeom>
-          <a:solidFill>
-            <a:srgbClr val="F0F4F8"/>
-          </a:solidFill>
-        </p:spPr>
-        <p:txBody>
-          <a:bodyPr wrap="square" rtlCol="0" anchor="ctr"/>
-          <a:lstStyle/>
-          <a:p>
-            <a:pPr marL="0" indent="0">
-              <a:buNone/>
-            </a:pPr>
-            <a:endParaRPr lang="en-US" dirty="0"/>
-          </a:p>
-        </p:txBody>
-      </p:sp>
-      <p:sp>
-        <p:nvSpPr>
-          <p:cNvPr id="7" name="Text 5"/>
-          <p:cNvSpPr/>
-          <p:nvPr/>
-        </p:nvSpPr>
-        <p:spPr>
-          <a:xfrm>
-            <a:off x="609451" y="1253579"/>
-            <a:ext cx="4210303" cy="150763"/>
-          </a:xfrm>
-          <a:prstGeom prst="rect">
-            <a:avLst/>
-          </a:prstGeom>
-          <a:noFill/>
-        </p:spPr>
-        <p:txBody>
-          <a:bodyPr wrap="square" lIns="0" tIns="0" rIns="0" bIns="0" rtlCol="0" anchor="t"/>
-          <a:lstStyle/>
-          <a:p>
-            <a:pPr marL="0" indent="0" algn="l">
-              <a:lnSpc>
-                <a:spcPts val="1185"/>
-              </a:lnSpc>
-              <a:spcAft>
-                <a:spcPts val="100"/>
-              </a:spcAft>
-              <a:buNone/>
-            </a:pPr>
-            <a:r>
-              <a:rPr lang="en-US" sz="950" b="1" dirty="0">
-                <a:solidFill>
-                  <a:srgbClr val="1B2A4A"/>
-                </a:solidFill>
-                <a:latin typeface="Arial" panose="020B0604020202090204" pitchFamily="34" charset="0"/>
-                <a:ea typeface="Arial" panose="020B0604020202090204" pitchFamily="34" charset="-122"/>
-                <a:cs typeface="Arial" panose="020B0604020202090204" pitchFamily="34" charset="-120"/>
-              </a:rPr>
-              <a:t>1. BioLinkBERT-large</a:t>
-            </a:r>
-            <a:endParaRPr lang="en-US" sz="950" dirty="0"/>
-          </a:p>
-        </p:txBody>
-      </p:sp>
-      <p:sp>
-        <p:nvSpPr>
-          <p:cNvPr id="8" name="Text 6"/>
-          <p:cNvSpPr/>
-          <p:nvPr/>
-        </p:nvSpPr>
-        <p:spPr>
-          <a:xfrm>
-            <a:off x="609451" y="1416993"/>
-            <a:ext cx="4210303" cy="258961"/>
-          </a:xfrm>
-          <a:prstGeom prst="rect">
-            <a:avLst/>
-          </a:prstGeom>
-          <a:noFill/>
-        </p:spPr>
-        <p:txBody>
-          <a:bodyPr wrap="square" lIns="0" tIns="0" rIns="0" bIns="0" rtlCol="0" anchor="t"/>
-          <a:lstStyle/>
-          <a:p>
-            <a:pPr marL="0" indent="0" algn="l">
-              <a:lnSpc>
-                <a:spcPts val="1020"/>
-              </a:lnSpc>
-              <a:buNone/>
-            </a:pPr>
-            <a:r>
-              <a:rPr lang="en-US" sz="850" dirty="0">
-                <a:solidFill>
-                  <a:srgbClr val="5D6D7E"/>
-                </a:solidFill>
-                <a:latin typeface="Arial" panose="020B0604020202090204" pitchFamily="34" charset="0"/>
-                <a:ea typeface="Arial" panose="020B0604020202090204" pitchFamily="34" charset="-122"/>
-                <a:cs typeface="Arial" panose="020B0604020202090204" pitchFamily="34" charset="-120"/>
-              </a:rPr>
-              <a:t>340M param biomedical model pretrained on PubMed with citation links. SOTA on biomedical NLP.</a:t>
-            </a:r>
-            <a:endParaRPr lang="en-US" sz="850" dirty="0"/>
-          </a:p>
-        </p:txBody>
-      </p:sp>
-      <p:sp>
-        <p:nvSpPr>
-          <p:cNvPr id="9" name="Text 7"/>
-          <p:cNvSpPr/>
-          <p:nvPr/>
-        </p:nvSpPr>
-        <p:spPr>
-          <a:xfrm>
-            <a:off x="507950" y="1815554"/>
-            <a:ext cx="4330750" cy="549176"/>
-          </a:xfrm>
-          <a:prstGeom prst="roundRect">
-            <a:avLst>
-              <a:gd name="adj" fmla="val 6938"/>
-            </a:avLst>
-          </a:prstGeom>
-          <a:solidFill>
-            <a:srgbClr val="F0F4F8"/>
-          </a:solidFill>
-        </p:spPr>
-        <p:txBody>
-          <a:bodyPr wrap="square" rtlCol="0" anchor="ctr"/>
-          <a:lstStyle/>
-          <a:p>
-            <a:pPr marL="0" indent="0">
-              <a:buNone/>
-            </a:pPr>
-            <a:endParaRPr lang="en-US" dirty="0"/>
-          </a:p>
-        </p:txBody>
-      </p:sp>
-      <p:sp>
-        <p:nvSpPr>
-          <p:cNvPr id="10" name="Text 8"/>
-          <p:cNvSpPr/>
-          <p:nvPr/>
-        </p:nvSpPr>
-        <p:spPr>
-          <a:xfrm>
-            <a:off x="609451" y="1878955"/>
-            <a:ext cx="4210303" cy="150763"/>
-          </a:xfrm>
-          <a:prstGeom prst="rect">
-            <a:avLst/>
-          </a:prstGeom>
-          <a:noFill/>
-        </p:spPr>
-        <p:txBody>
-          <a:bodyPr wrap="square" lIns="0" tIns="0" rIns="0" bIns="0" rtlCol="0" anchor="t"/>
-          <a:lstStyle/>
-          <a:p>
-            <a:pPr marL="0" indent="0" algn="l">
-              <a:lnSpc>
-                <a:spcPts val="1185"/>
-              </a:lnSpc>
-              <a:spcAft>
-                <a:spcPts val="100"/>
-              </a:spcAft>
-              <a:buNone/>
-            </a:pPr>
-            <a:r>
-              <a:rPr lang="en-US" sz="950" b="1" dirty="0">
-                <a:solidFill>
-                  <a:srgbClr val="1B2A4A"/>
-                </a:solidFill>
-                <a:latin typeface="Arial" panose="020B0604020202090204" pitchFamily="34" charset="0"/>
-                <a:ea typeface="Arial" panose="020B0604020202090204" pitchFamily="34" charset="-122"/>
-                <a:cs typeface="Arial" panose="020B0604020202090204" pitchFamily="34" charset="-120"/>
-              </a:rPr>
-              <a:t>2. Overlapping Chunk Averaging</a:t>
-            </a:r>
-            <a:endParaRPr lang="en-US" sz="950" dirty="0"/>
-          </a:p>
-        </p:txBody>
-      </p:sp>
-      <p:sp>
-        <p:nvSpPr>
-          <p:cNvPr id="11" name="Text 9"/>
-          <p:cNvSpPr/>
-          <p:nvPr/>
-        </p:nvSpPr>
-        <p:spPr>
-          <a:xfrm>
-            <a:off x="609451" y="2042368"/>
-            <a:ext cx="4210303" cy="258961"/>
-          </a:xfrm>
-          <a:prstGeom prst="rect">
-            <a:avLst/>
-          </a:prstGeom>
-          <a:noFill/>
-        </p:spPr>
-        <p:txBody>
-          <a:bodyPr wrap="square" lIns="0" tIns="0" rIns="0" bIns="0" rtlCol="0" anchor="t"/>
-          <a:lstStyle/>
-          <a:p>
-            <a:pPr marL="0" indent="0" algn="l">
-              <a:lnSpc>
-                <a:spcPts val="1020"/>
-              </a:lnSpc>
-              <a:buNone/>
-            </a:pPr>
-            <a:r>
-              <a:rPr lang="en-US" sz="850" dirty="0">
-                <a:solidFill>
-                  <a:srgbClr val="5D6D7E"/>
-                </a:solidFill>
-                <a:latin typeface="Arial" panose="020B0604020202090204" pitchFamily="34" charset="0"/>
-                <a:ea typeface="Arial" panose="020B0604020202090204" pitchFamily="34" charset="-122"/>
-                <a:cs typeface="Arial" panose="020B0604020202090204" pitchFamily="34" charset="-120"/>
-              </a:rPr>
-              <a:t>400-word chunks, 50-word overlap. Averaged to one 1024-dim vector per proposal. Uses 100% of text.</a:t>
-            </a:r>
-            <a:endParaRPr lang="en-US" sz="850" dirty="0"/>
-          </a:p>
-        </p:txBody>
-      </p:sp>
-      <p:sp>
-        <p:nvSpPr>
-          <p:cNvPr id="12" name="Text 10"/>
-          <p:cNvSpPr/>
-          <p:nvPr/>
-        </p:nvSpPr>
-        <p:spPr>
-          <a:xfrm>
-            <a:off x="507950" y="2440930"/>
-            <a:ext cx="4330750" cy="419695"/>
-          </a:xfrm>
-          <a:prstGeom prst="roundRect">
-            <a:avLst>
-              <a:gd name="adj" fmla="val 9078"/>
-            </a:avLst>
-          </a:prstGeom>
-          <a:solidFill>
-            <a:srgbClr val="F0F4F8"/>
-          </a:solidFill>
-        </p:spPr>
-        <p:txBody>
-          <a:bodyPr wrap="square" rtlCol="0" anchor="ctr"/>
-          <a:lstStyle/>
-          <a:p>
-            <a:pPr marL="0" indent="0">
-              <a:buNone/>
-            </a:pPr>
-            <a:endParaRPr lang="en-US" dirty="0"/>
-          </a:p>
-        </p:txBody>
-      </p:sp>
-      <p:sp>
-        <p:nvSpPr>
-          <p:cNvPr id="13" name="Text 11"/>
-          <p:cNvSpPr/>
-          <p:nvPr/>
-        </p:nvSpPr>
-        <p:spPr>
-          <a:xfrm>
-            <a:off x="609451" y="2504331"/>
-            <a:ext cx="4210303" cy="150763"/>
-          </a:xfrm>
-          <a:prstGeom prst="rect">
-            <a:avLst/>
-          </a:prstGeom>
-          <a:noFill/>
-        </p:spPr>
-        <p:txBody>
-          <a:bodyPr wrap="square" lIns="0" tIns="0" rIns="0" bIns="0" rtlCol="0" anchor="t"/>
-          <a:lstStyle/>
-          <a:p>
-            <a:pPr marL="0" indent="0" algn="l">
-              <a:lnSpc>
-                <a:spcPts val="1185"/>
-              </a:lnSpc>
-              <a:spcAft>
-                <a:spcPts val="100"/>
-              </a:spcAft>
-              <a:buNone/>
-            </a:pPr>
-            <a:r>
-              <a:rPr lang="en-US" sz="950" b="1" dirty="0">
-                <a:solidFill>
-                  <a:srgbClr val="1B2A4A"/>
-                </a:solidFill>
-                <a:latin typeface="Arial" panose="020B0604020202090204" pitchFamily="34" charset="0"/>
-                <a:ea typeface="Arial" panose="020B0604020202090204" pitchFamily="34" charset="-122"/>
-                <a:cs typeface="Arial" panose="020B0604020202090204" pitchFamily="34" charset="-120"/>
-              </a:rPr>
-              <a:t>3. Cosine Distance</a:t>
-            </a:r>
-            <a:endParaRPr lang="en-US" sz="950" dirty="0"/>
-          </a:p>
-        </p:txBody>
-      </p:sp>
-      <p:sp>
-        <p:nvSpPr>
-          <p:cNvPr id="14" name="Text 12"/>
-          <p:cNvSpPr/>
-          <p:nvPr/>
-        </p:nvSpPr>
-        <p:spPr>
-          <a:xfrm>
-            <a:off x="609451" y="2667744"/>
-            <a:ext cx="4210303" cy="129480"/>
-          </a:xfrm>
-          <a:prstGeom prst="rect">
-            <a:avLst/>
-          </a:prstGeom>
-          <a:noFill/>
-        </p:spPr>
-        <p:txBody>
-          <a:bodyPr wrap="square" lIns="0" tIns="0" rIns="0" bIns="0" rtlCol="0" anchor="t"/>
-          <a:lstStyle/>
-          <a:p>
-            <a:pPr marL="0" indent="0" algn="l">
-              <a:lnSpc>
-                <a:spcPts val="1020"/>
-              </a:lnSpc>
-              <a:buNone/>
-            </a:pPr>
-            <a:r>
-              <a:rPr lang="en-US" sz="850" dirty="0">
-                <a:solidFill>
-                  <a:srgbClr val="5D6D7E"/>
-                </a:solidFill>
-                <a:latin typeface="Arial" panose="020B0604020202090204" pitchFamily="34" charset="0"/>
-                <a:ea typeface="Arial" panose="020B0604020202090204" pitchFamily="34" charset="-122"/>
-                <a:cs typeface="Arial" panose="020B0604020202090204" pitchFamily="34" charset="-120"/>
-              </a:rPr>
-              <a:t>All diversity metrics computed as cosine distance in 1024-dim embedding space.</a:t>
-            </a:r>
-            <a:endParaRPr lang="en-US" sz="850" dirty="0"/>
-          </a:p>
-        </p:txBody>
-      </p:sp>
-      <p:sp>
-        <p:nvSpPr>
-          <p:cNvPr id="15" name="Text 13"/>
-          <p:cNvSpPr/>
-          <p:nvPr/>
-        </p:nvSpPr>
-        <p:spPr>
-          <a:xfrm>
-            <a:off x="507950" y="3000226"/>
-            <a:ext cx="4417365" cy="171450"/>
-          </a:xfrm>
-          <a:prstGeom prst="rect">
-            <a:avLst/>
-          </a:prstGeom>
-          <a:noFill/>
-        </p:spPr>
-        <p:txBody>
-          <a:bodyPr wrap="square" lIns="0" tIns="0" rIns="0" bIns="0" rtlCol="0" anchor="t"/>
-          <a:lstStyle/>
-          <a:p>
-            <a:pPr marL="0" indent="0" algn="l">
-              <a:spcBef>
-                <a:spcPts val="800"/>
-              </a:spcBef>
-              <a:spcAft>
-                <a:spcPts val="400"/>
-              </a:spcAft>
-              <a:buNone/>
-            </a:pPr>
-            <a:r>
-              <a:rPr lang="en-US" sz="1200" b="1" dirty="0">
-                <a:solidFill>
-                  <a:srgbClr val="1B2A4A"/>
-                </a:solidFill>
-                <a:latin typeface="Arial" panose="020B0604020202090204" pitchFamily="34" charset="0"/>
-                <a:ea typeface="Arial" panose="020B0604020202090204" pitchFamily="34" charset="-122"/>
-                <a:cs typeface="Arial" panose="020B0604020202090204" pitchFamily="34" charset="-120"/>
-              </a:rPr>
-              <a:t>Statistical Tests</a:t>
-            </a:r>
-            <a:endParaRPr lang="en-US" sz="1200" dirty="0"/>
-          </a:p>
-        </p:txBody>
-      </p:sp>
-      <p:sp>
-        <p:nvSpPr>
-          <p:cNvPr id="16" name="Text 14"/>
-          <p:cNvSpPr/>
-          <p:nvPr/>
-        </p:nvSpPr>
-        <p:spPr>
-          <a:xfrm>
-            <a:off x="507950" y="3222427"/>
-            <a:ext cx="507950" cy="25301"/>
-          </a:xfrm>
-          <a:prstGeom prst="rect">
-            <a:avLst/>
-          </a:prstGeom>
-          <a:solidFill>
-            <a:srgbClr val="2E86AB"/>
-          </a:solidFill>
-        </p:spPr>
-        <p:txBody>
-          <a:bodyPr wrap="square" rtlCol="0" anchor="ctr"/>
-          <a:lstStyle/>
-          <a:p>
-            <a:pPr marL="0" indent="0">
-              <a:buNone/>
-            </a:pPr>
-            <a:endParaRPr lang="en-US" dirty="0"/>
-          </a:p>
-        </p:txBody>
-      </p:sp>
-      <p:sp>
-        <p:nvSpPr>
-          <p:cNvPr id="17" name="Text 15"/>
-          <p:cNvSpPr/>
-          <p:nvPr/>
-        </p:nvSpPr>
-        <p:spPr>
-          <a:xfrm>
-            <a:off x="507950" y="3336578"/>
-            <a:ext cx="927646" cy="222200"/>
-          </a:xfrm>
-          <a:prstGeom prst="roundRect">
-            <a:avLst>
-              <a:gd name="adj" fmla="val 17147"/>
-            </a:avLst>
-          </a:prstGeom>
-          <a:solidFill>
-            <a:srgbClr val="E8F4F8"/>
-          </a:solidFill>
-          <a:ln w="9525">
-            <a:solidFill>
-              <a:srgbClr val="2E86AB"/>
-            </a:solidFill>
-          </a:ln>
-        </p:spPr>
-        <p:txBody>
-          <a:bodyPr wrap="square" rtlCol="0" anchor="ctr"/>
-          <a:lstStyle/>
-          <a:p>
-            <a:pPr marL="0" indent="0">
-              <a:buNone/>
-            </a:pPr>
-            <a:endParaRPr lang="en-US" dirty="0"/>
-          </a:p>
-        </p:txBody>
-      </p:sp>
-      <p:sp>
-        <p:nvSpPr>
-          <p:cNvPr id="18" name="Text 16"/>
-          <p:cNvSpPr/>
-          <p:nvPr/>
-        </p:nvSpPr>
-        <p:spPr>
-          <a:xfrm>
-            <a:off x="593675" y="3384203"/>
-            <a:ext cx="771320" cy="126950"/>
-          </a:xfrm>
-          <a:prstGeom prst="rect">
-            <a:avLst/>
-          </a:prstGeom>
-          <a:noFill/>
-        </p:spPr>
-        <p:txBody>
-          <a:bodyPr wrap="square" lIns="0" tIns="0" rIns="0" bIns="0" rtlCol="0" anchor="t"/>
-          <a:lstStyle/>
-          <a:p>
-            <a:pPr marL="0" indent="0" algn="l">
-              <a:lnSpc>
-                <a:spcPts val="1000"/>
-              </a:lnSpc>
-              <a:buNone/>
-            </a:pPr>
-            <a:r>
-              <a:rPr lang="en-US" sz="800" dirty="0">
-                <a:solidFill>
-                  <a:srgbClr val="1B2A4A"/>
-                </a:solidFill>
-                <a:latin typeface="Arial" panose="020B0604020202090204" pitchFamily="34" charset="0"/>
-                <a:ea typeface="Arial" panose="020B0604020202090204" pitchFamily="34" charset="-122"/>
-                <a:cs typeface="Arial" panose="020B0604020202090204" pitchFamily="34" charset="-120"/>
-              </a:rPr>
-              <a:t>Mann-Whitney U</a:t>
-            </a:r>
-            <a:endParaRPr lang="en-US" sz="800" dirty="0"/>
-          </a:p>
-        </p:txBody>
-      </p:sp>
-      <p:sp>
-        <p:nvSpPr>
-          <p:cNvPr id="19" name="Text 17"/>
-          <p:cNvSpPr/>
-          <p:nvPr/>
-        </p:nvSpPr>
-        <p:spPr>
-          <a:xfrm>
-            <a:off x="1473696" y="3336578"/>
-            <a:ext cx="679996" cy="222200"/>
-          </a:xfrm>
-          <a:prstGeom prst="roundRect">
-            <a:avLst>
-              <a:gd name="adj" fmla="val 17147"/>
-            </a:avLst>
-          </a:prstGeom>
-          <a:solidFill>
-            <a:srgbClr val="E8F4F8"/>
-          </a:solidFill>
-          <a:ln w="9525">
-            <a:solidFill>
-              <a:srgbClr val="2E86AB"/>
-            </a:solidFill>
-          </a:ln>
-        </p:spPr>
-        <p:txBody>
-          <a:bodyPr wrap="square" rtlCol="0" anchor="ctr"/>
-          <a:lstStyle/>
-          <a:p>
-            <a:pPr marL="0" indent="0">
-              <a:buNone/>
-            </a:pPr>
-            <a:endParaRPr lang="en-US" dirty="0"/>
-          </a:p>
-        </p:txBody>
-      </p:sp>
-      <p:sp>
-        <p:nvSpPr>
-          <p:cNvPr id="20" name="Text 18"/>
-          <p:cNvSpPr/>
-          <p:nvPr/>
-        </p:nvSpPr>
-        <p:spPr>
-          <a:xfrm>
-            <a:off x="1559421" y="3384203"/>
-            <a:ext cx="518717" cy="126950"/>
-          </a:xfrm>
-          <a:prstGeom prst="rect">
-            <a:avLst/>
-          </a:prstGeom>
-          <a:noFill/>
-        </p:spPr>
-        <p:txBody>
-          <a:bodyPr wrap="square" lIns="0" tIns="0" rIns="0" bIns="0" rtlCol="0" anchor="t"/>
-          <a:lstStyle/>
-          <a:p>
-            <a:pPr marL="0" indent="0" algn="l">
-              <a:lnSpc>
-                <a:spcPts val="1000"/>
-              </a:lnSpc>
-              <a:buNone/>
-            </a:pPr>
-            <a:r>
-              <a:rPr lang="en-US" sz="800" dirty="0">
-                <a:solidFill>
-                  <a:srgbClr val="1B2A4A"/>
-                </a:solidFill>
-                <a:latin typeface="Arial" panose="020B0604020202090204" pitchFamily="34" charset="0"/>
-                <a:ea typeface="Arial" panose="020B0604020202090204" pitchFamily="34" charset="-122"/>
-                <a:cs typeface="Arial" panose="020B0604020202090204" pitchFamily="34" charset="-120"/>
-              </a:rPr>
-              <a:t>Cliff's Delta</a:t>
-            </a:r>
-            <a:endParaRPr lang="en-US" sz="800" dirty="0"/>
-          </a:p>
-        </p:txBody>
-      </p:sp>
-      <p:sp>
-        <p:nvSpPr>
-          <p:cNvPr id="21" name="Text 19"/>
-          <p:cNvSpPr/>
-          <p:nvPr/>
-        </p:nvSpPr>
-        <p:spPr>
-          <a:xfrm>
-            <a:off x="2191792" y="3336578"/>
-            <a:ext cx="995511" cy="222200"/>
-          </a:xfrm>
-          <a:prstGeom prst="roundRect">
-            <a:avLst>
-              <a:gd name="adj" fmla="val 17147"/>
-            </a:avLst>
-          </a:prstGeom>
-          <a:solidFill>
-            <a:srgbClr val="E8F4F8"/>
-          </a:solidFill>
-          <a:ln w="9525">
-            <a:solidFill>
-              <a:srgbClr val="2E86AB"/>
-            </a:solidFill>
-          </a:ln>
-        </p:spPr>
-        <p:txBody>
-          <a:bodyPr wrap="square" rtlCol="0" anchor="ctr"/>
-          <a:lstStyle/>
-          <a:p>
-            <a:pPr marL="0" indent="0">
-              <a:buNone/>
-            </a:pPr>
-            <a:endParaRPr lang="en-US" dirty="0"/>
-          </a:p>
-        </p:txBody>
-      </p:sp>
-      <p:sp>
-        <p:nvSpPr>
-          <p:cNvPr id="22" name="Text 20"/>
-          <p:cNvSpPr/>
-          <p:nvPr/>
-        </p:nvSpPr>
-        <p:spPr>
-          <a:xfrm>
-            <a:off x="2277517" y="3384203"/>
-            <a:ext cx="840543" cy="126950"/>
-          </a:xfrm>
-          <a:prstGeom prst="rect">
-            <a:avLst/>
-          </a:prstGeom>
-          <a:noFill/>
-        </p:spPr>
-        <p:txBody>
-          <a:bodyPr wrap="square" lIns="0" tIns="0" rIns="0" bIns="0" rtlCol="0" anchor="t"/>
-          <a:lstStyle/>
-          <a:p>
-            <a:pPr marL="0" indent="0" algn="l">
-              <a:lnSpc>
-                <a:spcPts val="1000"/>
-              </a:lnSpc>
-              <a:buNone/>
-            </a:pPr>
-            <a:r>
-              <a:rPr lang="en-US" sz="800" dirty="0">
-                <a:solidFill>
-                  <a:srgbClr val="1B2A4A"/>
-                </a:solidFill>
-                <a:latin typeface="Arial" panose="020B0604020202090204" pitchFamily="34" charset="0"/>
-                <a:ea typeface="Arial" panose="020B0604020202090204" pitchFamily="34" charset="-122"/>
-                <a:cs typeface="Arial" panose="020B0604020202090204" pitchFamily="34" charset="-120"/>
-              </a:rPr>
-              <a:t>Permutation (10K)</a:t>
-            </a:r>
-            <a:endParaRPr lang="en-US" sz="800" dirty="0"/>
-          </a:p>
-        </p:txBody>
-      </p:sp>
-      <p:sp>
-        <p:nvSpPr>
-          <p:cNvPr id="23" name="Text 21"/>
-          <p:cNvSpPr/>
-          <p:nvPr/>
-        </p:nvSpPr>
-        <p:spPr>
-          <a:xfrm>
-            <a:off x="5092601" y="828377"/>
-            <a:ext cx="3614318" cy="171450"/>
-          </a:xfrm>
-          <a:prstGeom prst="rect">
-            <a:avLst/>
-          </a:prstGeom>
-          <a:noFill/>
-        </p:spPr>
-        <p:txBody>
-          <a:bodyPr wrap="square" lIns="0" tIns="0" rIns="0" bIns="0" rtlCol="0" anchor="t"/>
-          <a:lstStyle/>
-          <a:p>
-            <a:pPr marL="0" indent="0" algn="l">
-              <a:spcAft>
-                <a:spcPts val="400"/>
-              </a:spcAft>
-              <a:buNone/>
-            </a:pPr>
-            <a:r>
-              <a:rPr lang="en-US" sz="1200" b="1" dirty="0">
-                <a:solidFill>
-                  <a:srgbClr val="1B2A4A"/>
-                </a:solidFill>
-                <a:latin typeface="Arial" panose="020B0604020202090204" pitchFamily="34" charset="0"/>
-                <a:ea typeface="Arial" panose="020B0604020202090204" pitchFamily="34" charset="-122"/>
-                <a:cs typeface="Arial" panose="020B0604020202090204" pitchFamily="34" charset="-120"/>
-              </a:rPr>
-              <a:t>Three Complementary Analyses</a:t>
-            </a:r>
-            <a:endParaRPr lang="en-US" sz="1200" dirty="0"/>
-          </a:p>
-        </p:txBody>
-      </p:sp>
-      <p:sp>
-        <p:nvSpPr>
-          <p:cNvPr id="24" name="Text 22"/>
-          <p:cNvSpPr/>
-          <p:nvPr/>
-        </p:nvSpPr>
-        <p:spPr>
-          <a:xfrm>
-            <a:off x="5092601" y="1050578"/>
-            <a:ext cx="507950" cy="25301"/>
-          </a:xfrm>
-          <a:prstGeom prst="rect">
-            <a:avLst/>
-          </a:prstGeom>
-          <a:solidFill>
-            <a:srgbClr val="E8505B"/>
-          </a:solidFill>
-        </p:spPr>
-        <p:txBody>
-          <a:bodyPr wrap="square" rtlCol="0" anchor="ctr"/>
-          <a:lstStyle/>
-          <a:p>
-            <a:pPr marL="0" indent="0">
-              <a:buNone/>
-            </a:pPr>
-            <a:endParaRPr lang="en-US" dirty="0"/>
-          </a:p>
-        </p:txBody>
-      </p:sp>
-      <p:sp>
-        <p:nvSpPr>
-          <p:cNvPr id="25" name="Text 23"/>
-          <p:cNvSpPr/>
-          <p:nvPr/>
-        </p:nvSpPr>
-        <p:spPr>
-          <a:xfrm>
-            <a:off x="5092601" y="1190179"/>
-            <a:ext cx="3543449" cy="549176"/>
-          </a:xfrm>
-          <a:prstGeom prst="rect">
-            <a:avLst/>
           </a:prstGeom>
           <a:solidFill>
             <a:srgbClr val="FDF8F8"/>
@@ -6154,14 +11751,14 @@
       </p:sp>
       <p:sp>
         <p:nvSpPr>
-          <p:cNvPr id="26" name="Shape 24"/>
-          <p:cNvSpPr/>
-          <p:nvPr/>
-        </p:nvSpPr>
-        <p:spPr>
-          <a:xfrm>
-            <a:off x="5111651" y="1190179"/>
-            <a:ext cx="0" cy="549176"/>
+          <p:cNvPr id="16" name="Shape 14"/>
+          <p:cNvSpPr/>
+          <p:nvPr/>
+        </p:nvSpPr>
+        <p:spPr>
+          <a:xfrm>
+            <a:off x="507950" y="2279050"/>
+            <a:ext cx="3951021" cy="0"/>
           </a:xfrm>
           <a:prstGeom prst="line">
             <a:avLst/>
@@ -6177,14 +11774,14 @@
       </p:sp>
       <p:sp>
         <p:nvSpPr>
-          <p:cNvPr id="27" name="Text 25"/>
-          <p:cNvSpPr/>
-          <p:nvPr/>
-        </p:nvSpPr>
-        <p:spPr>
-          <a:xfrm>
-            <a:off x="5232202" y="1253579"/>
-            <a:ext cx="3368394" cy="150763"/>
+          <p:cNvPr id="17" name="Text 15"/>
+          <p:cNvSpPr/>
+          <p:nvPr/>
+        </p:nvSpPr>
+        <p:spPr>
+          <a:xfrm>
+            <a:off x="660350" y="2310000"/>
+            <a:ext cx="3700000" cy="150000"/>
           </a:xfrm>
           <a:prstGeom prst="rect">
             <a:avLst/>
@@ -6197,38 +11794,38 @@
           <a:p>
             <a:pPr marL="0" indent="0" algn="l">
               <a:lnSpc>
-                <a:spcPts val="1185"/>
+                <a:spcPts val="1400"/>
               </a:lnSpc>
               <a:spcAft>
-                <a:spcPts val="100"/>
+                <a:spcPts val="400"/>
               </a:spcAft>
               <a:buNone/>
             </a:pPr>
             <a:r>
-              <a:rPr lang="en-US" sz="950" b="1" dirty="0">
-                <a:solidFill>
-                  <a:srgbClr val="1B2A4A"/>
-                </a:solidFill>
-                <a:latin typeface="Arial" panose="020B0604020202090204" pitchFamily="34" charset="0"/>
-                <a:ea typeface="Arial" panose="020B0604020202090204" pitchFamily="34" charset="-122"/>
-                <a:cs typeface="Arial" panose="020B0604020202090204" pitchFamily="34" charset="-120"/>
-              </a:rPr>
-              <a:t>Pairwise Diversity (Within-group)</a:t>
-            </a:r>
-            <a:endParaRPr lang="en-US" sz="950" dirty="0"/>
-          </a:p>
-        </p:txBody>
-      </p:sp>
-      <p:sp>
-        <p:nvSpPr>
-          <p:cNvPr id="28" name="Text 26"/>
-          <p:cNvSpPr/>
-          <p:nvPr/>
-        </p:nvSpPr>
-        <p:spPr>
-          <a:xfrm>
-            <a:off x="5232202" y="1416993"/>
-            <a:ext cx="3368394" cy="258961"/>
+              <a:rPr lang="en-US" sz="1050" b="1" dirty="0">
+                <a:solidFill>
+                  <a:srgbClr val="E8505B"/>
+                </a:solidFill>
+                <a:latin typeface="Arial" panose="020B0604020202090204" pitchFamily="34" charset="0"/>
+                <a:ea typeface="Arial" panose="020B0604020202090204" pitchFamily="34" charset="-122"/>
+                <a:cs typeface="Arial" panose="020B0604020202090204" pitchFamily="34" charset="-120"/>
+              </a:rPr>
+              <a:t>Diversity (within-group)</a:t>
+            </a:r>
+            <a:endParaRPr lang="en-US" sz="1050" dirty="0"/>
+          </a:p>
+        </p:txBody>
+      </p:sp>
+      <p:sp>
+        <p:nvSpPr>
+          <p:cNvPr id="18" name="Text 16"/>
+          <p:cNvSpPr/>
+          <p:nvPr/>
+        </p:nvSpPr>
+        <p:spPr>
+          <a:xfrm>
+            <a:off x="660350" y="2470000"/>
+            <a:ext cx="3700000" cy="340000"/>
           </a:xfrm>
           <a:prstGeom prst="rect">
             <a:avLst/>
@@ -6241,22 +11838,382 @@
           <a:p>
             <a:pPr marL="0" indent="0" algn="l">
               <a:lnSpc>
-                <a:spcPts val="1020"/>
+                <a:spcPts val="1050"/>
               </a:lnSpc>
-              <a:buNone/>
-            </a:pPr>
-            <a:r>
-              <a:rPr lang="en-US" sz="850" dirty="0">
-                <a:solidFill>
-                  <a:srgbClr val="5D6D7E"/>
-                </a:solidFill>
-                <a:latin typeface="Arial" panose="020B0604020202090204" pitchFamily="34" charset="0"/>
-                <a:ea typeface="Arial" panose="020B0604020202090204" pitchFamily="34" charset="-122"/>
-                <a:cs typeface="Arial" panose="020B0604020202090204" pitchFamily="34" charset="-120"/>
-              </a:rPr>
-              <a:t>Within-group cosine distances between all pairs. Measures how different proposals are from each other.</a:t>
-            </a:r>
-            <a:endParaRPr lang="en-US" sz="850" dirty="0"/>
+              <a:spcAft>
+                <a:spcPts val="400"/>
+              </a:spcAft>
+              <a:buNone/>
+            </a:pPr>
+            <a:r>
+              <a:rPr lang="en-US" sz="800" dirty="0">
+                <a:solidFill>
+                  <a:srgbClr val="2C3E50"/>
+                </a:solidFill>
+                <a:latin typeface="Arial" panose="020B0604020202090204" pitchFamily="34" charset="0"/>
+                <a:ea typeface="Arial" panose="020B0604020202090204" pitchFamily="34" charset="-122"/>
+                <a:cs typeface="Arial" panose="020B0604020202090204" pitchFamily="34" charset="-120"/>
+              </a:rPr>
+              <a:t>How different are proposals from each other within the same group? Measured by cosine distances between proposal embeddings. Three complementary lenses: pairwise distances (all pairs), centroid dispersion (distance to group center), and nearest-neighbor analysis (closest proposal in the combined space). Answers: “Is this group producing varied ideas?”</a:t>
+            </a:r>
+            <a:endParaRPr lang="en-US" sz="800" dirty="0"/>
+          </a:p>
+        </p:txBody>
+      </p:sp>
+      <p:sp>
+        <p:nvSpPr>
+          <p:cNvPr id="19" name="Text 17"/>
+          <p:cNvSpPr/>
+          <p:nvPr/>
+        </p:nvSpPr>
+        <p:spPr>
+          <a:xfrm>
+            <a:off x="507950" y="2920000"/>
+            <a:ext cx="3951021" cy="580000"/>
+          </a:xfrm>
+          <a:prstGeom prst="roundRect">
+            <a:avLst>
+              <a:gd name="adj" fmla="val 3000"/>
+            </a:avLst>
+          </a:prstGeom>
+          <a:solidFill>
+            <a:srgbClr val="F7F9FC"/>
+          </a:solidFill>
+        </p:spPr>
+        <p:txBody>
+          <a:bodyPr wrap="square" rtlCol="0" anchor="ctr"/>
+          <a:lstStyle/>
+          <a:p>
+            <a:pPr marL="0" indent="0">
+              <a:buNone/>
+            </a:pPr>
+            <a:endParaRPr lang="en-US" dirty="0"/>
+          </a:p>
+        </p:txBody>
+      </p:sp>
+      <p:sp>
+        <p:nvSpPr>
+          <p:cNvPr id="20" name="Shape 18"/>
+          <p:cNvSpPr/>
+          <p:nvPr/>
+        </p:nvSpPr>
+        <p:spPr>
+          <a:xfrm>
+            <a:off x="507950" y="2939050"/>
+            <a:ext cx="3951021" cy="0"/>
+          </a:xfrm>
+          <a:prstGeom prst="line">
+            <a:avLst/>
+          </a:prstGeom>
+          <a:noFill/>
+          <a:ln w="38100">
+            <a:solidFill>
+              <a:srgbClr val="2E86AB"/>
+            </a:solidFill>
+            <a:prstDash val="solid"/>
+          </a:ln>
+        </p:spPr>
+      </p:sp>
+      <p:sp>
+        <p:nvSpPr>
+          <p:cNvPr id="21" name="Text 19"/>
+          <p:cNvSpPr/>
+          <p:nvPr/>
+        </p:nvSpPr>
+        <p:spPr>
+          <a:xfrm>
+            <a:off x="660350" y="2970000"/>
+            <a:ext cx="3700000" cy="150000"/>
+          </a:xfrm>
+          <a:prstGeom prst="rect">
+            <a:avLst/>
+          </a:prstGeom>
+          <a:noFill/>
+        </p:spPr>
+        <p:txBody>
+          <a:bodyPr wrap="square" lIns="0" tIns="0" rIns="0" bIns="0" rtlCol="0" anchor="t"/>
+          <a:lstStyle/>
+          <a:p>
+            <a:pPr marL="0" indent="0" algn="l">
+              <a:lnSpc>
+                <a:spcPts val="1400"/>
+              </a:lnSpc>
+              <a:spcAft>
+                <a:spcPts val="400"/>
+              </a:spcAft>
+              <a:buNone/>
+            </a:pPr>
+            <a:r>
+              <a:rPr lang="en-US" sz="1050" b="1" dirty="0">
+                <a:solidFill>
+                  <a:srgbClr val="2E86AB"/>
+                </a:solidFill>
+                <a:latin typeface="Arial" panose="020B0604020202090204" pitchFamily="34" charset="0"/>
+                <a:ea typeface="Arial" panose="020B0604020202090204" pitchFamily="34" charset="-122"/>
+                <a:cs typeface="Arial" panose="020B0604020202090204" pitchFamily="34" charset="-120"/>
+              </a:rPr>
+              <a:t>Novelty (vs. published literature)</a:t>
+            </a:r>
+            <a:endParaRPr lang="en-US" sz="1050" dirty="0"/>
+          </a:p>
+        </p:txBody>
+      </p:sp>
+      <p:sp>
+        <p:nvSpPr>
+          <p:cNvPr id="22" name="Text 20"/>
+          <p:cNvSpPr/>
+          <p:nvPr/>
+        </p:nvSpPr>
+        <p:spPr>
+          <a:xfrm>
+            <a:off x="660350" y="3130000"/>
+            <a:ext cx="3700000" cy="340000"/>
+          </a:xfrm>
+          <a:prstGeom prst="rect">
+            <a:avLst/>
+          </a:prstGeom>
+          <a:noFill/>
+        </p:spPr>
+        <p:txBody>
+          <a:bodyPr wrap="square" lIns="0" tIns="0" rIns="0" bIns="0" rtlCol="0" anchor="t"/>
+          <a:lstStyle/>
+          <a:p>
+            <a:pPr marL="0" indent="0" algn="l">
+              <a:lnSpc>
+                <a:spcPts val="1050"/>
+              </a:lnSpc>
+              <a:spcAft>
+                <a:spcPts val="400"/>
+              </a:spcAft>
+              <a:buNone/>
+            </a:pPr>
+            <a:r>
+              <a:rPr lang="en-US" sz="800" dirty="0">
+                <a:solidFill>
+                  <a:srgbClr val="2C3E50"/>
+                </a:solidFill>
+                <a:latin typeface="Arial" panose="020B0604020202090204" pitchFamily="34" charset="0"/>
+                <a:ea typeface="Arial" panose="020B0604020202090204" pitchFamily="34" charset="-122"/>
+                <a:cs typeface="Arial" panose="020B0604020202090204" pitchFamily="34" charset="-120"/>
+              </a:rPr>
+              <a:t>How far are proposals from what already exists in the scientific literature? Measured as mean cosine distance from each proposal to its 10 nearest neighbors in a corpus of 350 PubMed articles. Higher = more novel. Crucially different from diversity: a group can be internally diverse but still close to published work, or internally homogeneous but exploring genuinely new territory.</a:t>
+            </a:r>
+            <a:endParaRPr lang="en-US" sz="800" dirty="0"/>
+          </a:p>
+        </p:txBody>
+      </p:sp>
+      <p:sp>
+        <p:nvSpPr>
+          <p:cNvPr id="23" name="Text 21"/>
+          <p:cNvSpPr/>
+          <p:nvPr/>
+        </p:nvSpPr>
+        <p:spPr>
+          <a:xfrm>
+            <a:off x="507950" y="3580000"/>
+            <a:ext cx="3951021" cy="480000"/>
+          </a:xfrm>
+          <a:prstGeom prst="roundRect">
+            <a:avLst>
+              <a:gd name="adj" fmla="val 3000"/>
+            </a:avLst>
+          </a:prstGeom>
+          <a:solidFill>
+            <a:srgbClr val="F5F5F5"/>
+          </a:solidFill>
+        </p:spPr>
+        <p:txBody>
+          <a:bodyPr wrap="square" rtlCol="0" anchor="ctr"/>
+          <a:lstStyle/>
+          <a:p>
+            <a:pPr marL="0" indent="0">
+              <a:buNone/>
+            </a:pPr>
+            <a:endParaRPr lang="en-US" dirty="0"/>
+          </a:p>
+        </p:txBody>
+      </p:sp>
+      <p:sp>
+        <p:nvSpPr>
+          <p:cNvPr id="24" name="Shape 22"/>
+          <p:cNvSpPr/>
+          <p:nvPr/>
+        </p:nvSpPr>
+        <p:spPr>
+          <a:xfrm>
+            <a:off x="507950" y="3599050"/>
+            <a:ext cx="3951021" cy="0"/>
+          </a:xfrm>
+          <a:prstGeom prst="line">
+            <a:avLst/>
+          </a:prstGeom>
+          <a:noFill/>
+          <a:ln w="38100">
+            <a:solidFill>
+              <a:srgbClr val="16A085"/>
+            </a:solidFill>
+            <a:prstDash val="solid"/>
+          </a:ln>
+        </p:spPr>
+      </p:sp>
+      <p:sp>
+        <p:nvSpPr>
+          <p:cNvPr id="25" name="Text 23"/>
+          <p:cNvSpPr/>
+          <p:nvPr/>
+        </p:nvSpPr>
+        <p:spPr>
+          <a:xfrm>
+            <a:off x="660350" y="3630000"/>
+            <a:ext cx="3700000" cy="150000"/>
+          </a:xfrm>
+          <a:prstGeom prst="rect">
+            <a:avLst/>
+          </a:prstGeom>
+          <a:noFill/>
+        </p:spPr>
+        <p:txBody>
+          <a:bodyPr wrap="square" lIns="0" tIns="0" rIns="0" bIns="0" rtlCol="0" anchor="t"/>
+          <a:lstStyle/>
+          <a:p>
+            <a:pPr marL="0" indent="0" algn="l">
+              <a:lnSpc>
+                <a:spcPts val="1400"/>
+              </a:lnSpc>
+              <a:spcAft>
+                <a:spcPts val="400"/>
+              </a:spcAft>
+              <a:buNone/>
+            </a:pPr>
+            <a:r>
+              <a:rPr lang="en-US" sz="1050" b="1" dirty="0">
+                <a:solidFill>
+                  <a:srgbClr val="16A085"/>
+                </a:solidFill>
+                <a:latin typeface="Arial" panose="020B0604020202090204" pitchFamily="34" charset="0"/>
+                <a:ea typeface="Arial" panose="020B0604020202090204" pitchFamily="34" charset="-122"/>
+                <a:cs typeface="Arial" panose="020B0604020202090204" pitchFamily="34" charset="-120"/>
+              </a:rPr>
+              <a:t>Thematic Separation (topic &amp; cluster)</a:t>
+            </a:r>
+            <a:endParaRPr lang="en-US" sz="1050" dirty="0"/>
+          </a:p>
+        </p:txBody>
+      </p:sp>
+      <p:sp>
+        <p:nvSpPr>
+          <p:cNvPr id="26" name="Text 24"/>
+          <p:cNvSpPr/>
+          <p:nvPr/>
+        </p:nvSpPr>
+        <p:spPr>
+          <a:xfrm>
+            <a:off x="660350" y="3790000"/>
+            <a:ext cx="3700000" cy="240000"/>
+          </a:xfrm>
+          <a:prstGeom prst="rect">
+            <a:avLst/>
+          </a:prstGeom>
+          <a:noFill/>
+        </p:spPr>
+        <p:txBody>
+          <a:bodyPr wrap="square" lIns="0" tIns="0" rIns="0" bIns="0" rtlCol="0" anchor="t"/>
+          <a:lstStyle/>
+          <a:p>
+            <a:pPr marL="0" indent="0" algn="l">
+              <a:lnSpc>
+                <a:spcPts val="1050"/>
+              </a:lnSpc>
+              <a:spcAft>
+                <a:spcPts val="400"/>
+              </a:spcAft>
+              <a:buNone/>
+            </a:pPr>
+            <a:r>
+              <a:rPr lang="en-US" sz="800" dirty="0">
+                <a:solidFill>
+                  <a:srgbClr val="2C3E50"/>
+                </a:solidFill>
+                <a:latin typeface="Arial" panose="020B0604020202090204" pitchFamily="34" charset="0"/>
+                <a:ea typeface="Arial" panose="020B0604020202090204" pitchFamily="34" charset="-122"/>
+                <a:cs typeface="Arial" panose="020B0604020202090204" pitchFamily="34" charset="-120"/>
+              </a:rPr>
+              <a:t>Do human and AI proposals occupy the same conceptual regions? LDA topic modeling identifies latent themes; Gaussian Mixture Model clustering groups proposals by embedding similarity. Tests whether sources are segregated or intermingled.</a:t>
+            </a:r>
+            <a:endParaRPr lang="en-US" sz="800" dirty="0"/>
+          </a:p>
+        </p:txBody>
+      </p:sp>
+      <p:sp>
+        <p:nvSpPr>
+          <p:cNvPr id="27" name="Text 25"/>
+          <p:cNvSpPr/>
+          <p:nvPr/>
+        </p:nvSpPr>
+        <p:spPr>
+          <a:xfrm>
+            <a:off x="4762500" y="853827"/>
+            <a:ext cx="3951021" cy="200025"/>
+          </a:xfrm>
+          <a:prstGeom prst="rect">
+            <a:avLst/>
+          </a:prstGeom>
+          <a:noFill/>
+        </p:spPr>
+        <p:txBody>
+          <a:bodyPr wrap="square" lIns="0" tIns="0" rIns="0" bIns="0" rtlCol="0" anchor="t"/>
+          <a:lstStyle/>
+          <a:p>
+            <a:pPr marL="0" indent="0" algn="l">
+              <a:lnSpc>
+                <a:spcPts val="1285"/>
+              </a:lnSpc>
+              <a:spcAft>
+                <a:spcPts val="400"/>
+              </a:spcAft>
+              <a:buNone/>
+            </a:pPr>
+            <a:r>
+              <a:rPr lang="en-US" sz="1300" b="1" dirty="0">
+                <a:solidFill>
+                  <a:srgbClr val="1B2A4A"/>
+                </a:solidFill>
+                <a:latin typeface="Arial" panose="020B0604020202090204" pitchFamily="34" charset="0"/>
+                <a:ea typeface="Arial" panose="020B0604020202090204" pitchFamily="34" charset="-122"/>
+                <a:cs typeface="Arial" panose="020B0604020202090204" pitchFamily="34" charset="-120"/>
+              </a:rPr>
+              <a:t>Analysis Overview</a:t>
+            </a:r>
+            <a:endParaRPr lang="en-US" sz="1300" dirty="0"/>
+          </a:p>
+        </p:txBody>
+      </p:sp>
+      <p:sp>
+        <p:nvSpPr>
+          <p:cNvPr id="28" name="Text 26"/>
+          <p:cNvSpPr/>
+          <p:nvPr/>
+        </p:nvSpPr>
+        <p:spPr>
+          <a:xfrm>
+            <a:off x="4762500" y="1100000"/>
+            <a:ext cx="507950" cy="25301"/>
+          </a:xfrm>
+          <a:prstGeom prst="rect">
+            <a:avLst/>
+          </a:prstGeom>
+          <a:solidFill>
+            <a:srgbClr val="2E86AB"/>
+          </a:solidFill>
+        </p:spPr>
+        <p:txBody>
+          <a:bodyPr wrap="square" rtlCol="0" anchor="ctr"/>
+          <a:lstStyle/>
+          <a:p>
+            <a:pPr marL="0" indent="0">
+              <a:buNone/>
+            </a:pPr>
+            <a:endParaRPr lang="en-US" dirty="0"/>
           </a:p>
         </p:txBody>
       </p:sp>
@@ -6268,14 +12225,16 @@
         </p:nvSpPr>
         <p:spPr>
           <a:xfrm>
-            <a:off x="5092601" y="1815554"/>
-            <a:ext cx="3543449" cy="549176"/>
-          </a:xfrm>
-          <a:prstGeom prst="rect">
-            <a:avLst/>
+            <a:off x="4762500" y="1180000"/>
+            <a:ext cx="3873550" cy="720000"/>
+          </a:xfrm>
+          <a:prstGeom prst="roundRect">
+            <a:avLst>
+              <a:gd name="adj" fmla="val 3000"/>
+            </a:avLst>
           </a:prstGeom>
           <a:solidFill>
-            <a:srgbClr val="FDF8F8"/>
+            <a:srgbClr val="F0F4F8"/>
           </a:solidFill>
         </p:spPr>
         <p:txBody>
@@ -6297,8 +12256,8 @@
         </p:nvSpPr>
         <p:spPr>
           <a:xfrm>
-            <a:off x="5111651" y="1815554"/>
-            <a:ext cx="0" cy="549176"/>
+            <a:off x="4781550" y="1180000"/>
+            <a:ext cx="0" cy="720000"/>
           </a:xfrm>
           <a:prstGeom prst="line">
             <a:avLst/>
@@ -6320,8 +12279,8 @@
         </p:nvSpPr>
         <p:spPr>
           <a:xfrm>
-            <a:off x="5232202" y="1878955"/>
-            <a:ext cx="3368394" cy="150763"/>
+            <a:off x="4953000" y="1210000"/>
+            <a:ext cx="3600000" cy="150000"/>
           </a:xfrm>
           <a:prstGeom prst="rect">
             <a:avLst/>
@@ -6334,15 +12293,15 @@
           <a:p>
             <a:pPr marL="0" indent="0" algn="l">
               <a:lnSpc>
-                <a:spcPts val="1185"/>
+                <a:spcPts val="1400"/>
               </a:lnSpc>
               <a:spcAft>
-                <a:spcPts val="100"/>
+                <a:spcPts val="400"/>
               </a:spcAft>
               <a:buNone/>
             </a:pPr>
             <a:r>
-              <a:rPr lang="en-US" sz="950" b="1" dirty="0">
+              <a:rPr lang="en-US" sz="1000" b="1" dirty="0">
                 <a:solidFill>
                   <a:srgbClr val="1B2A4A"/>
                 </a:solidFill>
@@ -6350,9 +12309,9 @@
                 <a:ea typeface="Arial" panose="020B0604020202090204" pitchFamily="34" charset="-122"/>
                 <a:cs typeface="Arial" panose="020B0604020202090204" pitchFamily="34" charset="-120"/>
               </a:rPr>
-              <a:t>Centroid Dispersion (Within-group)</a:t>
-            </a:r>
-            <a:endParaRPr lang="en-US" sz="950" dirty="0"/>
+              <a:t>Part I: Diversity Analysis (Slides 4–7)</a:t>
+            </a:r>
+            <a:endParaRPr lang="en-US" sz="1000" dirty="0"/>
           </a:p>
         </p:txBody>
       </p:sp>
@@ -6364,8 +12323,8 @@
         </p:nvSpPr>
         <p:spPr>
           <a:xfrm>
-            <a:off x="5232202" y="2042368"/>
-            <a:ext cx="3368394" cy="258961"/>
+            <a:off x="4953000" y="1380000"/>
+            <a:ext cx="3600000" cy="460000"/>
           </a:xfrm>
           <a:prstGeom prst="rect">
             <a:avLst/>
@@ -6378,22 +12337,28 @@
           <a:p>
             <a:pPr marL="0" indent="0" algn="l">
               <a:lnSpc>
-                <a:spcPts val="1020"/>
+                <a:spcPts val="1050"/>
               </a:lnSpc>
-              <a:buNone/>
-            </a:pPr>
-            <a:r>
-              <a:rPr lang="en-US" sz="850" dirty="0">
-                <a:solidFill>
-                  <a:srgbClr val="5D6D7E"/>
-                </a:solidFill>
-                <a:latin typeface="Arial" panose="020B0604020202090204" pitchFamily="34" charset="0"/>
-                <a:ea typeface="Arial" panose="020B0604020202090204" pitchFamily="34" charset="-122"/>
-                <a:cs typeface="Arial" panose="020B0604020202090204" pitchFamily="34" charset="-120"/>
-              </a:rPr>
-              <a:t>Distance from each proposal to its group centroid. Measures spread around central tendency.</a:t>
-            </a:r>
-            <a:endParaRPr lang="en-US" sz="850" dirty="0"/>
+              <a:spcAft>
+                <a:spcPts val="400"/>
+              </a:spcAft>
+              <a:buNone/>
+            </a:pPr>
+            <a:r>
+              <a:rPr lang="en-US" sz="800" dirty="0">
+                <a:solidFill>
+                  <a:srgbClr val="2C3E50"/>
+                </a:solidFill>
+                <a:latin typeface="Arial" panose="020B0604020202090204" pitchFamily="34" charset="0"/>
+                <a:ea typeface="Arial" panose="020B0604020202090204" pitchFamily="34" charset="-122"/>
+                <a:cs typeface="Arial" panose="020B0604020202090204" pitchFamily="34" charset="-120"/>
+              </a:rPr>
+              <a:t>• Pairwise distances — all n(n−1)/2 pairs within each group
+• Centroid dispersion — distance from each proposal to group mean
+• Nearest-neighbor — closest proposal in combined 92-proposal space
+• Embedding visualization — UMAP 2D projection</a:t>
+            </a:r>
+            <a:endParaRPr lang="en-US" sz="800" dirty="0"/>
           </a:p>
         </p:txBody>
       </p:sp>
@@ -6405,14 +12370,16 @@
         </p:nvSpPr>
         <p:spPr>
           <a:xfrm>
-            <a:off x="5092601" y="2440930"/>
-            <a:ext cx="3543449" cy="549176"/>
-          </a:xfrm>
-          <a:prstGeom prst="rect">
-            <a:avLst/>
+            <a:off x="4762500" y="1980000"/>
+            <a:ext cx="3873550" cy="650000"/>
+          </a:xfrm>
+          <a:prstGeom prst="roundRect">
+            <a:avLst>
+              <a:gd name="adj" fmla="val 3000"/>
+            </a:avLst>
           </a:prstGeom>
           <a:solidFill>
-            <a:srgbClr val="FDF8F8"/>
+            <a:srgbClr val="F0F4F8"/>
           </a:solidFill>
         </p:spPr>
         <p:txBody>
@@ -6434,8 +12401,8 @@
         </p:nvSpPr>
         <p:spPr>
           <a:xfrm>
-            <a:off x="5111651" y="2440930"/>
-            <a:ext cx="0" cy="549176"/>
+            <a:off x="4781550" y="1980000"/>
+            <a:ext cx="0" cy="650000"/>
           </a:xfrm>
           <a:prstGeom prst="line">
             <a:avLst/>
@@ -6443,7 +12410,7 @@
           <a:noFill/>
           <a:ln w="38100">
             <a:solidFill>
-              <a:srgbClr val="E8505B"/>
+              <a:srgbClr val="2E86AB"/>
             </a:solidFill>
             <a:prstDash val="solid"/>
           </a:ln>
@@ -6457,8 +12424,8 @@
         </p:nvSpPr>
         <p:spPr>
           <a:xfrm>
-            <a:off x="5232202" y="2504331"/>
-            <a:ext cx="3368394" cy="150763"/>
+            <a:off x="4953000" y="2010000"/>
+            <a:ext cx="3600000" cy="150000"/>
           </a:xfrm>
           <a:prstGeom prst="rect">
             <a:avLst/>
@@ -6471,15 +12438,15 @@
           <a:p>
             <a:pPr marL="0" indent="0" algn="l">
               <a:lnSpc>
-                <a:spcPts val="1185"/>
+                <a:spcPts val="1400"/>
               </a:lnSpc>
               <a:spcAft>
-                <a:spcPts val="100"/>
+                <a:spcPts val="400"/>
               </a:spcAft>
               <a:buNone/>
             </a:pPr>
             <a:r>
-              <a:rPr lang="en-US" sz="950" b="1" dirty="0">
+              <a:rPr lang="en-US" sz="1000" b="1" dirty="0">
                 <a:solidFill>
                   <a:srgbClr val="1B2A4A"/>
                 </a:solidFill>
@@ -6487,9 +12454,9 @@
                 <a:ea typeface="Arial" panose="020B0604020202090204" pitchFamily="34" charset="-122"/>
                 <a:cs typeface="Arial" panose="020B0604020202090204" pitchFamily="34" charset="-120"/>
               </a:rPr>
-              <a:t>Nearest-Neighbor Outlier Detection (Between-group)</a:t>
-            </a:r>
-            <a:endParaRPr lang="en-US" sz="950" dirty="0"/>
+              <a:t>Part II: Novelty Analysis (Slides 8–9)</a:t>
+            </a:r>
+            <a:endParaRPr lang="en-US" sz="1000" dirty="0"/>
           </a:p>
         </p:txBody>
       </p:sp>
@@ -6501,8 +12468,8 @@
         </p:nvSpPr>
         <p:spPr>
           <a:xfrm>
-            <a:off x="5232202" y="2667744"/>
-            <a:ext cx="3368394" cy="258961"/>
+            <a:off x="4953000" y="2180000"/>
+            <a:ext cx="3600000" cy="400000"/>
           </a:xfrm>
           <a:prstGeom prst="rect">
             <a:avLst/>
@@ -6515,22 +12482,28 @@
           <a:p>
             <a:pPr marL="0" indent="0" algn="l">
               <a:lnSpc>
-                <a:spcPts val="1020"/>
+                <a:spcPts val="1050"/>
               </a:lnSpc>
-              <a:buNone/>
-            </a:pPr>
-            <a:r>
-              <a:rPr lang="en-US" sz="850" dirty="0">
-                <a:solidFill>
-                  <a:srgbClr val="5D6D7E"/>
-                </a:solidFill>
-                <a:latin typeface="Arial" panose="020B0604020202090204" pitchFamily="34" charset="0"/>
-                <a:ea typeface="Arial" panose="020B0604020202090204" pitchFamily="34" charset="-122"/>
-                <a:cs typeface="Arial" panose="020B0604020202090204" pitchFamily="34" charset="-120"/>
-              </a:rPr>
-              <a:t>NN distance in combined space (92 proposals). Top 10% = outliers. Tracks which group NN belongs to.</a:t>
-            </a:r>
-            <a:endParaRPr lang="en-US" sz="850" dirty="0"/>
+              <a:spcAft>
+                <a:spcPts val="400"/>
+              </a:spcAft>
+              <a:buNone/>
+            </a:pPr>
+            <a:r>
+              <a:rPr lang="en-US" sz="800" dirty="0">
+                <a:solidFill>
+                  <a:srgbClr val="2C3E50"/>
+                </a:solidFill>
+                <a:latin typeface="Arial" panose="020B0604020202090204" pitchFamily="34" charset="0"/>
+                <a:ea typeface="Arial" panose="020B0604020202090204" pitchFamily="34" charset="-122"/>
+                <a:cs typeface="Arial" panose="020B0604020202090204" pitchFamily="34" charset="-120"/>
+              </a:rPr>
+              <a:t>• Literature corpus: 350 PubMed articles from 7 search queries
+• Novelty score: mean distance to k=10 nearest neighbors in literature
+• Compares title+abstract embeddings (fair comparison with abstracts)
+• Statistical tests: same non-parametric framework as Part I</a:t>
+            </a:r>
+            <a:endParaRPr lang="en-US" sz="800" dirty="0"/>
           </a:p>
         </p:txBody>
       </p:sp>
@@ -6542,8 +12515,62 @@
         </p:nvSpPr>
         <p:spPr>
           <a:xfrm>
-            <a:off x="5092601" y="3104406"/>
-            <a:ext cx="3614318" cy="134838"/>
+            <a:off x="4762500" y="2710000"/>
+            <a:ext cx="3873550" cy="680000"/>
+          </a:xfrm>
+          <a:prstGeom prst="roundRect">
+            <a:avLst>
+              <a:gd name="adj" fmla="val 3000"/>
+            </a:avLst>
+          </a:prstGeom>
+          <a:solidFill>
+            <a:srgbClr val="F0F4F8"/>
+          </a:solidFill>
+        </p:spPr>
+        <p:txBody>
+          <a:bodyPr wrap="square" rtlCol="0" anchor="ctr"/>
+          <a:lstStyle/>
+          <a:p>
+            <a:pPr marL="0" indent="0">
+              <a:buNone/>
+            </a:pPr>
+            <a:endParaRPr lang="en-US" dirty="0"/>
+          </a:p>
+        </p:txBody>
+      </p:sp>
+      <p:sp>
+        <p:nvSpPr>
+          <p:cNvPr id="38" name="Shape 36"/>
+          <p:cNvSpPr/>
+          <p:nvPr/>
+        </p:nvSpPr>
+        <p:spPr>
+          <a:xfrm>
+            <a:off x="4781550" y="2710000"/>
+            <a:ext cx="0" cy="680000"/>
+          </a:xfrm>
+          <a:prstGeom prst="line">
+            <a:avLst/>
+          </a:prstGeom>
+          <a:noFill/>
+          <a:ln w="38100">
+            <a:solidFill>
+              <a:srgbClr val="16A085"/>
+            </a:solidFill>
+            <a:prstDash val="solid"/>
+          </a:ln>
+        </p:spPr>
+      </p:sp>
+      <p:sp>
+        <p:nvSpPr>
+          <p:cNvPr id="39" name="Text 37"/>
+          <p:cNvSpPr/>
+          <p:nvPr/>
+        </p:nvSpPr>
+        <p:spPr>
+          <a:xfrm>
+            <a:off x="4953000" y="2740000"/>
+            <a:ext cx="3600000" cy="150000"/>
           </a:xfrm>
           <a:prstGeom prst="rect">
             <a:avLst/>
@@ -6556,26 +12583,189 @@
           <a:p>
             <a:pPr marL="0" indent="0" algn="l">
               <a:lnSpc>
-                <a:spcPts val="1065"/>
+                <a:spcPts val="1400"/>
               </a:lnSpc>
-              <a:spcBef>
-                <a:spcPts val="600"/>
-              </a:spcBef>
               <a:spcAft>
-                <a:spcPts val="300"/>
+                <a:spcPts val="400"/>
               </a:spcAft>
               <a:buNone/>
             </a:pPr>
             <a:r>
+              <a:rPr lang="en-US" sz="1000" b="1" dirty="0">
+                <a:solidFill>
+                  <a:srgbClr val="1B2A4A"/>
+                </a:solidFill>
+                <a:latin typeface="Arial" panose="020B0604020202090204" pitchFamily="34" charset="0"/>
+                <a:ea typeface="Arial" panose="020B0604020202090204" pitchFamily="34" charset="-122"/>
+                <a:cs typeface="Arial" panose="020B0604020202090204" pitchFamily="34" charset="-120"/>
+              </a:rPr>
+              <a:t>Part III: Thematic &amp; Cluster Analysis (Slides 10–11)</a:t>
+            </a:r>
+            <a:endParaRPr lang="en-US" sz="1000" dirty="0"/>
+          </a:p>
+        </p:txBody>
+      </p:sp>
+      <p:sp>
+        <p:nvSpPr>
+          <p:cNvPr id="40" name="Text 38"/>
+          <p:cNvSpPr/>
+          <p:nvPr/>
+        </p:nvSpPr>
+        <p:spPr>
+          <a:xfrm>
+            <a:off x="4953000" y="2910000"/>
+            <a:ext cx="3600000" cy="430000"/>
+          </a:xfrm>
+          <a:prstGeom prst="rect">
+            <a:avLst/>
+          </a:prstGeom>
+          <a:noFill/>
+        </p:spPr>
+        <p:txBody>
+          <a:bodyPr wrap="square" lIns="0" tIns="0" rIns="0" bIns="0" rtlCol="0" anchor="t"/>
+          <a:lstStyle/>
+          <a:p>
+            <a:pPr marL="0" indent="0" algn="l">
+              <a:lnSpc>
+                <a:spcPts val="1050"/>
+              </a:lnSpc>
+              <a:spcAft>
+                <a:spcPts val="400"/>
+              </a:spcAft>
+              <a:buNone/>
+            </a:pPr>
+            <a:r>
+              <a:rPr lang="en-US" sz="800" dirty="0">
+                <a:solidFill>
+                  <a:srgbClr val="2C3E50"/>
+                </a:solidFill>
+                <a:latin typeface="Arial" panose="020B0604020202090204" pitchFamily="34" charset="0"/>
+                <a:ea typeface="Arial" panose="020B0604020202090204" pitchFamily="34" charset="-122"/>
+                <a:cs typeface="Arial" panose="020B0604020202090204" pitchFamily="34" charset="-120"/>
+              </a:rPr>
+              <a:t>• LDA topic modeling (k=5, strong priors, stability-validated)
+• Topic distribution: Fisher’s exact tests with FDR correction
+• GMM clustering (k=3, selected by BIC)
+• Segregation metrics: NMI, ARI, between/within distance ratio</a:t>
+            </a:r>
+            <a:endParaRPr lang="en-US" sz="800" dirty="0"/>
+          </a:p>
+        </p:txBody>
+      </p:sp>
+      <p:sp>
+        <p:nvSpPr>
+          <p:cNvPr id="41" name="Text 39"/>
+          <p:cNvSpPr/>
+          <p:nvPr/>
+        </p:nvSpPr>
+        <p:spPr>
+          <a:xfrm>
+            <a:off x="4762500" y="3490000"/>
+            <a:ext cx="3873550" cy="580000"/>
+          </a:xfrm>
+          <a:prstGeom prst="roundRect">
+            <a:avLst>
+              <a:gd name="adj" fmla="val 3000"/>
+            </a:avLst>
+          </a:prstGeom>
+          <a:solidFill>
+            <a:srgbClr val="1B2A4A"/>
+          </a:solidFill>
+        </p:spPr>
+        <p:txBody>
+          <a:bodyPr wrap="square" rtlCol="0" anchor="ctr"/>
+          <a:lstStyle/>
+          <a:p>
+            <a:pPr marL="0" indent="0">
+              <a:buNone/>
+            </a:pPr>
+            <a:endParaRPr lang="en-US" dirty="0"/>
+          </a:p>
+        </p:txBody>
+      </p:sp>
+      <p:sp>
+        <p:nvSpPr>
+          <p:cNvPr id="42" name="Text 40"/>
+          <p:cNvSpPr/>
+          <p:nvPr/>
+        </p:nvSpPr>
+        <p:spPr>
+          <a:xfrm>
+            <a:off x="4914900" y="3530000"/>
+            <a:ext cx="3600000" cy="150000"/>
+          </a:xfrm>
+          <a:prstGeom prst="rect">
+            <a:avLst/>
+          </a:prstGeom>
+          <a:noFill/>
+        </p:spPr>
+        <p:txBody>
+          <a:bodyPr wrap="square" lIns="0" tIns="0" rIns="0" bIns="0" rtlCol="0" anchor="t"/>
+          <a:lstStyle/>
+          <a:p>
+            <a:pPr marL="0" indent="0" algn="l">
+              <a:lnSpc>
+                <a:spcPts val="1400"/>
+              </a:lnSpc>
+              <a:spcAft>
+                <a:spcPts val="400"/>
+              </a:spcAft>
+              <a:buNone/>
+            </a:pPr>
+            <a:r>
+              <a:rPr lang="en-US" sz="1050" b="1" dirty="0">
+                <a:solidFill>
+                  <a:srgbClr val="FFFFFF"/>
+                </a:solidFill>
+                <a:latin typeface="Arial" panose="020B0604020202090204" pitchFamily="34" charset="0"/>
+                <a:ea typeface="Arial" panose="020B0604020202090204" pitchFamily="34" charset="-122"/>
+                <a:cs typeface="Arial" panose="020B0604020202090204" pitchFamily="34" charset="-120"/>
+              </a:rPr>
+              <a:t>Why three separate analyses?</a:t>
+            </a:r>
+            <a:endParaRPr lang="en-US" sz="1050" dirty="0"/>
+          </a:p>
+        </p:txBody>
+      </p:sp>
+      <p:sp>
+        <p:nvSpPr>
+          <p:cNvPr id="43" name="Text 41"/>
+          <p:cNvSpPr/>
+          <p:nvPr/>
+        </p:nvSpPr>
+        <p:spPr>
+          <a:xfrm>
+            <a:off x="4914900" y="3700000"/>
+            <a:ext cx="3600000" cy="320000"/>
+          </a:xfrm>
+          <a:prstGeom prst="rect">
+            <a:avLst/>
+          </a:prstGeom>
+          <a:noFill/>
+        </p:spPr>
+        <p:txBody>
+          <a:bodyPr wrap="square" lIns="0" tIns="0" rIns="0" bIns="0" rtlCol="0" anchor="t"/>
+          <a:lstStyle/>
+          <a:p>
+            <a:pPr marL="0" indent="0" algn="l">
+              <a:lnSpc>
+                <a:spcPts val="1100"/>
+              </a:lnSpc>
+              <a:spcAft>
+                <a:spcPts val="400"/>
+              </a:spcAft>
+              <a:buNone/>
+            </a:pPr>
+            <a:r>
               <a:rPr lang="en-US" sz="850" dirty="0">
                 <a:solidFill>
-                  <a:srgbClr val="5D6D7E"/>
-                </a:solidFill>
-                <a:latin typeface="Arial" panose="020B0604020202090204" pitchFamily="34" charset="0"/>
-                <a:ea typeface="Arial" panose="020B0604020202090204" pitchFamily="34" charset="-122"/>
-                <a:cs typeface="Arial" panose="020B0604020202090204" pitchFamily="34" charset="-120"/>
-              </a:rPr>
-              <a:t>Consistent findings across all three analyses strengthens conclusions.</a:t>
+                  <a:srgbClr val="B0C4DE"/>
+                </a:solidFill>
+                <a:latin typeface="Arial" panose="020B0604020202090204" pitchFamily="34" charset="0"/>
+                <a:ea typeface="Arial" panose="020B0604020202090204" pitchFamily="34" charset="-122"/>
+                <a:cs typeface="Arial" panose="020B0604020202090204" pitchFamily="34" charset="-120"/>
+              </a:rPr>
+              <a:t>Diversity asks: “Are the ideas varied?” Novelty asks: “Are they new relative to the field?” Thematic analysis asks: “Are they about the same things?” A model can score high on one and low on another — these dimensions are complementary, not redundant.</a:t>
             </a:r>
             <a:endParaRPr lang="en-US" sz="850" dirty="0"/>
           </a:p>
